--- a/test/test-zh.pptx
+++ b/test/test-zh.pptx
@@ -1,18 +1,18 @@
 
 <file path=ppt/presentation.xml><?xml version="1.0" encoding="utf-8"?>
-<p:presentation xmlns:a="http://schemas.openxmlformats.org/drawingml/2006/main" xmlns:r="http://schemas.openxmlformats.org/officeDocument/2006/relationships" xmlns:p="http://schemas.openxmlformats.org/presentationml/2006/main" saveSubsetFonts="1">
+<p:presentation xmlns:a="http://schemas.openxmlformats.org/drawingml/2006/main" xmlns:r="http://schemas.openxmlformats.org/officeDocument/2006/relationships" xmlns:p="http://schemas.openxmlformats.org/presentationml/2006/main">
   <p:sldMasterIdLst>
-    <p:sldMasterId id="2147483651" r:id="rId1"/>
-    <p:sldMasterId id="2147483673" r:id="rId2"/>
+    <p:sldMasterId id="2147483648" r:id="rId1"/>
+    <p:sldMasterId id="2147483668" r:id="rId3"/>
   </p:sldMasterIdLst>
   <p:notesMasterIdLst>
-    <p:notesMasterId r:id="rId7"/>
+    <p:notesMasterId r:id="rId5"/>
   </p:notesMasterIdLst>
   <p:sldIdLst>
-    <p:sldId id="362" r:id="rId3"/>
-    <p:sldId id="366" r:id="rId4"/>
-    <p:sldId id="364" r:id="rId5"/>
-    <p:sldId id="365" r:id="rId6"/>
+    <p:sldId id="362" r:id="rId4"/>
+    <p:sldId id="366" r:id="rId6"/>
+    <p:sldId id="364" r:id="rId7"/>
+    <p:sldId id="365" r:id="rId8"/>
   </p:sldIdLst>
   <p:sldSz cx="12192000" cy="6858000"/>
   <p:notesSz cx="6858000" cy="9144000"/>
@@ -212,7 +212,6 @@
           <a:p>
             <a:fld id="{4AAAF045-FEF6-43EA-9CDC-C84FC3F85E9C}" type="datetimeFigureOut">
               <a:rPr lang="en-US" smtClean="0"/>
-              <a:t>2/14/25</a:t>
             </a:fld>
             <a:endParaRPr lang="en-US"/>
           </a:p>
@@ -279,6 +278,7 @@
               <a:rPr lang="en-US"/>
               <a:t>Click to edit Master text styles</a:t>
             </a:r>
+            <a:endParaRPr lang="en-US"/>
           </a:p>
           <a:p>
             <a:pPr lvl="1"/>
@@ -286,6 +286,7 @@
               <a:rPr lang="en-US"/>
               <a:t>Second level</a:t>
             </a:r>
+            <a:endParaRPr lang="en-US"/>
           </a:p>
           <a:p>
             <a:pPr lvl="2"/>
@@ -293,6 +294,7 @@
               <a:rPr lang="en-US"/>
               <a:t>Third level</a:t>
             </a:r>
+            <a:endParaRPr lang="en-US"/>
           </a:p>
           <a:p>
             <a:pPr lvl="3"/>
@@ -300,6 +302,7 @@
               <a:rPr lang="en-US"/>
               <a:t>Fourth level</a:t>
             </a:r>
+            <a:endParaRPr lang="en-US"/>
           </a:p>
           <a:p>
             <a:pPr lvl="4"/>
@@ -307,6 +310,7 @@
               <a:rPr lang="en-US"/>
               <a:t>Fifth level</a:t>
             </a:r>
+            <a:endParaRPr lang="en-US"/>
           </a:p>
         </p:txBody>
       </p:sp>
@@ -370,18 +374,12 @@
           <a:p>
             <a:fld id="{652F1279-6CE4-4169-83D3-4483097B6907}" type="slidenum">
               <a:rPr lang="en-US" smtClean="0"/>
-              <a:t>‹#›</a:t>
             </a:fld>
             <a:endParaRPr lang="en-US"/>
           </a:p>
         </p:txBody>
       </p:sp>
     </p:spTree>
-    <p:extLst>
-      <p:ext uri="{BB962C8B-B14F-4D97-AF65-F5344CB8AC3E}">
-        <p14:creationId xmlns:p14="http://schemas.microsoft.com/office/powerpoint/2010/main" val="1405589901"/>
-      </p:ext>
-    </p:extLst>
   </p:cSld>
   <p:clrMap bg1="lt1" tx1="dk1" bg2="lt2" tx2="dk2" accent1="accent1" accent2="accent2" accent3="accent3" accent4="accent4" accent5="accent5" accent6="accent6" hlink="hlink" folHlink="folHlink"/>
   <p:notesStyle>
@@ -583,8 +581,9 @@
             </a:r>
             <a:r>
               <a:rPr lang="zh-CN" altLang="en-US" dirty="0"/>
-              <a:t>。它非常适合教育工作者、营销人员和内容创作者增强演示效果。并且扩大目标受众，</a:t>
+              <a:t>。它非常适合教育工作者、营销人员和内容创作者增强演示效果。</a:t>
             </a:r>
+            <a:endParaRPr lang="zh-CN" altLang="en-US" dirty="0"/>
           </a:p>
         </p:txBody>
       </p:sp>
@@ -605,18 +604,12 @@
           <a:p>
             <a:fld id="{652F1279-6CE4-4169-83D3-4483097B6907}" type="slidenum">
               <a:rPr lang="en-US" smtClean="0"/>
-              <a:t>1</a:t>
             </a:fld>
             <a:endParaRPr lang="en-US"/>
           </a:p>
         </p:txBody>
       </p:sp>
     </p:spTree>
-    <p:extLst>
-      <p:ext uri="{BB962C8B-B14F-4D97-AF65-F5344CB8AC3E}">
-        <p14:creationId xmlns:p14="http://schemas.microsoft.com/office/powerpoint/2010/main" val="2948278935"/>
-      </p:ext>
-    </p:extLst>
   </p:cSld>
   <p:clrMapOvr>
     <a:masterClrMapping/>
@@ -696,6 +689,7 @@
               <a:rPr lang="zh-CN" altLang="en-US" dirty="0"/>
               <a:t>配音，自动创建字幕以增强可读性，并允许您根据个人偏好调整旁白速度、声音和视频质量。</a:t>
             </a:r>
+            <a:endParaRPr lang="zh-CN" altLang="en-US" dirty="0"/>
           </a:p>
         </p:txBody>
       </p:sp>
@@ -716,18 +710,12 @@
           <a:p>
             <a:fld id="{652F1279-6CE4-4169-83D3-4483097B6907}" type="slidenum">
               <a:rPr lang="en-US" smtClean="0"/>
-              <a:t>2</a:t>
             </a:fld>
             <a:endParaRPr lang="en-US"/>
           </a:p>
         </p:txBody>
       </p:sp>
     </p:spTree>
-    <p:extLst>
-      <p:ext uri="{BB962C8B-B14F-4D97-AF65-F5344CB8AC3E}">
-        <p14:creationId xmlns:p14="http://schemas.microsoft.com/office/powerpoint/2010/main" val="2588149408"/>
-      </p:ext>
-    </p:extLst>
   </p:cSld>
   <p:clrMapOvr>
     <a:masterClrMapping/>
@@ -800,7 +788,6 @@
               <a:buSzTx/>
               <a:buFontTx/>
               <a:buNone/>
-              <a:tabLst/>
               <a:defRPr/>
             </a:pPr>
             <a:r>
@@ -875,6 +862,13 @@
               </a:rPr>
               <a:t>第四，播放视频，确保视听效果符合预期。</a:t>
             </a:r>
+            <a:endParaRPr lang="zh-CN" altLang="en-US" b="0" i="0" dirty="0">
+              <a:solidFill>
+                <a:srgbClr val="111827"/>
+              </a:solidFill>
+              <a:effectLst/>
+              <a:latin typeface="ui-sans-serif"/>
+            </a:endParaRPr>
           </a:p>
         </p:txBody>
       </p:sp>
@@ -895,18 +889,12 @@
           <a:p>
             <a:fld id="{652F1279-6CE4-4169-83D3-4483097B6907}" type="slidenum">
               <a:rPr lang="en-US" smtClean="0"/>
-              <a:t>3</a:t>
             </a:fld>
             <a:endParaRPr lang="en-US"/>
           </a:p>
         </p:txBody>
       </p:sp>
     </p:spTree>
-    <p:extLst>
-      <p:ext uri="{BB962C8B-B14F-4D97-AF65-F5344CB8AC3E}">
-        <p14:creationId xmlns:p14="http://schemas.microsoft.com/office/powerpoint/2010/main" val="236001901"/>
-      </p:ext>
-    </p:extLst>
   </p:cSld>
   <p:clrMapOvr>
     <a:masterClrMapping/>
@@ -962,6 +950,7 @@
               <a:rPr lang="zh-CN" altLang="en-US" dirty="0"/>
               <a:t>我们诚邀您定期访问我们的官方网站，以获取最新的更新、新闻和动态，也欢迎您与我们联系。</a:t>
             </a:r>
+            <a:endParaRPr lang="zh-CN" altLang="en-US" dirty="0"/>
           </a:p>
         </p:txBody>
       </p:sp>
@@ -982,18 +971,12 @@
           <a:p>
             <a:fld id="{652F1279-6CE4-4169-83D3-4483097B6907}" type="slidenum">
               <a:rPr lang="en-US" smtClean="0"/>
-              <a:t>4</a:t>
             </a:fld>
             <a:endParaRPr lang="en-US"/>
           </a:p>
         </p:txBody>
       </p:sp>
     </p:spTree>
-    <p:extLst>
-      <p:ext uri="{BB962C8B-B14F-4D97-AF65-F5344CB8AC3E}">
-        <p14:creationId xmlns:p14="http://schemas.microsoft.com/office/powerpoint/2010/main" val="270717554"/>
-      </p:ext>
-    </p:extLst>
   </p:cSld>
   <p:clrMapOvr>
     <a:masterClrMapping/>
@@ -1020,13 +1003,7 @@
       </p:grpSpPr>
       <p:sp>
         <p:nvSpPr>
-          <p:cNvPr id="2" name="Text Placeholder 9">
-            <a:extLst>
-              <a:ext uri="{FF2B5EF4-FFF2-40B4-BE49-F238E27FC236}">
-                <a16:creationId xmlns:a16="http://schemas.microsoft.com/office/drawing/2014/main" id="{23DE32A5-6181-4C51-AD5C-3F1A448478A1}"/>
-              </a:ext>
-            </a:extLst>
-          </p:cNvPr>
+          <p:cNvPr id="2" name="Text Placeholder 9"/>
           <p:cNvSpPr>
             <a:spLocks noGrp="1"/>
           </p:cNvSpPr>
@@ -1056,7 +1033,7 @@
                   </a:schemeClr>
                 </a:solidFill>
                 <a:latin typeface="+mj-lt"/>
-                <a:cs typeface="Arial" pitchFamily="34" charset="0"/>
+                <a:cs typeface="Arial" panose="020B0604020202020204" pitchFamily="34" charset="0"/>
               </a:defRPr>
             </a:lvl1pPr>
           </a:lstStyle>
@@ -1066,15 +1043,11 @@
               <a:rPr lang="en-US" altLang="ko-KR" dirty="0"/>
               <a:t>BASIC LAYOUT</a:t>
             </a:r>
+            <a:endParaRPr lang="en-US" altLang="ko-KR" dirty="0"/>
           </a:p>
         </p:txBody>
       </p:sp>
     </p:spTree>
-    <p:extLst>
-      <p:ext uri="{BB962C8B-B14F-4D97-AF65-F5344CB8AC3E}">
-        <p14:creationId xmlns:p14="http://schemas.microsoft.com/office/powerpoint/2010/main" val="1899324262"/>
-      </p:ext>
-    </p:extLst>
   </p:cSld>
   <p:clrMapOvr>
     <a:masterClrMapping/>
@@ -1114,11 +1087,6 @@
         </a:xfrm>
       </p:grpSpPr>
     </p:spTree>
-    <p:extLst>
-      <p:ext uri="{BB962C8B-B14F-4D97-AF65-F5344CB8AC3E}">
-        <p14:creationId xmlns:p14="http://schemas.microsoft.com/office/powerpoint/2010/main" val="648684626"/>
-      </p:ext>
-    </p:extLst>
   </p:cSld>
   <p:clrMapOvr>
     <a:masterClrMapping/>
@@ -1145,13 +1113,7 @@
       </p:grpSpPr>
       <p:sp>
         <p:nvSpPr>
-          <p:cNvPr id="2" name="직사각형 7">
-            <a:extLst>
-              <a:ext uri="{FF2B5EF4-FFF2-40B4-BE49-F238E27FC236}">
-                <a16:creationId xmlns:a16="http://schemas.microsoft.com/office/drawing/2014/main" id="{37525922-EB17-4CEB-8FE2-E234D478EA8C}"/>
-              </a:ext>
-            </a:extLst>
-          </p:cNvPr>
+          <p:cNvPr id="2" name="직사각형 7"/>
           <p:cNvSpPr/>
           <p:nvPr userDrawn="1"/>
         </p:nvSpPr>
@@ -1194,13 +1156,7 @@
       </p:sp>
       <p:sp>
         <p:nvSpPr>
-          <p:cNvPr id="3" name="그림 개체 틀 6">
-            <a:extLst>
-              <a:ext uri="{FF2B5EF4-FFF2-40B4-BE49-F238E27FC236}">
-                <a16:creationId xmlns:a16="http://schemas.microsoft.com/office/drawing/2014/main" id="{0A0D5A86-3F87-4A81-BB86-8F3A92B48B5A}"/>
-              </a:ext>
-            </a:extLst>
-          </p:cNvPr>
+          <p:cNvPr id="3" name="그림 개체 틀 6"/>
           <p:cNvSpPr>
             <a:spLocks noGrp="1"/>
           </p:cNvSpPr>
@@ -1309,7 +1265,7 @@
                   </a:schemeClr>
                 </a:solidFill>
                 <a:latin typeface="+mn-lt"/>
-                <a:cs typeface="Arial" pitchFamily="34" charset="0"/>
+                <a:cs typeface="Arial" panose="020B0604020202020204" pitchFamily="34" charset="0"/>
               </a:defRPr>
             </a:lvl1pPr>
           </a:lstStyle>
@@ -1323,11 +1279,6 @@
         </p:txBody>
       </p:sp>
     </p:spTree>
-    <p:extLst>
-      <p:ext uri="{BB962C8B-B14F-4D97-AF65-F5344CB8AC3E}">
-        <p14:creationId xmlns:p14="http://schemas.microsoft.com/office/powerpoint/2010/main" val="3918837966"/>
-      </p:ext>
-    </p:extLst>
   </p:cSld>
   <p:clrMapOvr>
     <a:masterClrMapping/>
@@ -1367,11 +1318,6 @@
         </a:xfrm>
       </p:grpSpPr>
     </p:spTree>
-    <p:extLst>
-      <p:ext uri="{BB962C8B-B14F-4D97-AF65-F5344CB8AC3E}">
-        <p14:creationId xmlns:p14="http://schemas.microsoft.com/office/powerpoint/2010/main" val="2645574303"/>
-      </p:ext>
-    </p:extLst>
   </p:cSld>
   <p:clrMapOvr>
     <a:masterClrMapping/>
@@ -1398,13 +1344,7 @@
       </p:grpSpPr>
       <p:grpSp>
         <p:nvGrpSpPr>
-          <p:cNvPr id="2" name="Group 1">
-            <a:extLst>
-              <a:ext uri="{FF2B5EF4-FFF2-40B4-BE49-F238E27FC236}">
-                <a16:creationId xmlns:a16="http://schemas.microsoft.com/office/drawing/2014/main" id="{B8C8FE1D-79E2-46F2-A8B6-6C78672F327D}"/>
-              </a:ext>
-            </a:extLst>
-          </p:cNvPr>
+          <p:cNvPr id="2" name="Group 1"/>
           <p:cNvGrpSpPr/>
           <p:nvPr userDrawn="1"/>
         </p:nvGrpSpPr>
@@ -1418,13 +1358,7 @@
         </p:grpSpPr>
         <p:sp>
           <p:nvSpPr>
-            <p:cNvPr id="3" name="Freeform: Shape 2">
-              <a:extLst>
-                <a:ext uri="{FF2B5EF4-FFF2-40B4-BE49-F238E27FC236}">
-                  <a16:creationId xmlns:a16="http://schemas.microsoft.com/office/drawing/2014/main" id="{F18A6FBC-D138-4F68-8A66-6E140347BA70}"/>
-                </a:ext>
-              </a:extLst>
-            </p:cNvPr>
+            <p:cNvPr id="3" name="Freeform: Shape 2"/>
             <p:cNvSpPr/>
             <p:nvPr/>
           </p:nvSpPr>
@@ -1571,13 +1505,7 @@
         </p:sp>
         <p:sp>
           <p:nvSpPr>
-            <p:cNvPr id="4" name="Freeform: Shape 3">
-              <a:extLst>
-                <a:ext uri="{FF2B5EF4-FFF2-40B4-BE49-F238E27FC236}">
-                  <a16:creationId xmlns:a16="http://schemas.microsoft.com/office/drawing/2014/main" id="{AA9BC29C-363B-4E11-AE59-9B8AAF5C10D0}"/>
-                </a:ext>
-              </a:extLst>
-            </p:cNvPr>
+            <p:cNvPr id="4" name="Freeform: Shape 3"/>
             <p:cNvSpPr/>
             <p:nvPr/>
           </p:nvSpPr>
@@ -1699,13 +1627,7 @@
         </p:sp>
         <p:sp>
           <p:nvSpPr>
-            <p:cNvPr id="5" name="Freeform: Shape 4">
-              <a:extLst>
-                <a:ext uri="{FF2B5EF4-FFF2-40B4-BE49-F238E27FC236}">
-                  <a16:creationId xmlns:a16="http://schemas.microsoft.com/office/drawing/2014/main" id="{D23A5DD8-C9B2-4827-81BA-376D44C24635}"/>
-                </a:ext>
-              </a:extLst>
-            </p:cNvPr>
+            <p:cNvPr id="5" name="Freeform: Shape 4"/>
             <p:cNvSpPr/>
             <p:nvPr/>
           </p:nvSpPr>
@@ -1779,13 +1701,7 @@
         </p:sp>
         <p:sp>
           <p:nvSpPr>
-            <p:cNvPr id="6" name="Freeform: Shape 5">
-              <a:extLst>
-                <a:ext uri="{FF2B5EF4-FFF2-40B4-BE49-F238E27FC236}">
-                  <a16:creationId xmlns:a16="http://schemas.microsoft.com/office/drawing/2014/main" id="{C04A37AE-39E9-4D86-94AD-C2DF9612C22D}"/>
-                </a:ext>
-              </a:extLst>
-            </p:cNvPr>
+            <p:cNvPr id="6" name="Freeform: Shape 5"/>
             <p:cNvSpPr/>
             <p:nvPr/>
           </p:nvSpPr>
@@ -1927,13 +1843,7 @@
         </p:sp>
         <p:sp>
           <p:nvSpPr>
-            <p:cNvPr id="7" name="Freeform: Shape 6">
-              <a:extLst>
-                <a:ext uri="{FF2B5EF4-FFF2-40B4-BE49-F238E27FC236}">
-                  <a16:creationId xmlns:a16="http://schemas.microsoft.com/office/drawing/2014/main" id="{0AEC3D1B-1190-4201-B038-EDF09CD8289C}"/>
-                </a:ext>
-              </a:extLst>
-            </p:cNvPr>
+            <p:cNvPr id="7" name="Freeform: Shape 6"/>
             <p:cNvSpPr/>
             <p:nvPr/>
           </p:nvSpPr>
@@ -2144,13 +2054,7 @@
         </p:sp>
         <p:grpSp>
           <p:nvGrpSpPr>
-            <p:cNvPr id="8" name="Group 7">
-              <a:extLst>
-                <a:ext uri="{FF2B5EF4-FFF2-40B4-BE49-F238E27FC236}">
-                  <a16:creationId xmlns:a16="http://schemas.microsoft.com/office/drawing/2014/main" id="{76D3F652-9B66-42B3-B6EC-DAEA0D479657}"/>
-                </a:ext>
-              </a:extLst>
-            </p:cNvPr>
+            <p:cNvPr id="8" name="Group 7"/>
             <p:cNvGrpSpPr/>
             <p:nvPr/>
           </p:nvGrpSpPr>
@@ -2164,13 +2068,7 @@
           </p:grpSpPr>
           <p:sp>
             <p:nvSpPr>
-              <p:cNvPr id="13" name="Rectangle: Rounded Corners 12">
-                <a:extLst>
-                  <a:ext uri="{FF2B5EF4-FFF2-40B4-BE49-F238E27FC236}">
-                    <a16:creationId xmlns:a16="http://schemas.microsoft.com/office/drawing/2014/main" id="{D75A6EA0-151B-4595-A461-6347C38766F9}"/>
-                  </a:ext>
-                </a:extLst>
-              </p:cNvPr>
+              <p:cNvPr id="13" name="Rectangle: Rounded Corners 12"/>
               <p:cNvSpPr/>
               <p:nvPr/>
             </p:nvSpPr>
@@ -2220,13 +2118,7 @@
           </p:sp>
           <p:sp>
             <p:nvSpPr>
-              <p:cNvPr id="14" name="Rectangle: Rounded Corners 13">
-                <a:extLst>
-                  <a:ext uri="{FF2B5EF4-FFF2-40B4-BE49-F238E27FC236}">
-                    <a16:creationId xmlns:a16="http://schemas.microsoft.com/office/drawing/2014/main" id="{768BE3A1-6A36-4CE5-A7E6-FF4ADB32DF5D}"/>
-                  </a:ext>
-                </a:extLst>
-              </p:cNvPr>
+              <p:cNvPr id="14" name="Rectangle: Rounded Corners 13"/>
               <p:cNvSpPr/>
               <p:nvPr/>
             </p:nvSpPr>
@@ -2278,13 +2170,7 @@
         </p:grpSp>
         <p:grpSp>
           <p:nvGrpSpPr>
-            <p:cNvPr id="9" name="Group 8">
-              <a:extLst>
-                <a:ext uri="{FF2B5EF4-FFF2-40B4-BE49-F238E27FC236}">
-                  <a16:creationId xmlns:a16="http://schemas.microsoft.com/office/drawing/2014/main" id="{528970F8-1E52-4708-BA1F-38BF455DB26E}"/>
-                </a:ext>
-              </a:extLst>
-            </p:cNvPr>
+            <p:cNvPr id="9" name="Group 8"/>
             <p:cNvGrpSpPr/>
             <p:nvPr/>
           </p:nvGrpSpPr>
@@ -2298,13 +2184,7 @@
           </p:grpSpPr>
           <p:sp>
             <p:nvSpPr>
-              <p:cNvPr id="11" name="Rectangle: Rounded Corners 10">
-                <a:extLst>
-                  <a:ext uri="{FF2B5EF4-FFF2-40B4-BE49-F238E27FC236}">
-                    <a16:creationId xmlns:a16="http://schemas.microsoft.com/office/drawing/2014/main" id="{0881DEA5-6B95-4385-A6A3-016D173CAE6A}"/>
-                  </a:ext>
-                </a:extLst>
-              </p:cNvPr>
+              <p:cNvPr id="11" name="Rectangle: Rounded Corners 10"/>
               <p:cNvSpPr/>
               <p:nvPr/>
             </p:nvSpPr>
@@ -2354,13 +2234,7 @@
           </p:sp>
           <p:sp>
             <p:nvSpPr>
-              <p:cNvPr id="12" name="Rectangle: Rounded Corners 11">
-                <a:extLst>
-                  <a:ext uri="{FF2B5EF4-FFF2-40B4-BE49-F238E27FC236}">
-                    <a16:creationId xmlns:a16="http://schemas.microsoft.com/office/drawing/2014/main" id="{FEB77DDC-56D9-47AB-B71C-B5E868AA0063}"/>
-                  </a:ext>
-                </a:extLst>
-              </p:cNvPr>
+              <p:cNvPr id="12" name="Rectangle: Rounded Corners 11"/>
               <p:cNvSpPr/>
               <p:nvPr/>
             </p:nvSpPr>
@@ -2412,13 +2286,7 @@
         </p:grpSp>
         <p:sp>
           <p:nvSpPr>
-            <p:cNvPr id="10" name="Freeform: Shape 9">
-              <a:extLst>
-                <a:ext uri="{FF2B5EF4-FFF2-40B4-BE49-F238E27FC236}">
-                  <a16:creationId xmlns:a16="http://schemas.microsoft.com/office/drawing/2014/main" id="{74E28E60-5E1A-43CA-A023-D7251390EE6B}"/>
-                </a:ext>
-              </a:extLst>
-            </p:cNvPr>
+            <p:cNvPr id="10" name="Freeform: Shape 9"/>
             <p:cNvSpPr/>
             <p:nvPr/>
           </p:nvSpPr>
@@ -2440,44 +2308,44 @@
                 <a:gd name="connsiteY3" fmla="*/ 4268999 h 4295590"/>
                 <a:gd name="connsiteX4" fmla="*/ 30683 w 4009217"/>
                 <a:gd name="connsiteY4" fmla="*/ 4268999 h 4295590"/>
-                <a:gd name="connsiteX0" fmla="*/ 2536444 w 3976489"/>
-                <a:gd name="connsiteY0" fmla="*/ 0 h 4238316"/>
-                <a:gd name="connsiteX1" fmla="*/ 3976489 w 3976489"/>
-                <a:gd name="connsiteY1" fmla="*/ 241371 h 4238316"/>
-                <a:gd name="connsiteX2" fmla="*/ 3968307 w 3976489"/>
-                <a:gd name="connsiteY2" fmla="*/ 4238316 h 4238316"/>
-                <a:gd name="connsiteX3" fmla="*/ 0 w 3976489"/>
-                <a:gd name="connsiteY3" fmla="*/ 4238316 h 4238316"/>
-                <a:gd name="connsiteX0" fmla="*/ 2536444 w 3976489"/>
-                <a:gd name="connsiteY0" fmla="*/ 0 h 4238316"/>
-                <a:gd name="connsiteX1" fmla="*/ 3976489 w 3976489"/>
-                <a:gd name="connsiteY1" fmla="*/ 213683 h 4238316"/>
-                <a:gd name="connsiteX2" fmla="*/ 3968307 w 3976489"/>
-                <a:gd name="connsiteY2" fmla="*/ 4238316 h 4238316"/>
-                <a:gd name="connsiteX3" fmla="*/ 0 w 3976489"/>
-                <a:gd name="connsiteY3" fmla="*/ 4238316 h 4238316"/>
-                <a:gd name="connsiteX0" fmla="*/ 2473335 w 3976489"/>
-                <a:gd name="connsiteY0" fmla="*/ 0 h 4035268"/>
-                <a:gd name="connsiteX1" fmla="*/ 3976489 w 3976489"/>
-                <a:gd name="connsiteY1" fmla="*/ 10635 h 4035268"/>
-                <a:gd name="connsiteX2" fmla="*/ 3968307 w 3976489"/>
-                <a:gd name="connsiteY2" fmla="*/ 4035268 h 4035268"/>
-                <a:gd name="connsiteX3" fmla="*/ 0 w 3976489"/>
-                <a:gd name="connsiteY3" fmla="*/ 4035268 h 4035268"/>
+                <a:gd name="connsiteX0-1" fmla="*/ 2536444 w 3976489"/>
+                <a:gd name="connsiteY0-2" fmla="*/ 0 h 4238316"/>
+                <a:gd name="connsiteX1-3" fmla="*/ 3976489 w 3976489"/>
+                <a:gd name="connsiteY1-4" fmla="*/ 241371 h 4238316"/>
+                <a:gd name="connsiteX2-5" fmla="*/ 3968307 w 3976489"/>
+                <a:gd name="connsiteY2-6" fmla="*/ 4238316 h 4238316"/>
+                <a:gd name="connsiteX3-7" fmla="*/ 0 w 3976489"/>
+                <a:gd name="connsiteY3-8" fmla="*/ 4238316 h 4238316"/>
+                <a:gd name="connsiteX0-9" fmla="*/ 2536444 w 3976489"/>
+                <a:gd name="connsiteY0-10" fmla="*/ 0 h 4238316"/>
+                <a:gd name="connsiteX1-11" fmla="*/ 3976489 w 3976489"/>
+                <a:gd name="connsiteY1-12" fmla="*/ 213683 h 4238316"/>
+                <a:gd name="connsiteX2-13" fmla="*/ 3968307 w 3976489"/>
+                <a:gd name="connsiteY2-14" fmla="*/ 4238316 h 4238316"/>
+                <a:gd name="connsiteX3-15" fmla="*/ 0 w 3976489"/>
+                <a:gd name="connsiteY3-16" fmla="*/ 4238316 h 4238316"/>
+                <a:gd name="connsiteX0-17" fmla="*/ 2473335 w 3976489"/>
+                <a:gd name="connsiteY0-18" fmla="*/ 0 h 4035268"/>
+                <a:gd name="connsiteX1-19" fmla="*/ 3976489 w 3976489"/>
+                <a:gd name="connsiteY1-20" fmla="*/ 10635 h 4035268"/>
+                <a:gd name="connsiteX2-21" fmla="*/ 3968307 w 3976489"/>
+                <a:gd name="connsiteY2-22" fmla="*/ 4035268 h 4035268"/>
+                <a:gd name="connsiteX3-23" fmla="*/ 0 w 3976489"/>
+                <a:gd name="connsiteY3-24" fmla="*/ 4035268 h 4035268"/>
               </a:gdLst>
               <a:ahLst/>
               <a:cxnLst>
                 <a:cxn ang="0">
-                  <a:pos x="connsiteX0" y="connsiteY0"/>
-                </a:cxn>
-                <a:cxn ang="0">
-                  <a:pos x="connsiteX1" y="connsiteY1"/>
-                </a:cxn>
-                <a:cxn ang="0">
-                  <a:pos x="connsiteX2" y="connsiteY2"/>
-                </a:cxn>
-                <a:cxn ang="0">
-                  <a:pos x="connsiteX3" y="connsiteY3"/>
+                  <a:pos x="connsiteX0-1" y="connsiteY0-2"/>
+                </a:cxn>
+                <a:cxn ang="0">
+                  <a:pos x="connsiteX1-3" y="connsiteY1-4"/>
+                </a:cxn>
+                <a:cxn ang="0">
+                  <a:pos x="connsiteX2-5" y="connsiteY2-6"/>
+                </a:cxn>
+                <a:cxn ang="0">
+                  <a:pos x="connsiteX3-7" y="connsiteY3-8"/>
                 </a:cxn>
               </a:cxnLst>
               <a:rect l="l" t="t" r="r" b="b"/>
@@ -2522,13 +2390,7 @@
       </p:grpSp>
       <p:sp>
         <p:nvSpPr>
-          <p:cNvPr id="15" name="그림 개체 틀 2">
-            <a:extLst>
-              <a:ext uri="{FF2B5EF4-FFF2-40B4-BE49-F238E27FC236}">
-                <a16:creationId xmlns:a16="http://schemas.microsoft.com/office/drawing/2014/main" id="{E865A037-79E3-43C4-A726-58CEE97F8CF0}"/>
-              </a:ext>
-            </a:extLst>
-          </p:cNvPr>
+          <p:cNvPr id="15" name="그림 개체 틀 2"/>
           <p:cNvSpPr>
             <a:spLocks noGrp="1"/>
           </p:cNvSpPr>
@@ -2572,9 +2434,6 @@
         </p:style>
         <p:txBody>
           <a:bodyPr rot="0" spcFirstLastPara="0" vertOverflow="overflow" horzOverflow="overflow" vert="horz" wrap="square" lIns="91440" tIns="45720" rIns="91440" bIns="45720" numCol="1" spcCol="0" rtlCol="0" fromWordArt="0" anchor="ctr" anchorCtr="0" forceAA="0" compatLnSpc="1">
-            <a:prstTxWarp prst="textNoShape">
-              <a:avLst/>
-            </a:prstTxWarp>
             <a:noAutofit/>
           </a:bodyPr>
           <a:lstStyle>
@@ -2603,13 +2462,7 @@
       </p:sp>
       <p:sp>
         <p:nvSpPr>
-          <p:cNvPr id="16" name="Text Placeholder 9">
-            <a:extLst>
-              <a:ext uri="{FF2B5EF4-FFF2-40B4-BE49-F238E27FC236}">
-                <a16:creationId xmlns:a16="http://schemas.microsoft.com/office/drawing/2014/main" id="{BF0C124E-AC53-4C85-B016-940022635993}"/>
-              </a:ext>
-            </a:extLst>
-          </p:cNvPr>
+          <p:cNvPr id="16" name="Text Placeholder 9"/>
           <p:cNvSpPr>
             <a:spLocks noGrp="1"/>
           </p:cNvSpPr>
@@ -2639,7 +2492,7 @@
                   </a:schemeClr>
                 </a:solidFill>
                 <a:latin typeface="+mj-lt"/>
-                <a:cs typeface="Arial" pitchFamily="34" charset="0"/>
+                <a:cs typeface="Arial" panose="020B0604020202020204" pitchFamily="34" charset="0"/>
               </a:defRPr>
             </a:lvl1pPr>
           </a:lstStyle>
@@ -2649,15 +2502,11 @@
               <a:rPr lang="en-US" altLang="ko-KR" dirty="0"/>
               <a:t>BASIC LAYOUT</a:t>
             </a:r>
+            <a:endParaRPr lang="en-US" altLang="ko-KR" dirty="0"/>
           </a:p>
         </p:txBody>
       </p:sp>
     </p:spTree>
-    <p:extLst>
-      <p:ext uri="{BB962C8B-B14F-4D97-AF65-F5344CB8AC3E}">
-        <p14:creationId xmlns:p14="http://schemas.microsoft.com/office/powerpoint/2010/main" val="3750974003"/>
-      </p:ext>
-    </p:extLst>
   </p:cSld>
   <p:clrMapOvr>
     <a:masterClrMapping/>
@@ -2697,11 +2546,6 @@
         </a:xfrm>
       </p:grpSpPr>
     </p:spTree>
-    <p:extLst>
-      <p:ext uri="{BB962C8B-B14F-4D97-AF65-F5344CB8AC3E}">
-        <p14:creationId xmlns:p14="http://schemas.microsoft.com/office/powerpoint/2010/main" val="1216366204"/>
-      </p:ext>
-    </p:extLst>
   </p:cSld>
   <p:clrMapOvr>
     <a:masterClrMapping/>
@@ -2728,13 +2572,7 @@
       </p:grpSpPr>
       <p:sp>
         <p:nvSpPr>
-          <p:cNvPr id="2" name="그림 개체 틀 2">
-            <a:extLst>
-              <a:ext uri="{FF2B5EF4-FFF2-40B4-BE49-F238E27FC236}">
-                <a16:creationId xmlns:a16="http://schemas.microsoft.com/office/drawing/2014/main" id="{BDC57578-EF98-4A57-8AF7-1C7CC48D72AC}"/>
-              </a:ext>
-            </a:extLst>
-          </p:cNvPr>
+          <p:cNvPr id="2" name="그림 개체 틀 2"/>
           <p:cNvSpPr>
             <a:spLocks noGrp="1"/>
           </p:cNvSpPr>
@@ -2782,11 +2620,6 @@
         </p:txBody>
       </p:sp>
     </p:spTree>
-    <p:extLst>
-      <p:ext uri="{BB962C8B-B14F-4D97-AF65-F5344CB8AC3E}">
-        <p14:creationId xmlns:p14="http://schemas.microsoft.com/office/powerpoint/2010/main" val="3964928051"/>
-      </p:ext>
-    </p:extLst>
   </p:cSld>
   <p:clrMapOvr>
     <a:masterClrMapping/>
@@ -2831,13 +2664,7 @@
       </p:grpSpPr>
       <p:pic>
         <p:nvPicPr>
-          <p:cNvPr id="2" name="Picture 1">
-            <a:extLst>
-              <a:ext uri="{FF2B5EF4-FFF2-40B4-BE49-F238E27FC236}">
-                <a16:creationId xmlns:a16="http://schemas.microsoft.com/office/drawing/2014/main" id="{F8BF0D15-4BB1-408E-A5FC-CFF2202284A0}"/>
-              </a:ext>
-            </a:extLst>
-          </p:cNvPr>
+          <p:cNvPr id="2" name="Picture 1"/>
           <p:cNvPicPr>
             <a:picLocks noChangeAspect="1"/>
           </p:cNvPicPr>
@@ -2874,13 +2701,7 @@
       </p:pic>
       <p:sp>
         <p:nvSpPr>
-          <p:cNvPr id="3" name="Oval 2">
-            <a:extLst>
-              <a:ext uri="{FF2B5EF4-FFF2-40B4-BE49-F238E27FC236}">
-                <a16:creationId xmlns:a16="http://schemas.microsoft.com/office/drawing/2014/main" id="{E15ECB00-AF83-443E-9AE7-961C16032659}"/>
-              </a:ext>
-            </a:extLst>
-          </p:cNvPr>
+          <p:cNvPr id="3" name="Oval 2"/>
           <p:cNvSpPr/>
           <p:nvPr userDrawn="1"/>
         </p:nvSpPr>
@@ -2948,13 +2769,7 @@
       </p:sp>
       <p:sp>
         <p:nvSpPr>
-          <p:cNvPr id="4" name="Oval 3">
-            <a:extLst>
-              <a:ext uri="{FF2B5EF4-FFF2-40B4-BE49-F238E27FC236}">
-                <a16:creationId xmlns:a16="http://schemas.microsoft.com/office/drawing/2014/main" id="{78BED7D0-BE93-4317-824C-6DD1CC483554}"/>
-              </a:ext>
-            </a:extLst>
-          </p:cNvPr>
+          <p:cNvPr id="4" name="Oval 3"/>
           <p:cNvSpPr/>
           <p:nvPr userDrawn="1"/>
         </p:nvSpPr>
@@ -3022,13 +2837,7 @@
       </p:sp>
       <p:sp>
         <p:nvSpPr>
-          <p:cNvPr id="5" name="Freeform: Shape 4">
-            <a:extLst>
-              <a:ext uri="{FF2B5EF4-FFF2-40B4-BE49-F238E27FC236}">
-                <a16:creationId xmlns:a16="http://schemas.microsoft.com/office/drawing/2014/main" id="{4C175114-E625-440B-9D45-C7FECD32D84F}"/>
-              </a:ext>
-            </a:extLst>
-          </p:cNvPr>
+          <p:cNvPr id="5" name="Freeform: Shape 4"/>
           <p:cNvSpPr/>
           <p:nvPr userDrawn="1"/>
         </p:nvSpPr>
@@ -3171,13 +2980,7 @@
       </p:sp>
       <p:sp>
         <p:nvSpPr>
-          <p:cNvPr id="6" name="Rectangle: Rounded Corners 5">
-            <a:extLst>
-              <a:ext uri="{FF2B5EF4-FFF2-40B4-BE49-F238E27FC236}">
-                <a16:creationId xmlns:a16="http://schemas.microsoft.com/office/drawing/2014/main" id="{5FF7B0E0-0A58-4E60-8B37-65D6CF8ACF1E}"/>
-              </a:ext>
-            </a:extLst>
-          </p:cNvPr>
+          <p:cNvPr id="6" name="Rectangle: Rounded Corners 5"/>
           <p:cNvSpPr/>
           <p:nvPr userDrawn="1"/>
         </p:nvSpPr>
@@ -3240,13 +3043,7 @@
       </p:sp>
       <p:sp>
         <p:nvSpPr>
-          <p:cNvPr id="7" name="Rectangle: Rounded Corners 6">
-            <a:extLst>
-              <a:ext uri="{FF2B5EF4-FFF2-40B4-BE49-F238E27FC236}">
-                <a16:creationId xmlns:a16="http://schemas.microsoft.com/office/drawing/2014/main" id="{E251486E-3E22-42E9-9265-A62EF3AE4503}"/>
-              </a:ext>
-            </a:extLst>
-          </p:cNvPr>
+          <p:cNvPr id="7" name="Rectangle: Rounded Corners 6"/>
           <p:cNvSpPr/>
           <p:nvPr userDrawn="1"/>
         </p:nvSpPr>
@@ -3309,13 +3106,7 @@
       </p:sp>
       <p:pic>
         <p:nvPicPr>
-          <p:cNvPr id="8" name="Picture 7">
-            <a:extLst>
-              <a:ext uri="{FF2B5EF4-FFF2-40B4-BE49-F238E27FC236}">
-                <a16:creationId xmlns:a16="http://schemas.microsoft.com/office/drawing/2014/main" id="{BCC61999-5F04-4AB2-B1A4-94D813065695}"/>
-              </a:ext>
-            </a:extLst>
-          </p:cNvPr>
+          <p:cNvPr id="8" name="Picture 7"/>
           <p:cNvPicPr>
             <a:picLocks noChangeAspect="1"/>
           </p:cNvPicPr>
@@ -3352,13 +3143,7 @@
       </p:pic>
       <p:pic>
         <p:nvPicPr>
-          <p:cNvPr id="10" name="Picture 9">
-            <a:extLst>
-              <a:ext uri="{FF2B5EF4-FFF2-40B4-BE49-F238E27FC236}">
-                <a16:creationId xmlns:a16="http://schemas.microsoft.com/office/drawing/2014/main" id="{FA9635CA-BC26-4AD8-A22E-1ADC79CFE499}"/>
-              </a:ext>
-            </a:extLst>
-          </p:cNvPr>
+          <p:cNvPr id="10" name="Picture 9"/>
           <p:cNvPicPr>
             <a:picLocks noChangeAspect="1"/>
           </p:cNvPicPr>
@@ -3395,13 +3180,7 @@
       </p:pic>
       <p:pic>
         <p:nvPicPr>
-          <p:cNvPr id="11" name="Picture 10">
-            <a:extLst>
-              <a:ext uri="{FF2B5EF4-FFF2-40B4-BE49-F238E27FC236}">
-                <a16:creationId xmlns:a16="http://schemas.microsoft.com/office/drawing/2014/main" id="{D92E4871-F2F2-4806-B2A4-7B4E17D49BA3}"/>
-              </a:ext>
-            </a:extLst>
-          </p:cNvPr>
+          <p:cNvPr id="11" name="Picture 10"/>
           <p:cNvPicPr>
             <a:picLocks noChangeAspect="1"/>
           </p:cNvPicPr>
@@ -3438,13 +3217,7 @@
       </p:pic>
       <p:pic>
         <p:nvPicPr>
-          <p:cNvPr id="12" name="Picture 11">
-            <a:extLst>
-              <a:ext uri="{FF2B5EF4-FFF2-40B4-BE49-F238E27FC236}">
-                <a16:creationId xmlns:a16="http://schemas.microsoft.com/office/drawing/2014/main" id="{DA948A5E-2C17-44D0-A274-9C818DA9A249}"/>
-              </a:ext>
-            </a:extLst>
-          </p:cNvPr>
+          <p:cNvPr id="12" name="Picture 11"/>
           <p:cNvPicPr>
             <a:picLocks noChangeAspect="1"/>
           </p:cNvPicPr>
@@ -3481,13 +3254,7 @@
       </p:pic>
       <p:sp>
         <p:nvSpPr>
-          <p:cNvPr id="13" name="Rectangle: Rounded Corners 12">
-            <a:extLst>
-              <a:ext uri="{FF2B5EF4-FFF2-40B4-BE49-F238E27FC236}">
-                <a16:creationId xmlns:a16="http://schemas.microsoft.com/office/drawing/2014/main" id="{77988820-EC8E-4E5E-B405-6369C94FB696}"/>
-              </a:ext>
-            </a:extLst>
-          </p:cNvPr>
+          <p:cNvPr id="13" name="Rectangle: Rounded Corners 12"/>
           <p:cNvSpPr/>
           <p:nvPr userDrawn="1"/>
         </p:nvSpPr>
@@ -3550,13 +3317,7 @@
       </p:sp>
       <p:sp>
         <p:nvSpPr>
-          <p:cNvPr id="14" name="Rectangle: Rounded Corners 13">
-            <a:extLst>
-              <a:ext uri="{FF2B5EF4-FFF2-40B4-BE49-F238E27FC236}">
-                <a16:creationId xmlns:a16="http://schemas.microsoft.com/office/drawing/2014/main" id="{DB34C216-B859-4332-89DD-FDAB18587912}"/>
-              </a:ext>
-            </a:extLst>
-          </p:cNvPr>
+          <p:cNvPr id="14" name="Rectangle: Rounded Corners 13"/>
           <p:cNvSpPr/>
           <p:nvPr userDrawn="1"/>
         </p:nvSpPr>
@@ -3619,13 +3380,7 @@
       </p:sp>
       <p:sp>
         <p:nvSpPr>
-          <p:cNvPr id="15" name="Rectangle: Rounded Corners 14">
-            <a:extLst>
-              <a:ext uri="{FF2B5EF4-FFF2-40B4-BE49-F238E27FC236}">
-                <a16:creationId xmlns:a16="http://schemas.microsoft.com/office/drawing/2014/main" id="{4F8C30EF-40BC-43EA-9DFB-F9D15A22EB5E}"/>
-              </a:ext>
-            </a:extLst>
-          </p:cNvPr>
+          <p:cNvPr id="15" name="Rectangle: Rounded Corners 14"/>
           <p:cNvSpPr/>
           <p:nvPr userDrawn="1"/>
         </p:nvSpPr>
@@ -3684,13 +3439,7 @@
       </p:sp>
       <p:sp>
         <p:nvSpPr>
-          <p:cNvPr id="16" name="Rectangle: Rounded Corners 15">
-            <a:extLst>
-              <a:ext uri="{FF2B5EF4-FFF2-40B4-BE49-F238E27FC236}">
-                <a16:creationId xmlns:a16="http://schemas.microsoft.com/office/drawing/2014/main" id="{C20E1840-583E-492F-A9C7-78CB38D18A57}"/>
-              </a:ext>
-            </a:extLst>
-          </p:cNvPr>
+          <p:cNvPr id="16" name="Rectangle: Rounded Corners 15"/>
           <p:cNvSpPr/>
           <p:nvPr userDrawn="1"/>
         </p:nvSpPr>
@@ -3749,13 +3498,7 @@
       </p:sp>
       <p:sp>
         <p:nvSpPr>
-          <p:cNvPr id="17" name="Rectangle: Rounded Corners 16">
-            <a:extLst>
-              <a:ext uri="{FF2B5EF4-FFF2-40B4-BE49-F238E27FC236}">
-                <a16:creationId xmlns:a16="http://schemas.microsoft.com/office/drawing/2014/main" id="{21B742EA-776C-4729-BC4C-D8246D495CCF}"/>
-              </a:ext>
-            </a:extLst>
-          </p:cNvPr>
+          <p:cNvPr id="17" name="Rectangle: Rounded Corners 16"/>
           <p:cNvSpPr/>
           <p:nvPr userDrawn="1"/>
         </p:nvSpPr>
@@ -3814,13 +3557,7 @@
       </p:sp>
       <p:sp>
         <p:nvSpPr>
-          <p:cNvPr id="18" name="Rectangle: Rounded Corners 17">
-            <a:extLst>
-              <a:ext uri="{FF2B5EF4-FFF2-40B4-BE49-F238E27FC236}">
-                <a16:creationId xmlns:a16="http://schemas.microsoft.com/office/drawing/2014/main" id="{20FB9170-ED31-4166-B8AF-844A796082C3}"/>
-              </a:ext>
-            </a:extLst>
-          </p:cNvPr>
+          <p:cNvPr id="18" name="Rectangle: Rounded Corners 17"/>
           <p:cNvSpPr/>
           <p:nvPr userDrawn="1"/>
         </p:nvSpPr>
@@ -3879,13 +3616,7 @@
       </p:sp>
       <p:sp>
         <p:nvSpPr>
-          <p:cNvPr id="20" name="Rectangle: Rounded Corners 19">
-            <a:extLst>
-              <a:ext uri="{FF2B5EF4-FFF2-40B4-BE49-F238E27FC236}">
-                <a16:creationId xmlns:a16="http://schemas.microsoft.com/office/drawing/2014/main" id="{0140AEF0-AD3C-429C-8967-68D41060DDA9}"/>
-              </a:ext>
-            </a:extLst>
-          </p:cNvPr>
+          <p:cNvPr id="20" name="Rectangle: Rounded Corners 19"/>
           <p:cNvSpPr/>
           <p:nvPr userDrawn="1"/>
         </p:nvSpPr>
@@ -3944,13 +3675,7 @@
       </p:sp>
       <p:sp>
         <p:nvSpPr>
-          <p:cNvPr id="21" name="Rectangle: Rounded Corners 20">
-            <a:extLst>
-              <a:ext uri="{FF2B5EF4-FFF2-40B4-BE49-F238E27FC236}">
-                <a16:creationId xmlns:a16="http://schemas.microsoft.com/office/drawing/2014/main" id="{E7CBDFD1-2932-4D6D-8A90-D0F5DC3C67AE}"/>
-              </a:ext>
-            </a:extLst>
-          </p:cNvPr>
+          <p:cNvPr id="21" name="Rectangle: Rounded Corners 20"/>
           <p:cNvSpPr/>
           <p:nvPr userDrawn="1"/>
         </p:nvSpPr>
@@ -4009,13 +3734,7 @@
       </p:sp>
       <p:sp>
         <p:nvSpPr>
-          <p:cNvPr id="22" name="Rectangle: Rounded Corners 21">
-            <a:extLst>
-              <a:ext uri="{FF2B5EF4-FFF2-40B4-BE49-F238E27FC236}">
-                <a16:creationId xmlns:a16="http://schemas.microsoft.com/office/drawing/2014/main" id="{CA46355A-3E04-49FD-9F09-AAAB3DB0E418}"/>
-              </a:ext>
-            </a:extLst>
-          </p:cNvPr>
+          <p:cNvPr id="22" name="Rectangle: Rounded Corners 21"/>
           <p:cNvSpPr/>
           <p:nvPr userDrawn="1"/>
         </p:nvSpPr>
@@ -4074,13 +3793,7 @@
       </p:sp>
       <p:sp>
         <p:nvSpPr>
-          <p:cNvPr id="23" name="Circle: Hollow 22">
-            <a:extLst>
-              <a:ext uri="{FF2B5EF4-FFF2-40B4-BE49-F238E27FC236}">
-                <a16:creationId xmlns:a16="http://schemas.microsoft.com/office/drawing/2014/main" id="{409C4469-3F84-4E19-A632-E543A5FDD884}"/>
-              </a:ext>
-            </a:extLst>
-          </p:cNvPr>
+          <p:cNvPr id="23" name="Circle: Hollow 22"/>
           <p:cNvSpPr/>
           <p:nvPr userDrawn="1"/>
         </p:nvSpPr>
@@ -4142,13 +3855,7 @@
       </p:sp>
       <p:sp>
         <p:nvSpPr>
-          <p:cNvPr id="24" name="Circle: Hollow 23">
-            <a:extLst>
-              <a:ext uri="{FF2B5EF4-FFF2-40B4-BE49-F238E27FC236}">
-                <a16:creationId xmlns:a16="http://schemas.microsoft.com/office/drawing/2014/main" id="{EBF49C44-3383-44DC-8036-8DC2B11ACB1A}"/>
-              </a:ext>
-            </a:extLst>
-          </p:cNvPr>
+          <p:cNvPr id="24" name="Circle: Hollow 23"/>
           <p:cNvSpPr/>
           <p:nvPr userDrawn="1"/>
         </p:nvSpPr>
@@ -4210,13 +3917,7 @@
       </p:sp>
       <p:sp>
         <p:nvSpPr>
-          <p:cNvPr id="25" name="Circle: Hollow 24">
-            <a:extLst>
-              <a:ext uri="{FF2B5EF4-FFF2-40B4-BE49-F238E27FC236}">
-                <a16:creationId xmlns:a16="http://schemas.microsoft.com/office/drawing/2014/main" id="{D46346EE-F1B7-4796-AFA9-AAE048AA3364}"/>
-              </a:ext>
-            </a:extLst>
-          </p:cNvPr>
+          <p:cNvPr id="25" name="Circle: Hollow 24"/>
           <p:cNvSpPr/>
           <p:nvPr userDrawn="1"/>
         </p:nvSpPr>
@@ -4278,13 +3979,7 @@
       </p:sp>
       <p:sp>
         <p:nvSpPr>
-          <p:cNvPr id="26" name="Circle: Hollow 25">
-            <a:extLst>
-              <a:ext uri="{FF2B5EF4-FFF2-40B4-BE49-F238E27FC236}">
-                <a16:creationId xmlns:a16="http://schemas.microsoft.com/office/drawing/2014/main" id="{73E5F236-BD77-4630-A734-050F06B94A2D}"/>
-              </a:ext>
-            </a:extLst>
-          </p:cNvPr>
+          <p:cNvPr id="26" name="Circle: Hollow 25"/>
           <p:cNvSpPr/>
           <p:nvPr userDrawn="1"/>
         </p:nvSpPr>
@@ -4346,13 +4041,7 @@
       </p:sp>
       <p:sp>
         <p:nvSpPr>
-          <p:cNvPr id="27" name="Circle: Hollow 26">
-            <a:extLst>
-              <a:ext uri="{FF2B5EF4-FFF2-40B4-BE49-F238E27FC236}">
-                <a16:creationId xmlns:a16="http://schemas.microsoft.com/office/drawing/2014/main" id="{C89DEA56-42C4-43A8-B485-A905F2F9EF8D}"/>
-              </a:ext>
-            </a:extLst>
-          </p:cNvPr>
+          <p:cNvPr id="27" name="Circle: Hollow 26"/>
           <p:cNvSpPr/>
           <p:nvPr userDrawn="1"/>
         </p:nvSpPr>
@@ -4414,13 +4103,7 @@
       </p:sp>
       <p:sp>
         <p:nvSpPr>
-          <p:cNvPr id="28" name="Circle: Hollow 27">
-            <a:extLst>
-              <a:ext uri="{FF2B5EF4-FFF2-40B4-BE49-F238E27FC236}">
-                <a16:creationId xmlns:a16="http://schemas.microsoft.com/office/drawing/2014/main" id="{841ACCCA-100D-4216-8EA1-A5CC63045609}"/>
-              </a:ext>
-            </a:extLst>
-          </p:cNvPr>
+          <p:cNvPr id="28" name="Circle: Hollow 27"/>
           <p:cNvSpPr/>
           <p:nvPr userDrawn="1"/>
         </p:nvSpPr>
@@ -4482,13 +4165,7 @@
       </p:sp>
       <p:sp>
         <p:nvSpPr>
-          <p:cNvPr id="29" name="Circle: Hollow 28">
-            <a:extLst>
-              <a:ext uri="{FF2B5EF4-FFF2-40B4-BE49-F238E27FC236}">
-                <a16:creationId xmlns:a16="http://schemas.microsoft.com/office/drawing/2014/main" id="{35C224AA-96FF-425B-A723-6682BE2E1056}"/>
-              </a:ext>
-            </a:extLst>
-          </p:cNvPr>
+          <p:cNvPr id="29" name="Circle: Hollow 28"/>
           <p:cNvSpPr/>
           <p:nvPr userDrawn="1"/>
         </p:nvSpPr>
@@ -4550,13 +4227,7 @@
       </p:sp>
       <p:sp>
         <p:nvSpPr>
-          <p:cNvPr id="30" name="Freeform: Shape 29">
-            <a:extLst>
-              <a:ext uri="{FF2B5EF4-FFF2-40B4-BE49-F238E27FC236}">
-                <a16:creationId xmlns:a16="http://schemas.microsoft.com/office/drawing/2014/main" id="{3060D8E5-FE2C-4BE4-8D5F-4E1953E01D04}"/>
-              </a:ext>
-            </a:extLst>
-          </p:cNvPr>
+          <p:cNvPr id="30" name="Freeform: Shape 29"/>
           <p:cNvSpPr/>
           <p:nvPr userDrawn="1"/>
         </p:nvSpPr>
@@ -4698,11 +4369,6 @@
         </p:txBody>
       </p:sp>
     </p:spTree>
-    <p:extLst>
-      <p:ext uri="{BB962C8B-B14F-4D97-AF65-F5344CB8AC3E}">
-        <p14:creationId xmlns:p14="http://schemas.microsoft.com/office/powerpoint/2010/main" val="1279604065"/>
-      </p:ext>
-    </p:extLst>
   </p:cSld>
   <p:clrMapOvr>
     <a:masterClrMapping/>
@@ -4747,13 +4413,7 @@
       </p:grpSpPr>
       <p:grpSp>
         <p:nvGrpSpPr>
-          <p:cNvPr id="24" name="Group 23">
-            <a:extLst>
-              <a:ext uri="{FF2B5EF4-FFF2-40B4-BE49-F238E27FC236}">
-                <a16:creationId xmlns:a16="http://schemas.microsoft.com/office/drawing/2014/main" id="{F5C830AA-5FA6-4CD4-AD75-FEFC4B01915A}"/>
-              </a:ext>
-            </a:extLst>
-          </p:cNvPr>
+          <p:cNvPr id="24" name="Group 23"/>
           <p:cNvGrpSpPr/>
           <p:nvPr userDrawn="1"/>
         </p:nvGrpSpPr>
@@ -4767,13 +4427,7 @@
         </p:grpSpPr>
         <p:grpSp>
           <p:nvGrpSpPr>
-            <p:cNvPr id="2" name="Group 1">
-              <a:extLst>
-                <a:ext uri="{FF2B5EF4-FFF2-40B4-BE49-F238E27FC236}">
-                  <a16:creationId xmlns:a16="http://schemas.microsoft.com/office/drawing/2014/main" id="{7CA2486D-8BCE-4F5C-8CAA-C5764F13D2C0}"/>
-                </a:ext>
-              </a:extLst>
-            </p:cNvPr>
+            <p:cNvPr id="2" name="Group 1"/>
             <p:cNvGrpSpPr/>
             <p:nvPr userDrawn="1"/>
           </p:nvGrpSpPr>
@@ -4787,13 +4441,7 @@
           </p:grpSpPr>
           <p:sp>
             <p:nvSpPr>
-              <p:cNvPr id="3" name="Oval 2">
-                <a:extLst>
-                  <a:ext uri="{FF2B5EF4-FFF2-40B4-BE49-F238E27FC236}">
-                    <a16:creationId xmlns:a16="http://schemas.microsoft.com/office/drawing/2014/main" id="{BF71EB0B-9497-409F-8497-D05944EED268}"/>
-                  </a:ext>
-                </a:extLst>
-              </p:cNvPr>
+              <p:cNvPr id="3" name="Oval 2"/>
               <p:cNvSpPr/>
               <p:nvPr userDrawn="1"/>
             </p:nvSpPr>
@@ -4861,13 +4509,7 @@
           </p:sp>
           <p:pic>
             <p:nvPicPr>
-              <p:cNvPr id="4" name="Picture 3">
-                <a:extLst>
-                  <a:ext uri="{FF2B5EF4-FFF2-40B4-BE49-F238E27FC236}">
-                    <a16:creationId xmlns:a16="http://schemas.microsoft.com/office/drawing/2014/main" id="{80DDDF61-AF37-4CDD-91B7-E8FD97EB7F24}"/>
-                  </a:ext>
-                </a:extLst>
-              </p:cNvPr>
+              <p:cNvPr id="4" name="Picture 3"/>
               <p:cNvPicPr>
                 <a:picLocks noChangeAspect="1"/>
               </p:cNvPicPr>
@@ -4904,13 +4546,7 @@
           </p:pic>
           <p:pic>
             <p:nvPicPr>
-              <p:cNvPr id="5" name="Picture 4">
-                <a:extLst>
-                  <a:ext uri="{FF2B5EF4-FFF2-40B4-BE49-F238E27FC236}">
-                    <a16:creationId xmlns:a16="http://schemas.microsoft.com/office/drawing/2014/main" id="{58756FA6-95F9-4A5F-8874-D3AE77F87B6C}"/>
-                  </a:ext>
-                </a:extLst>
-              </p:cNvPr>
+              <p:cNvPr id="5" name="Picture 4"/>
               <p:cNvPicPr>
                 <a:picLocks noChangeAspect="1"/>
               </p:cNvPicPr>
@@ -4947,13 +4583,7 @@
           </p:pic>
           <p:pic>
             <p:nvPicPr>
-              <p:cNvPr id="6" name="Picture 5">
-                <a:extLst>
-                  <a:ext uri="{FF2B5EF4-FFF2-40B4-BE49-F238E27FC236}">
-                    <a16:creationId xmlns:a16="http://schemas.microsoft.com/office/drawing/2014/main" id="{652D9175-806D-444B-843C-8D6D1A2B8B48}"/>
-                  </a:ext>
-                </a:extLst>
-              </p:cNvPr>
+              <p:cNvPr id="6" name="Picture 5"/>
               <p:cNvPicPr>
                 <a:picLocks noChangeAspect="1"/>
               </p:cNvPicPr>
@@ -4990,13 +4620,7 @@
           </p:pic>
           <p:sp>
             <p:nvSpPr>
-              <p:cNvPr id="7" name="Rectangle: Rounded Corners 6">
-                <a:extLst>
-                  <a:ext uri="{FF2B5EF4-FFF2-40B4-BE49-F238E27FC236}">
-                    <a16:creationId xmlns:a16="http://schemas.microsoft.com/office/drawing/2014/main" id="{9EE53EEA-8096-4336-BF8C-013228CF2A7B}"/>
-                  </a:ext>
-                </a:extLst>
-              </p:cNvPr>
+              <p:cNvPr id="7" name="Rectangle: Rounded Corners 6"/>
               <p:cNvSpPr/>
               <p:nvPr userDrawn="1"/>
             </p:nvSpPr>
@@ -5059,13 +4683,7 @@
           </p:sp>
           <p:sp>
             <p:nvSpPr>
-              <p:cNvPr id="8" name="Rectangle: Rounded Corners 7">
-                <a:extLst>
-                  <a:ext uri="{FF2B5EF4-FFF2-40B4-BE49-F238E27FC236}">
-                    <a16:creationId xmlns:a16="http://schemas.microsoft.com/office/drawing/2014/main" id="{3540C4DE-A5C4-491B-85D8-7A083DE9DB85}"/>
-                  </a:ext>
-                </a:extLst>
-              </p:cNvPr>
+              <p:cNvPr id="8" name="Rectangle: Rounded Corners 7"/>
               <p:cNvSpPr/>
               <p:nvPr userDrawn="1"/>
             </p:nvSpPr>
@@ -5124,13 +4742,7 @@
           </p:sp>
           <p:sp>
             <p:nvSpPr>
-              <p:cNvPr id="9" name="Rectangle: Rounded Corners 8">
-                <a:extLst>
-                  <a:ext uri="{FF2B5EF4-FFF2-40B4-BE49-F238E27FC236}">
-                    <a16:creationId xmlns:a16="http://schemas.microsoft.com/office/drawing/2014/main" id="{3C197359-984C-46D0-8A51-B98CB1D4D2F3}"/>
-                  </a:ext>
-                </a:extLst>
-              </p:cNvPr>
+              <p:cNvPr id="9" name="Rectangle: Rounded Corners 8"/>
               <p:cNvSpPr/>
               <p:nvPr userDrawn="1"/>
             </p:nvSpPr>
@@ -5189,13 +4801,7 @@
           </p:sp>
           <p:sp>
             <p:nvSpPr>
-              <p:cNvPr id="10" name="Rectangle: Rounded Corners 9">
-                <a:extLst>
-                  <a:ext uri="{FF2B5EF4-FFF2-40B4-BE49-F238E27FC236}">
-                    <a16:creationId xmlns:a16="http://schemas.microsoft.com/office/drawing/2014/main" id="{0413640F-302A-4F0D-BB79-E28A5E756CB0}"/>
-                  </a:ext>
-                </a:extLst>
-              </p:cNvPr>
+              <p:cNvPr id="10" name="Rectangle: Rounded Corners 9"/>
               <p:cNvSpPr/>
               <p:nvPr userDrawn="1"/>
             </p:nvSpPr>
@@ -5254,13 +4860,7 @@
           </p:sp>
           <p:sp>
             <p:nvSpPr>
-              <p:cNvPr id="12" name="Circle: Hollow 11">
-                <a:extLst>
-                  <a:ext uri="{FF2B5EF4-FFF2-40B4-BE49-F238E27FC236}">
-                    <a16:creationId xmlns:a16="http://schemas.microsoft.com/office/drawing/2014/main" id="{1F0A2C54-CDD2-4AED-8188-711E2B556ED7}"/>
-                  </a:ext>
-                </a:extLst>
-              </p:cNvPr>
+              <p:cNvPr id="12" name="Circle: Hollow 11"/>
               <p:cNvSpPr/>
               <p:nvPr userDrawn="1"/>
             </p:nvSpPr>
@@ -5322,13 +4922,7 @@
           </p:sp>
           <p:sp>
             <p:nvSpPr>
-              <p:cNvPr id="13" name="Circle: Hollow 12">
-                <a:extLst>
-                  <a:ext uri="{FF2B5EF4-FFF2-40B4-BE49-F238E27FC236}">
-                    <a16:creationId xmlns:a16="http://schemas.microsoft.com/office/drawing/2014/main" id="{75ED3DF4-C9D6-4BB6-A2B9-E5CA4FA70BFB}"/>
-                  </a:ext>
-                </a:extLst>
-              </p:cNvPr>
+              <p:cNvPr id="13" name="Circle: Hollow 12"/>
               <p:cNvSpPr/>
               <p:nvPr userDrawn="1"/>
             </p:nvSpPr>
@@ -5390,13 +4984,7 @@
           </p:sp>
           <p:sp>
             <p:nvSpPr>
-              <p:cNvPr id="14" name="Circle: Hollow 13">
-                <a:extLst>
-                  <a:ext uri="{FF2B5EF4-FFF2-40B4-BE49-F238E27FC236}">
-                    <a16:creationId xmlns:a16="http://schemas.microsoft.com/office/drawing/2014/main" id="{6ADB9004-20CC-4775-A94C-01AF85407695}"/>
-                  </a:ext>
-                </a:extLst>
-              </p:cNvPr>
+              <p:cNvPr id="14" name="Circle: Hollow 13"/>
               <p:cNvSpPr/>
               <p:nvPr userDrawn="1"/>
             </p:nvSpPr>
@@ -5458,13 +5046,7 @@
           </p:sp>
           <p:sp>
             <p:nvSpPr>
-              <p:cNvPr id="15" name="Freeform: Shape 14">
-                <a:extLst>
-                  <a:ext uri="{FF2B5EF4-FFF2-40B4-BE49-F238E27FC236}">
-                    <a16:creationId xmlns:a16="http://schemas.microsoft.com/office/drawing/2014/main" id="{BAE17066-8B58-479D-ADC0-C0AE3E0C1818}"/>
-                  </a:ext>
-                </a:extLst>
-              </p:cNvPr>
+              <p:cNvPr id="15" name="Freeform: Shape 14"/>
               <p:cNvSpPr/>
               <p:nvPr userDrawn="1"/>
             </p:nvSpPr>
@@ -5608,13 +5190,7 @@
         </p:grpSp>
         <p:grpSp>
           <p:nvGrpSpPr>
-            <p:cNvPr id="23" name="Group 22">
-              <a:extLst>
-                <a:ext uri="{FF2B5EF4-FFF2-40B4-BE49-F238E27FC236}">
-                  <a16:creationId xmlns:a16="http://schemas.microsoft.com/office/drawing/2014/main" id="{577B0D4A-E3C1-4B7D-8088-814C22F0A19F}"/>
-                </a:ext>
-              </a:extLst>
-            </p:cNvPr>
+            <p:cNvPr id="23" name="Group 22"/>
             <p:cNvGrpSpPr/>
             <p:nvPr userDrawn="1"/>
           </p:nvGrpSpPr>
@@ -5628,13 +5204,7 @@
           </p:grpSpPr>
           <p:pic>
             <p:nvPicPr>
-              <p:cNvPr id="16" name="Picture 15">
-                <a:extLst>
-                  <a:ext uri="{FF2B5EF4-FFF2-40B4-BE49-F238E27FC236}">
-                    <a16:creationId xmlns:a16="http://schemas.microsoft.com/office/drawing/2014/main" id="{91FEE50B-8E3D-46B2-8EA0-62CF7EFC67DF}"/>
-                  </a:ext>
-                </a:extLst>
-              </p:cNvPr>
+              <p:cNvPr id="16" name="Picture 15"/>
               <p:cNvPicPr>
                 <a:picLocks noChangeAspect="1"/>
               </p:cNvPicPr>
@@ -5671,13 +5241,7 @@
           </p:pic>
           <p:sp>
             <p:nvSpPr>
-              <p:cNvPr id="17" name="Circle: Hollow 16">
-                <a:extLst>
-                  <a:ext uri="{FF2B5EF4-FFF2-40B4-BE49-F238E27FC236}">
-                    <a16:creationId xmlns:a16="http://schemas.microsoft.com/office/drawing/2014/main" id="{85B9006B-48FC-4507-B2E2-05BA6E61F230}"/>
-                  </a:ext>
-                </a:extLst>
-              </p:cNvPr>
+              <p:cNvPr id="17" name="Circle: Hollow 16"/>
               <p:cNvSpPr/>
               <p:nvPr userDrawn="1"/>
             </p:nvSpPr>
@@ -5739,13 +5303,7 @@
           </p:sp>
           <p:sp>
             <p:nvSpPr>
-              <p:cNvPr id="19" name="Freeform: Shape 18">
-                <a:extLst>
-                  <a:ext uri="{FF2B5EF4-FFF2-40B4-BE49-F238E27FC236}">
-                    <a16:creationId xmlns:a16="http://schemas.microsoft.com/office/drawing/2014/main" id="{F8FD8C2B-CF95-4359-8C9B-66F6DEF41BC2}"/>
-                  </a:ext>
-                </a:extLst>
-              </p:cNvPr>
+              <p:cNvPr id="19" name="Freeform: Shape 18"/>
               <p:cNvSpPr/>
               <p:nvPr userDrawn="1"/>
             </p:nvSpPr>
@@ -5888,13 +5446,7 @@
           </p:sp>
           <p:sp>
             <p:nvSpPr>
-              <p:cNvPr id="21" name="Rectangle: Rounded Corners 20">
-                <a:extLst>
-                  <a:ext uri="{FF2B5EF4-FFF2-40B4-BE49-F238E27FC236}">
-                    <a16:creationId xmlns:a16="http://schemas.microsoft.com/office/drawing/2014/main" id="{B07CB7B1-F420-416D-8B5A-CDA12EF282E8}"/>
-                  </a:ext>
-                </a:extLst>
-              </p:cNvPr>
+              <p:cNvPr id="21" name="Rectangle: Rounded Corners 20"/>
               <p:cNvSpPr/>
               <p:nvPr userDrawn="1"/>
             </p:nvSpPr>
@@ -5954,11 +5506,6 @@
         </p:grpSp>
       </p:grpSp>
     </p:spTree>
-    <p:extLst>
-      <p:ext uri="{BB962C8B-B14F-4D97-AF65-F5344CB8AC3E}">
-        <p14:creationId xmlns:p14="http://schemas.microsoft.com/office/powerpoint/2010/main" val="3974830917"/>
-      </p:ext>
-    </p:extLst>
   </p:cSld>
   <p:clrMapOvr>
     <a:masterClrMapping/>
@@ -6029,7 +5576,7 @@
                   </a:schemeClr>
                 </a:solidFill>
                 <a:latin typeface="+mj-lt"/>
-                <a:cs typeface="Arial" pitchFamily="34" charset="0"/>
+                <a:cs typeface="Arial" panose="020B0604020202020204" pitchFamily="34" charset="0"/>
               </a:defRPr>
             </a:lvl1pPr>
           </a:lstStyle>
@@ -6039,15 +5586,11 @@
               <a:rPr lang="en-US" altLang="ko-KR" dirty="0"/>
               <a:t>PNG &amp; Shapes Layout</a:t>
             </a:r>
+            <a:endParaRPr lang="en-US" altLang="ko-KR" dirty="0"/>
           </a:p>
         </p:txBody>
       </p:sp>
     </p:spTree>
-    <p:extLst>
-      <p:ext uri="{BB962C8B-B14F-4D97-AF65-F5344CB8AC3E}">
-        <p14:creationId xmlns:p14="http://schemas.microsoft.com/office/powerpoint/2010/main" val="2446392755"/>
-      </p:ext>
-    </p:extLst>
   </p:cSld>
   <p:clrMapOvr>
     <a:masterClrMapping/>
@@ -6104,7 +5647,7 @@
                   </a:schemeClr>
                 </a:solidFill>
                 <a:latin typeface="+mj-lt"/>
-                <a:cs typeface="Arial" pitchFamily="34" charset="0"/>
+                <a:cs typeface="Arial" panose="020B0604020202020204" pitchFamily="34" charset="0"/>
               </a:defRPr>
             </a:lvl1pPr>
           </a:lstStyle>
@@ -6114,6 +5657,7 @@
               <a:rPr lang="en-US" altLang="ko-KR" dirty="0"/>
               <a:t>Icon Sets Layout</a:t>
             </a:r>
+            <a:endParaRPr lang="en-US" altLang="ko-KR" dirty="0"/>
           </a:p>
         </p:txBody>
       </p:sp>
@@ -6161,7 +5705,7 @@
           <a:lstStyle/>
           <a:p>
             <a:pPr algn="ctr"/>
-            <a:endParaRPr lang="ko-KR" altLang="en-US" sz="1351"/>
+            <a:endParaRPr lang="ko-KR" altLang="en-US" sz="1350"/>
           </a:p>
         </p:txBody>
       </p:sp>
@@ -6211,7 +5755,7 @@
           <a:lstStyle/>
           <a:p>
             <a:pPr algn="ctr"/>
-            <a:endParaRPr lang="ko-KR" altLang="en-US" sz="1351">
+            <a:endParaRPr lang="ko-KR" altLang="en-US" sz="1350">
               <a:solidFill>
                 <a:schemeClr val="bg1"/>
               </a:solidFill>
@@ -6266,7 +5810,7 @@
           <a:lstStyle/>
           <a:p>
             <a:pPr algn="ctr"/>
-            <a:endParaRPr lang="ko-KR" altLang="en-US" sz="1351">
+            <a:endParaRPr lang="ko-KR" altLang="en-US" sz="1350">
               <a:solidFill>
                 <a:schemeClr val="tx1">
                   <a:lumMod val="85000"/>
@@ -6279,13 +5823,7 @@
       </p:sp>
       <p:sp>
         <p:nvSpPr>
-          <p:cNvPr id="58" name="TextBox 57">
-            <a:extLst>
-              <a:ext uri="{FF2B5EF4-FFF2-40B4-BE49-F238E27FC236}">
-                <a16:creationId xmlns:a16="http://schemas.microsoft.com/office/drawing/2014/main" id="{5644E8BB-F13A-4AE0-889E-633DE4143787}"/>
-              </a:ext>
-            </a:extLst>
-          </p:cNvPr>
+          <p:cNvPr id="58" name="TextBox 57"/>
           <p:cNvSpPr txBox="1"/>
           <p:nvPr userDrawn="1"/>
         </p:nvSpPr>
@@ -6310,8 +5848,8 @@
                 <a:solidFill>
                   <a:schemeClr val="bg1"/>
                 </a:solidFill>
-                <a:latin typeface="Arial" pitchFamily="34" charset="0"/>
-                <a:cs typeface="Arial" pitchFamily="34" charset="0"/>
+                <a:latin typeface="Arial" panose="020B0604020202020204" pitchFamily="34" charset="0"/>
+                <a:cs typeface="Arial" panose="020B0604020202020204" pitchFamily="34" charset="0"/>
               </a:rPr>
               <a:t>You can Resize without losing quality</a:t>
             </a:r>
@@ -6319,21 +5857,15 @@
               <a:solidFill>
                 <a:schemeClr val="bg1"/>
               </a:solidFill>
-              <a:latin typeface="Arial" pitchFamily="34" charset="0"/>
-              <a:cs typeface="Arial" pitchFamily="34" charset="0"/>
+              <a:latin typeface="Arial" panose="020B0604020202020204" pitchFamily="34" charset="0"/>
+              <a:cs typeface="Arial" panose="020B0604020202020204" pitchFamily="34" charset="0"/>
             </a:endParaRPr>
           </a:p>
         </p:txBody>
       </p:sp>
       <p:sp>
         <p:nvSpPr>
-          <p:cNvPr id="59" name="TextBox 58">
-            <a:extLst>
-              <a:ext uri="{FF2B5EF4-FFF2-40B4-BE49-F238E27FC236}">
-                <a16:creationId xmlns:a16="http://schemas.microsoft.com/office/drawing/2014/main" id="{F2CE2B8B-ED32-491A-95B2-D28904BC432C}"/>
-              </a:ext>
-            </a:extLst>
-          </p:cNvPr>
+          <p:cNvPr id="59" name="TextBox 58"/>
           <p:cNvSpPr txBox="1"/>
           <p:nvPr userDrawn="1"/>
         </p:nvSpPr>
@@ -6358,11 +5890,18 @@
                 <a:solidFill>
                   <a:schemeClr val="bg1"/>
                 </a:solidFill>
-                <a:latin typeface="Arial" pitchFamily="34" charset="0"/>
-                <a:cs typeface="Arial" pitchFamily="34" charset="0"/>
+                <a:latin typeface="Arial" panose="020B0604020202020204" pitchFamily="34" charset="0"/>
+                <a:cs typeface="Arial" panose="020B0604020202020204" pitchFamily="34" charset="0"/>
               </a:rPr>
               <a:t>You can Change Fill Color &amp;</a:t>
             </a:r>
+            <a:endParaRPr lang="en-US" altLang="ko-KR" sz="1400" b="1" dirty="0">
+              <a:solidFill>
+                <a:schemeClr val="bg1"/>
+              </a:solidFill>
+              <a:latin typeface="Arial" panose="020B0604020202020204" pitchFamily="34" charset="0"/>
+              <a:cs typeface="Arial" panose="020B0604020202020204" pitchFamily="34" charset="0"/>
+            </a:endParaRPr>
           </a:p>
           <a:p>
             <a:r>
@@ -6370,8 +5909,8 @@
                 <a:solidFill>
                   <a:schemeClr val="bg1"/>
                 </a:solidFill>
-                <a:latin typeface="Arial" pitchFamily="34" charset="0"/>
-                <a:cs typeface="Arial" pitchFamily="34" charset="0"/>
+                <a:latin typeface="Arial" panose="020B0604020202020204" pitchFamily="34" charset="0"/>
+                <a:cs typeface="Arial" panose="020B0604020202020204" pitchFamily="34" charset="0"/>
               </a:rPr>
               <a:t>Line Color</a:t>
             </a:r>
@@ -6379,21 +5918,15 @@
               <a:solidFill>
                 <a:schemeClr val="bg1"/>
               </a:solidFill>
-              <a:latin typeface="Arial" pitchFamily="34" charset="0"/>
-              <a:cs typeface="Arial" pitchFamily="34" charset="0"/>
+              <a:latin typeface="Arial" panose="020B0604020202020204" pitchFamily="34" charset="0"/>
+              <a:cs typeface="Arial" panose="020B0604020202020204" pitchFamily="34" charset="0"/>
             </a:endParaRPr>
           </a:p>
         </p:txBody>
       </p:sp>
       <p:sp>
         <p:nvSpPr>
-          <p:cNvPr id="60" name="TextBox 59">
-            <a:extLst>
-              <a:ext uri="{FF2B5EF4-FFF2-40B4-BE49-F238E27FC236}">
-                <a16:creationId xmlns:a16="http://schemas.microsoft.com/office/drawing/2014/main" id="{962A52DF-2523-4479-BFA3-B5ACE9887E1C}"/>
-              </a:ext>
-            </a:extLst>
-          </p:cNvPr>
+          <p:cNvPr id="60" name="TextBox 59"/>
           <p:cNvSpPr txBox="1"/>
           <p:nvPr userDrawn="1"/>
         </p:nvSpPr>
@@ -6418,8 +5951,8 @@
                 <a:solidFill>
                   <a:schemeClr val="bg1"/>
                 </a:solidFill>
-                <a:latin typeface="Arial" pitchFamily="34" charset="0"/>
-                <a:cs typeface="Arial" pitchFamily="34" charset="0"/>
+                <a:latin typeface="Arial" panose="020B0604020202020204" pitchFamily="34" charset="0"/>
+                <a:cs typeface="Arial" panose="020B0604020202020204" pitchFamily="34" charset="0"/>
               </a:rPr>
               <a:t>www.allppt.com</a:t>
             </a:r>
@@ -6427,21 +5960,15 @@
               <a:solidFill>
                 <a:schemeClr val="bg1"/>
               </a:solidFill>
-              <a:latin typeface="Arial" pitchFamily="34" charset="0"/>
-              <a:cs typeface="Arial" pitchFamily="34" charset="0"/>
+              <a:latin typeface="Arial" panose="020B0604020202020204" pitchFamily="34" charset="0"/>
+              <a:cs typeface="Arial" panose="020B0604020202020204" pitchFamily="34" charset="0"/>
             </a:endParaRPr>
           </a:p>
         </p:txBody>
       </p:sp>
       <p:sp>
         <p:nvSpPr>
-          <p:cNvPr id="61" name="TextBox 60">
-            <a:extLst>
-              <a:ext uri="{FF2B5EF4-FFF2-40B4-BE49-F238E27FC236}">
-                <a16:creationId xmlns:a16="http://schemas.microsoft.com/office/drawing/2014/main" id="{BAAC314F-E96A-4408-95DE-A70E9ED054AF}"/>
-              </a:ext>
-            </a:extLst>
-          </p:cNvPr>
+          <p:cNvPr id="61" name="TextBox 60"/>
           <p:cNvSpPr txBox="1"/>
           <p:nvPr userDrawn="1"/>
         </p:nvSpPr>
@@ -6468,10 +5995,18 @@
                 </a:solidFill>
                 <a:latin typeface="+mn-lt"/>
                 <a:ea typeface="+mn-ea"/>
-                <a:cs typeface="Arial" pitchFamily="34" charset="0"/>
+                <a:cs typeface="Arial" panose="020B0604020202020204" pitchFamily="34" charset="0"/>
               </a:rPr>
               <a:t>FREE </a:t>
             </a:r>
+            <a:endParaRPr lang="en-US" altLang="ko-KR" sz="2800" b="1" dirty="0">
+              <a:solidFill>
+                <a:schemeClr val="bg1"/>
+              </a:solidFill>
+              <a:latin typeface="+mn-lt"/>
+              <a:ea typeface="+mn-ea"/>
+              <a:cs typeface="Arial" panose="020B0604020202020204" pitchFamily="34" charset="0"/>
+            </a:endParaRPr>
           </a:p>
           <a:p>
             <a:r>
@@ -6481,19 +6016,22 @@
                 </a:solidFill>
                 <a:latin typeface="+mn-lt"/>
                 <a:ea typeface="+mn-ea"/>
-                <a:cs typeface="Arial" pitchFamily="34" charset="0"/>
+                <a:cs typeface="Arial" panose="020B0604020202020204" pitchFamily="34" charset="0"/>
               </a:rPr>
               <a:t>PPT TEMPLATES</a:t>
             </a:r>
+            <a:endParaRPr lang="en-US" altLang="ko-KR" sz="2800" b="1" dirty="0">
+              <a:solidFill>
+                <a:schemeClr val="bg1"/>
+              </a:solidFill>
+              <a:latin typeface="+mn-lt"/>
+              <a:ea typeface="+mn-ea"/>
+              <a:cs typeface="Arial" panose="020B0604020202020204" pitchFamily="34" charset="0"/>
+            </a:endParaRPr>
           </a:p>
         </p:txBody>
       </p:sp>
     </p:spTree>
-    <p:extLst>
-      <p:ext uri="{BB962C8B-B14F-4D97-AF65-F5344CB8AC3E}">
-        <p14:creationId xmlns:p14="http://schemas.microsoft.com/office/powerpoint/2010/main" val="313676580"/>
-      </p:ext>
-    </p:extLst>
   </p:cSld>
   <p:clrMapOvr>
     <a:masterClrMapping/>
@@ -6519,11 +6057,6 @@
         </a:xfrm>
       </p:grpSpPr>
     </p:spTree>
-    <p:extLst>
-      <p:ext uri="{BB962C8B-B14F-4D97-AF65-F5344CB8AC3E}">
-        <p14:creationId xmlns:p14="http://schemas.microsoft.com/office/powerpoint/2010/main" val="145839437"/>
-      </p:ext>
-    </p:extLst>
   </p:cSld>
   <p:clrMapOvr>
     <a:masterClrMapping/>
@@ -6567,13 +6100,7 @@
       </p:grpSpPr>
       <p:pic>
         <p:nvPicPr>
-          <p:cNvPr id="11" name="Picture 10">
-            <a:extLst>
-              <a:ext uri="{FF2B5EF4-FFF2-40B4-BE49-F238E27FC236}">
-                <a16:creationId xmlns:a16="http://schemas.microsoft.com/office/drawing/2014/main" id="{45802C41-163D-4844-9D5C-7285E36EE050}"/>
-              </a:ext>
-            </a:extLst>
-          </p:cNvPr>
+          <p:cNvPr id="11" name="Picture 10"/>
           <p:cNvPicPr>
             <a:picLocks noChangeAspect="1"/>
           </p:cNvPicPr>
@@ -6610,13 +6137,7 @@
       </p:pic>
       <p:sp>
         <p:nvSpPr>
-          <p:cNvPr id="27" name="Circle: Hollow 26">
-            <a:extLst>
-              <a:ext uri="{FF2B5EF4-FFF2-40B4-BE49-F238E27FC236}">
-                <a16:creationId xmlns:a16="http://schemas.microsoft.com/office/drawing/2014/main" id="{E1194625-2A02-42BF-985E-CB02981CC3F5}"/>
-              </a:ext>
-            </a:extLst>
-          </p:cNvPr>
+          <p:cNvPr id="27" name="Circle: Hollow 26"/>
           <p:cNvSpPr/>
           <p:nvPr userDrawn="1"/>
         </p:nvSpPr>
@@ -6678,13 +6199,7 @@
       </p:sp>
       <p:pic>
         <p:nvPicPr>
-          <p:cNvPr id="2" name="Picture 1">
-            <a:extLst>
-              <a:ext uri="{FF2B5EF4-FFF2-40B4-BE49-F238E27FC236}">
-                <a16:creationId xmlns:a16="http://schemas.microsoft.com/office/drawing/2014/main" id="{EED3AF95-7EEC-4AF2-944F-478E81710132}"/>
-              </a:ext>
-            </a:extLst>
-          </p:cNvPr>
+          <p:cNvPr id="2" name="Picture 1"/>
           <p:cNvPicPr>
             <a:picLocks noChangeAspect="1"/>
           </p:cNvPicPr>
@@ -6721,13 +6236,7 @@
       </p:pic>
       <p:sp>
         <p:nvSpPr>
-          <p:cNvPr id="4" name="Oval 3">
-            <a:extLst>
-              <a:ext uri="{FF2B5EF4-FFF2-40B4-BE49-F238E27FC236}">
-                <a16:creationId xmlns:a16="http://schemas.microsoft.com/office/drawing/2014/main" id="{70C67E91-BEE2-4AE6-AD49-3064788AA62C}"/>
-              </a:ext>
-            </a:extLst>
-          </p:cNvPr>
+          <p:cNvPr id="4" name="Oval 3"/>
           <p:cNvSpPr/>
           <p:nvPr userDrawn="1"/>
         </p:nvSpPr>
@@ -6795,13 +6304,7 @@
       </p:sp>
       <p:sp>
         <p:nvSpPr>
-          <p:cNvPr id="5" name="Freeform: Shape 4">
-            <a:extLst>
-              <a:ext uri="{FF2B5EF4-FFF2-40B4-BE49-F238E27FC236}">
-                <a16:creationId xmlns:a16="http://schemas.microsoft.com/office/drawing/2014/main" id="{863EDB17-8564-401D-92A1-21969EA8E8BF}"/>
-              </a:ext>
-            </a:extLst>
-          </p:cNvPr>
+          <p:cNvPr id="5" name="Freeform: Shape 4"/>
           <p:cNvSpPr/>
           <p:nvPr userDrawn="1"/>
         </p:nvSpPr>
@@ -6944,13 +6447,7 @@
       </p:sp>
       <p:sp>
         <p:nvSpPr>
-          <p:cNvPr id="6" name="Rectangle: Rounded Corners 5">
-            <a:extLst>
-              <a:ext uri="{FF2B5EF4-FFF2-40B4-BE49-F238E27FC236}">
-                <a16:creationId xmlns:a16="http://schemas.microsoft.com/office/drawing/2014/main" id="{6BEA3CCE-2438-4D3A-A346-5006736FBD98}"/>
-              </a:ext>
-            </a:extLst>
-          </p:cNvPr>
+          <p:cNvPr id="6" name="Rectangle: Rounded Corners 5"/>
           <p:cNvSpPr/>
           <p:nvPr userDrawn="1"/>
         </p:nvSpPr>
@@ -7013,13 +6510,7 @@
       </p:sp>
       <p:sp>
         <p:nvSpPr>
-          <p:cNvPr id="7" name="Rectangle: Rounded Corners 6">
-            <a:extLst>
-              <a:ext uri="{FF2B5EF4-FFF2-40B4-BE49-F238E27FC236}">
-                <a16:creationId xmlns:a16="http://schemas.microsoft.com/office/drawing/2014/main" id="{69C62ABA-F31E-4507-89F4-65DB297C2F65}"/>
-              </a:ext>
-            </a:extLst>
-          </p:cNvPr>
+          <p:cNvPr id="7" name="Rectangle: Rounded Corners 6"/>
           <p:cNvSpPr/>
           <p:nvPr userDrawn="1"/>
         </p:nvSpPr>
@@ -7082,13 +6573,7 @@
       </p:sp>
       <p:pic>
         <p:nvPicPr>
-          <p:cNvPr id="8" name="Picture 7">
-            <a:extLst>
-              <a:ext uri="{FF2B5EF4-FFF2-40B4-BE49-F238E27FC236}">
-                <a16:creationId xmlns:a16="http://schemas.microsoft.com/office/drawing/2014/main" id="{E9A422A2-A93A-481F-86EB-95A20F5E6CF0}"/>
-              </a:ext>
-            </a:extLst>
-          </p:cNvPr>
+          <p:cNvPr id="8" name="Picture 7"/>
           <p:cNvPicPr>
             <a:picLocks noChangeAspect="1"/>
           </p:cNvPicPr>
@@ -7125,13 +6610,7 @@
       </p:pic>
       <p:pic>
         <p:nvPicPr>
-          <p:cNvPr id="9" name="Picture 8">
-            <a:extLst>
-              <a:ext uri="{FF2B5EF4-FFF2-40B4-BE49-F238E27FC236}">
-                <a16:creationId xmlns:a16="http://schemas.microsoft.com/office/drawing/2014/main" id="{5C342D7D-A635-4EED-A135-5639C645499F}"/>
-              </a:ext>
-            </a:extLst>
-          </p:cNvPr>
+          <p:cNvPr id="9" name="Picture 8"/>
           <p:cNvPicPr>
             <a:picLocks noChangeAspect="1"/>
           </p:cNvPicPr>
@@ -7168,13 +6647,7 @@
       </p:pic>
       <p:pic>
         <p:nvPicPr>
-          <p:cNvPr id="10" name="Picture 9">
-            <a:extLst>
-              <a:ext uri="{FF2B5EF4-FFF2-40B4-BE49-F238E27FC236}">
-                <a16:creationId xmlns:a16="http://schemas.microsoft.com/office/drawing/2014/main" id="{3F9383E9-89D4-4C93-AF22-7F09A37024D4}"/>
-              </a:ext>
-            </a:extLst>
-          </p:cNvPr>
+          <p:cNvPr id="10" name="Picture 9"/>
           <p:cNvPicPr>
             <a:picLocks noChangeAspect="1"/>
           </p:cNvPicPr>
@@ -7211,13 +6684,7 @@
       </p:pic>
       <p:sp>
         <p:nvSpPr>
-          <p:cNvPr id="12" name="Rectangle: Rounded Corners 11">
-            <a:extLst>
-              <a:ext uri="{FF2B5EF4-FFF2-40B4-BE49-F238E27FC236}">
-                <a16:creationId xmlns:a16="http://schemas.microsoft.com/office/drawing/2014/main" id="{933D01D5-159B-4682-BC38-3FC87152F25C}"/>
-              </a:ext>
-            </a:extLst>
-          </p:cNvPr>
+          <p:cNvPr id="12" name="Rectangle: Rounded Corners 11"/>
           <p:cNvSpPr/>
           <p:nvPr userDrawn="1"/>
         </p:nvSpPr>
@@ -7280,13 +6747,7 @@
       </p:sp>
       <p:sp>
         <p:nvSpPr>
-          <p:cNvPr id="14" name="Rectangle: Rounded Corners 13">
-            <a:extLst>
-              <a:ext uri="{FF2B5EF4-FFF2-40B4-BE49-F238E27FC236}">
-                <a16:creationId xmlns:a16="http://schemas.microsoft.com/office/drawing/2014/main" id="{D69C8D3C-C654-4784-82A6-BC44B04649EC}"/>
-              </a:ext>
-            </a:extLst>
-          </p:cNvPr>
+          <p:cNvPr id="14" name="Rectangle: Rounded Corners 13"/>
           <p:cNvSpPr/>
           <p:nvPr userDrawn="1"/>
         </p:nvSpPr>
@@ -7345,13 +6806,7 @@
       </p:sp>
       <p:sp>
         <p:nvSpPr>
-          <p:cNvPr id="15" name="Rectangle: Rounded Corners 14">
-            <a:extLst>
-              <a:ext uri="{FF2B5EF4-FFF2-40B4-BE49-F238E27FC236}">
-                <a16:creationId xmlns:a16="http://schemas.microsoft.com/office/drawing/2014/main" id="{E1314CF0-4747-405B-AB6C-2DC40EAC3061}"/>
-              </a:ext>
-            </a:extLst>
-          </p:cNvPr>
+          <p:cNvPr id="15" name="Rectangle: Rounded Corners 14"/>
           <p:cNvSpPr/>
           <p:nvPr userDrawn="1"/>
         </p:nvSpPr>
@@ -7410,13 +6865,7 @@
       </p:sp>
       <p:sp>
         <p:nvSpPr>
-          <p:cNvPr id="18" name="Rectangle: Rounded Corners 17">
-            <a:extLst>
-              <a:ext uri="{FF2B5EF4-FFF2-40B4-BE49-F238E27FC236}">
-                <a16:creationId xmlns:a16="http://schemas.microsoft.com/office/drawing/2014/main" id="{8BBB0BA9-067C-4FCC-90CE-905A4AE8970C}"/>
-              </a:ext>
-            </a:extLst>
-          </p:cNvPr>
+          <p:cNvPr id="18" name="Rectangle: Rounded Corners 17"/>
           <p:cNvSpPr/>
           <p:nvPr userDrawn="1"/>
         </p:nvSpPr>
@@ -7475,13 +6924,7 @@
       </p:sp>
       <p:sp>
         <p:nvSpPr>
-          <p:cNvPr id="20" name="Rectangle: Rounded Corners 19">
-            <a:extLst>
-              <a:ext uri="{FF2B5EF4-FFF2-40B4-BE49-F238E27FC236}">
-                <a16:creationId xmlns:a16="http://schemas.microsoft.com/office/drawing/2014/main" id="{256A4E2F-8293-4B87-BF73-7A8FBF0E05B4}"/>
-              </a:ext>
-            </a:extLst>
-          </p:cNvPr>
+          <p:cNvPr id="20" name="Rectangle: Rounded Corners 19"/>
           <p:cNvSpPr/>
           <p:nvPr userDrawn="1"/>
         </p:nvSpPr>
@@ -7540,13 +6983,7 @@
       </p:sp>
       <p:sp>
         <p:nvSpPr>
-          <p:cNvPr id="22" name="Circle: Hollow 21">
-            <a:extLst>
-              <a:ext uri="{FF2B5EF4-FFF2-40B4-BE49-F238E27FC236}">
-                <a16:creationId xmlns:a16="http://schemas.microsoft.com/office/drawing/2014/main" id="{7A8CC623-0084-4053-B628-564CB9189BFB}"/>
-              </a:ext>
-            </a:extLst>
-          </p:cNvPr>
+          <p:cNvPr id="22" name="Circle: Hollow 21"/>
           <p:cNvSpPr/>
           <p:nvPr userDrawn="1"/>
         </p:nvSpPr>
@@ -7608,13 +7045,7 @@
       </p:sp>
       <p:sp>
         <p:nvSpPr>
-          <p:cNvPr id="25" name="Circle: Hollow 24">
-            <a:extLst>
-              <a:ext uri="{FF2B5EF4-FFF2-40B4-BE49-F238E27FC236}">
-                <a16:creationId xmlns:a16="http://schemas.microsoft.com/office/drawing/2014/main" id="{A1EBE448-4C63-4F12-B4BF-098CFA49AF34}"/>
-              </a:ext>
-            </a:extLst>
-          </p:cNvPr>
+          <p:cNvPr id="25" name="Circle: Hollow 24"/>
           <p:cNvSpPr/>
           <p:nvPr userDrawn="1"/>
         </p:nvSpPr>
@@ -7676,13 +7107,7 @@
       </p:sp>
       <p:sp>
         <p:nvSpPr>
-          <p:cNvPr id="13" name="Rectangle: Rounded Corners 12">
-            <a:extLst>
-              <a:ext uri="{FF2B5EF4-FFF2-40B4-BE49-F238E27FC236}">
-                <a16:creationId xmlns:a16="http://schemas.microsoft.com/office/drawing/2014/main" id="{07E3970A-926A-4602-B2CB-329719FA7DF3}"/>
-              </a:ext>
-            </a:extLst>
-          </p:cNvPr>
+          <p:cNvPr id="13" name="Rectangle: Rounded Corners 12"/>
           <p:cNvSpPr/>
           <p:nvPr userDrawn="1"/>
         </p:nvSpPr>
@@ -7745,13 +7170,7 @@
       </p:sp>
       <p:sp>
         <p:nvSpPr>
-          <p:cNvPr id="28" name="Circle: Hollow 27">
-            <a:extLst>
-              <a:ext uri="{FF2B5EF4-FFF2-40B4-BE49-F238E27FC236}">
-                <a16:creationId xmlns:a16="http://schemas.microsoft.com/office/drawing/2014/main" id="{787D885D-ED3C-4AAE-AF96-612EC5C03D33}"/>
-              </a:ext>
-            </a:extLst>
-          </p:cNvPr>
+          <p:cNvPr id="28" name="Circle: Hollow 27"/>
           <p:cNvSpPr/>
           <p:nvPr userDrawn="1"/>
         </p:nvSpPr>
@@ -7813,13 +7232,7 @@
       </p:sp>
       <p:sp>
         <p:nvSpPr>
-          <p:cNvPr id="29" name="Freeform: Shape 28">
-            <a:extLst>
-              <a:ext uri="{FF2B5EF4-FFF2-40B4-BE49-F238E27FC236}">
-                <a16:creationId xmlns:a16="http://schemas.microsoft.com/office/drawing/2014/main" id="{308B6F55-8BDB-4DDF-BDB0-A6025F557FBC}"/>
-              </a:ext>
-            </a:extLst>
-          </p:cNvPr>
+          <p:cNvPr id="29" name="Freeform: Shape 28"/>
           <p:cNvSpPr/>
           <p:nvPr userDrawn="1"/>
         </p:nvSpPr>
@@ -7962,13 +7375,7 @@
       </p:sp>
       <p:sp>
         <p:nvSpPr>
-          <p:cNvPr id="21" name="Rectangle: Rounded Corners 20">
-            <a:extLst>
-              <a:ext uri="{FF2B5EF4-FFF2-40B4-BE49-F238E27FC236}">
-                <a16:creationId xmlns:a16="http://schemas.microsoft.com/office/drawing/2014/main" id="{73BB6E6C-2E77-4E24-89ED-EDB678C30F9E}"/>
-              </a:ext>
-            </a:extLst>
-          </p:cNvPr>
+          <p:cNvPr id="21" name="Rectangle: Rounded Corners 20"/>
           <p:cNvSpPr/>
           <p:nvPr userDrawn="1"/>
         </p:nvSpPr>
@@ -8027,13 +7434,7 @@
       </p:sp>
       <p:sp>
         <p:nvSpPr>
-          <p:cNvPr id="31" name="Circle: Hollow 30">
-            <a:extLst>
-              <a:ext uri="{FF2B5EF4-FFF2-40B4-BE49-F238E27FC236}">
-                <a16:creationId xmlns:a16="http://schemas.microsoft.com/office/drawing/2014/main" id="{C295F18F-4230-4FCB-B589-C1201320C08D}"/>
-              </a:ext>
-            </a:extLst>
-          </p:cNvPr>
+          <p:cNvPr id="31" name="Circle: Hollow 30"/>
           <p:cNvSpPr/>
           <p:nvPr userDrawn="1"/>
         </p:nvSpPr>
@@ -8095,13 +7496,7 @@
       </p:sp>
       <p:sp>
         <p:nvSpPr>
-          <p:cNvPr id="32" name="Circle: Hollow 31">
-            <a:extLst>
-              <a:ext uri="{FF2B5EF4-FFF2-40B4-BE49-F238E27FC236}">
-                <a16:creationId xmlns:a16="http://schemas.microsoft.com/office/drawing/2014/main" id="{18AA53BD-3380-4C96-9601-0B3E6BC574E0}"/>
-              </a:ext>
-            </a:extLst>
-          </p:cNvPr>
+          <p:cNvPr id="32" name="Circle: Hollow 31"/>
           <p:cNvSpPr/>
           <p:nvPr userDrawn="1"/>
         </p:nvSpPr>
@@ -8162,11 +7557,6 @@
         </p:txBody>
       </p:sp>
     </p:spTree>
-    <p:extLst>
-      <p:ext uri="{BB962C8B-B14F-4D97-AF65-F5344CB8AC3E}">
-        <p14:creationId xmlns:p14="http://schemas.microsoft.com/office/powerpoint/2010/main" val="2984720244"/>
-      </p:ext>
-    </p:extLst>
   </p:cSld>
   <p:clrMapOvr>
     <a:masterClrMapping/>
@@ -8209,13 +7599,7 @@
       </p:grpSpPr>
       <p:grpSp>
         <p:nvGrpSpPr>
-          <p:cNvPr id="17" name="Group 16">
-            <a:extLst>
-              <a:ext uri="{FF2B5EF4-FFF2-40B4-BE49-F238E27FC236}">
-                <a16:creationId xmlns:a16="http://schemas.microsoft.com/office/drawing/2014/main" id="{327D0A9D-21AD-4F16-ABF6-FCEDEAC7CBC3}"/>
-              </a:ext>
-            </a:extLst>
-          </p:cNvPr>
+          <p:cNvPr id="17" name="Group 16"/>
           <p:cNvGrpSpPr/>
           <p:nvPr userDrawn="1"/>
         </p:nvGrpSpPr>
@@ -8229,13 +7613,7 @@
         </p:grpSpPr>
         <p:sp>
           <p:nvSpPr>
-            <p:cNvPr id="2" name="Oval 1">
-              <a:extLst>
-                <a:ext uri="{FF2B5EF4-FFF2-40B4-BE49-F238E27FC236}">
-                  <a16:creationId xmlns:a16="http://schemas.microsoft.com/office/drawing/2014/main" id="{0E3802B7-A996-44D8-8E95-073D460506DD}"/>
-                </a:ext>
-              </a:extLst>
-            </p:cNvPr>
+            <p:cNvPr id="2" name="Oval 1"/>
             <p:cNvSpPr/>
             <p:nvPr userDrawn="1"/>
           </p:nvSpPr>
@@ -8303,13 +7681,7 @@
         </p:sp>
         <p:pic>
           <p:nvPicPr>
-            <p:cNvPr id="4" name="Picture 3">
-              <a:extLst>
-                <a:ext uri="{FF2B5EF4-FFF2-40B4-BE49-F238E27FC236}">
-                  <a16:creationId xmlns:a16="http://schemas.microsoft.com/office/drawing/2014/main" id="{21BC23AE-96EE-4D54-A885-39974FAB7636}"/>
-                </a:ext>
-              </a:extLst>
-            </p:cNvPr>
+            <p:cNvPr id="4" name="Picture 3"/>
             <p:cNvPicPr>
               <a:picLocks noChangeAspect="1"/>
             </p:cNvPicPr>
@@ -8346,13 +7718,7 @@
         </p:pic>
         <p:pic>
           <p:nvPicPr>
-            <p:cNvPr id="5" name="Picture 4">
-              <a:extLst>
-                <a:ext uri="{FF2B5EF4-FFF2-40B4-BE49-F238E27FC236}">
-                  <a16:creationId xmlns:a16="http://schemas.microsoft.com/office/drawing/2014/main" id="{E79F98EE-38CF-4F42-BBFC-6D904B5931F1}"/>
-                </a:ext>
-              </a:extLst>
-            </p:cNvPr>
+            <p:cNvPr id="5" name="Picture 4"/>
             <p:cNvPicPr>
               <a:picLocks noChangeAspect="1"/>
             </p:cNvPicPr>
@@ -8389,13 +7755,7 @@
         </p:pic>
         <p:pic>
           <p:nvPicPr>
-            <p:cNvPr id="6" name="Picture 5">
-              <a:extLst>
-                <a:ext uri="{FF2B5EF4-FFF2-40B4-BE49-F238E27FC236}">
-                  <a16:creationId xmlns:a16="http://schemas.microsoft.com/office/drawing/2014/main" id="{8A7D8CCE-DBFD-4E90-8B56-4E1B4E65EA0B}"/>
-                </a:ext>
-              </a:extLst>
-            </p:cNvPr>
+            <p:cNvPr id="6" name="Picture 5"/>
             <p:cNvPicPr>
               <a:picLocks noChangeAspect="1"/>
             </p:cNvPicPr>
@@ -8432,13 +7792,7 @@
         </p:pic>
         <p:sp>
           <p:nvSpPr>
-            <p:cNvPr id="7" name="Rectangle: Rounded Corners 6">
-              <a:extLst>
-                <a:ext uri="{FF2B5EF4-FFF2-40B4-BE49-F238E27FC236}">
-                  <a16:creationId xmlns:a16="http://schemas.microsoft.com/office/drawing/2014/main" id="{6A60227F-0B6A-4822-B1CF-88C8ADB21FAF}"/>
-                </a:ext>
-              </a:extLst>
-            </p:cNvPr>
+            <p:cNvPr id="7" name="Rectangle: Rounded Corners 6"/>
             <p:cNvSpPr/>
             <p:nvPr userDrawn="1"/>
           </p:nvSpPr>
@@ -8501,13 +7855,7 @@
         </p:sp>
         <p:sp>
           <p:nvSpPr>
-            <p:cNvPr id="8" name="Rectangle: Rounded Corners 7">
-              <a:extLst>
-                <a:ext uri="{FF2B5EF4-FFF2-40B4-BE49-F238E27FC236}">
-                  <a16:creationId xmlns:a16="http://schemas.microsoft.com/office/drawing/2014/main" id="{32A927CA-2C69-422E-8CDD-1BB98E8110C4}"/>
-                </a:ext>
-              </a:extLst>
-            </p:cNvPr>
+            <p:cNvPr id="8" name="Rectangle: Rounded Corners 7"/>
             <p:cNvSpPr/>
             <p:nvPr userDrawn="1"/>
           </p:nvSpPr>
@@ -8566,13 +7914,7 @@
         </p:sp>
         <p:sp>
           <p:nvSpPr>
-            <p:cNvPr id="9" name="Rectangle: Rounded Corners 8">
-              <a:extLst>
-                <a:ext uri="{FF2B5EF4-FFF2-40B4-BE49-F238E27FC236}">
-                  <a16:creationId xmlns:a16="http://schemas.microsoft.com/office/drawing/2014/main" id="{31E524A3-8BEF-4311-9C5F-430DE3C1E73B}"/>
-                </a:ext>
-              </a:extLst>
-            </p:cNvPr>
+            <p:cNvPr id="9" name="Rectangle: Rounded Corners 8"/>
             <p:cNvSpPr/>
             <p:nvPr userDrawn="1"/>
           </p:nvSpPr>
@@ -8631,13 +7973,7 @@
         </p:sp>
         <p:sp>
           <p:nvSpPr>
-            <p:cNvPr id="10" name="Rectangle: Rounded Corners 9">
-              <a:extLst>
-                <a:ext uri="{FF2B5EF4-FFF2-40B4-BE49-F238E27FC236}">
-                  <a16:creationId xmlns:a16="http://schemas.microsoft.com/office/drawing/2014/main" id="{B0A3251D-A12D-4E0F-8F70-DEC8DD540973}"/>
-                </a:ext>
-              </a:extLst>
-            </p:cNvPr>
+            <p:cNvPr id="10" name="Rectangle: Rounded Corners 9"/>
             <p:cNvSpPr/>
             <p:nvPr userDrawn="1"/>
           </p:nvSpPr>
@@ -8696,13 +8032,7 @@
         </p:sp>
         <p:sp>
           <p:nvSpPr>
-            <p:cNvPr id="11" name="Rectangle: Rounded Corners 10">
-              <a:extLst>
-                <a:ext uri="{FF2B5EF4-FFF2-40B4-BE49-F238E27FC236}">
-                  <a16:creationId xmlns:a16="http://schemas.microsoft.com/office/drawing/2014/main" id="{5070B9DE-E2F6-4515-A0CB-D897C6A83640}"/>
-                </a:ext>
-              </a:extLst>
-            </p:cNvPr>
+            <p:cNvPr id="11" name="Rectangle: Rounded Corners 10"/>
             <p:cNvSpPr/>
             <p:nvPr userDrawn="1"/>
           </p:nvSpPr>
@@ -8761,13 +8091,7 @@
         </p:sp>
         <p:sp>
           <p:nvSpPr>
-            <p:cNvPr id="12" name="Circle: Hollow 11">
-              <a:extLst>
-                <a:ext uri="{FF2B5EF4-FFF2-40B4-BE49-F238E27FC236}">
-                  <a16:creationId xmlns:a16="http://schemas.microsoft.com/office/drawing/2014/main" id="{F3D5F4E7-4130-4F71-A905-F23D72D75F36}"/>
-                </a:ext>
-              </a:extLst>
-            </p:cNvPr>
+            <p:cNvPr id="12" name="Circle: Hollow 11"/>
             <p:cNvSpPr/>
             <p:nvPr userDrawn="1"/>
           </p:nvSpPr>
@@ -8829,13 +8153,7 @@
         </p:sp>
         <p:sp>
           <p:nvSpPr>
-            <p:cNvPr id="13" name="Circle: Hollow 12">
-              <a:extLst>
-                <a:ext uri="{FF2B5EF4-FFF2-40B4-BE49-F238E27FC236}">
-                  <a16:creationId xmlns:a16="http://schemas.microsoft.com/office/drawing/2014/main" id="{6043D486-3263-4803-85C1-2F658985FF35}"/>
-                </a:ext>
-              </a:extLst>
-            </p:cNvPr>
+            <p:cNvPr id="13" name="Circle: Hollow 12"/>
             <p:cNvSpPr/>
             <p:nvPr userDrawn="1"/>
           </p:nvSpPr>
@@ -8897,13 +8215,7 @@
         </p:sp>
         <p:sp>
           <p:nvSpPr>
-            <p:cNvPr id="14" name="Circle: Hollow 13">
-              <a:extLst>
-                <a:ext uri="{FF2B5EF4-FFF2-40B4-BE49-F238E27FC236}">
-                  <a16:creationId xmlns:a16="http://schemas.microsoft.com/office/drawing/2014/main" id="{9258023F-0C38-4A31-9B2A-AA99C3C745C6}"/>
-                </a:ext>
-              </a:extLst>
-            </p:cNvPr>
+            <p:cNvPr id="14" name="Circle: Hollow 13"/>
             <p:cNvSpPr/>
             <p:nvPr userDrawn="1"/>
           </p:nvSpPr>
@@ -8965,13 +8277,7 @@
         </p:sp>
         <p:sp>
           <p:nvSpPr>
-            <p:cNvPr id="15" name="Freeform: Shape 14">
-              <a:extLst>
-                <a:ext uri="{FF2B5EF4-FFF2-40B4-BE49-F238E27FC236}">
-                  <a16:creationId xmlns:a16="http://schemas.microsoft.com/office/drawing/2014/main" id="{A0B53E0F-0B02-4B74-91E7-2B670261B8F7}"/>
-                </a:ext>
-              </a:extLst>
-            </p:cNvPr>
+            <p:cNvPr id="15" name="Freeform: Shape 14"/>
             <p:cNvSpPr/>
             <p:nvPr userDrawn="1"/>
           </p:nvSpPr>
@@ -9114,11 +8420,6 @@
         </p:sp>
       </p:grpSp>
     </p:spTree>
-    <p:extLst>
-      <p:ext uri="{BB962C8B-B14F-4D97-AF65-F5344CB8AC3E}">
-        <p14:creationId xmlns:p14="http://schemas.microsoft.com/office/powerpoint/2010/main" val="3782320069"/>
-      </p:ext>
-    </p:extLst>
   </p:cSld>
   <p:clrMapOvr>
     <a:masterClrMapping/>
@@ -9161,13 +8462,7 @@
       </p:grpSpPr>
       <p:sp>
         <p:nvSpPr>
-          <p:cNvPr id="4" name="Rectangle 3">
-            <a:extLst>
-              <a:ext uri="{FF2B5EF4-FFF2-40B4-BE49-F238E27FC236}">
-                <a16:creationId xmlns:a16="http://schemas.microsoft.com/office/drawing/2014/main" id="{9699F735-1BC8-4020-A49A-4C037861EEE1}"/>
-              </a:ext>
-            </a:extLst>
-          </p:cNvPr>
+          <p:cNvPr id="4" name="Rectangle 3"/>
           <p:cNvSpPr/>
           <p:nvPr userDrawn="1"/>
         </p:nvSpPr>
@@ -9213,13 +8508,7 @@
       </p:sp>
       <p:sp>
         <p:nvSpPr>
-          <p:cNvPr id="3" name="Text Placeholder 9">
-            <a:extLst>
-              <a:ext uri="{FF2B5EF4-FFF2-40B4-BE49-F238E27FC236}">
-                <a16:creationId xmlns:a16="http://schemas.microsoft.com/office/drawing/2014/main" id="{EF70765A-4598-4D75-8EBE-B820808F6559}"/>
-              </a:ext>
-            </a:extLst>
-          </p:cNvPr>
+          <p:cNvPr id="3" name="Text Placeholder 9"/>
           <p:cNvSpPr>
             <a:spLocks noGrp="1"/>
           </p:cNvSpPr>
@@ -9249,7 +8538,7 @@
                   </a:schemeClr>
                 </a:solidFill>
                 <a:latin typeface="+mj-lt"/>
-                <a:cs typeface="Arial" pitchFamily="34" charset="0"/>
+                <a:cs typeface="Arial" panose="020B0604020202020204" pitchFamily="34" charset="0"/>
               </a:defRPr>
             </a:lvl1pPr>
           </a:lstStyle>
@@ -9259,18 +8548,13 @@
               <a:rPr lang="en-US" altLang="ko-KR" dirty="0"/>
               <a:t>Our Team LAYOUT</a:t>
             </a:r>
+            <a:endParaRPr lang="en-US" altLang="ko-KR" dirty="0"/>
           </a:p>
         </p:txBody>
       </p:sp>
       <p:sp>
         <p:nvSpPr>
-          <p:cNvPr id="5" name="Block Arc 1">
-            <a:extLst>
-              <a:ext uri="{FF2B5EF4-FFF2-40B4-BE49-F238E27FC236}">
-                <a16:creationId xmlns:a16="http://schemas.microsoft.com/office/drawing/2014/main" id="{404008F3-9393-43B1-9EF6-BB73F9083120}"/>
-              </a:ext>
-            </a:extLst>
-          </p:cNvPr>
+          <p:cNvPr id="5" name="Block Arc 1"/>
           <p:cNvSpPr/>
           <p:nvPr userDrawn="1"/>
         </p:nvSpPr>
@@ -9326,13 +8610,7 @@
       </p:sp>
       <p:sp>
         <p:nvSpPr>
-          <p:cNvPr id="6" name="Block Arc 12">
-            <a:extLst>
-              <a:ext uri="{FF2B5EF4-FFF2-40B4-BE49-F238E27FC236}">
-                <a16:creationId xmlns:a16="http://schemas.microsoft.com/office/drawing/2014/main" id="{B94FB787-662A-4C42-A82E-3D2990125567}"/>
-              </a:ext>
-            </a:extLst>
-          </p:cNvPr>
+          <p:cNvPr id="6" name="Block Arc 12"/>
           <p:cNvSpPr/>
           <p:nvPr userDrawn="1"/>
         </p:nvSpPr>
@@ -9388,13 +8666,7 @@
       </p:sp>
       <p:sp>
         <p:nvSpPr>
-          <p:cNvPr id="7" name="Block Arc 13">
-            <a:extLst>
-              <a:ext uri="{FF2B5EF4-FFF2-40B4-BE49-F238E27FC236}">
-                <a16:creationId xmlns:a16="http://schemas.microsoft.com/office/drawing/2014/main" id="{B3104187-2B64-4114-9216-8B72399C3FFB}"/>
-              </a:ext>
-            </a:extLst>
-          </p:cNvPr>
+          <p:cNvPr id="7" name="Block Arc 13"/>
           <p:cNvSpPr/>
           <p:nvPr userDrawn="1"/>
         </p:nvSpPr>
@@ -9450,13 +8722,7 @@
       </p:sp>
       <p:sp>
         <p:nvSpPr>
-          <p:cNvPr id="8" name="Block Arc 15">
-            <a:extLst>
-              <a:ext uri="{FF2B5EF4-FFF2-40B4-BE49-F238E27FC236}">
-                <a16:creationId xmlns:a16="http://schemas.microsoft.com/office/drawing/2014/main" id="{5C6BA25A-D059-41A1-9E12-7E54661C901A}"/>
-              </a:ext>
-            </a:extLst>
-          </p:cNvPr>
+          <p:cNvPr id="8" name="Block Arc 15"/>
           <p:cNvSpPr/>
           <p:nvPr userDrawn="1"/>
         </p:nvSpPr>
@@ -9512,13 +8778,7 @@
       </p:sp>
       <p:sp>
         <p:nvSpPr>
-          <p:cNvPr id="9" name="Picture Placeholder 2">
-            <a:extLst>
-              <a:ext uri="{FF2B5EF4-FFF2-40B4-BE49-F238E27FC236}">
-                <a16:creationId xmlns:a16="http://schemas.microsoft.com/office/drawing/2014/main" id="{F41AE61D-2711-4D27-9E84-9455C81DF8EA}"/>
-              </a:ext>
-            </a:extLst>
-          </p:cNvPr>
+          <p:cNvPr id="9" name="Picture Placeholder 2"/>
           <p:cNvSpPr>
             <a:spLocks noGrp="1"/>
           </p:cNvSpPr>
@@ -9558,38 +8818,38 @@
                   </a:schemeClr>
                 </a:solidFill>
                 <a:latin typeface="+mn-lt"/>
-                <a:cs typeface="Arial" pitchFamily="34" charset="0"/>
+                <a:cs typeface="Arial" panose="020B0604020202020204" pitchFamily="34" charset="0"/>
               </a:defRPr>
             </a:lvl1pPr>
-            <a:lvl2pPr marL="457223" indent="0">
+            <a:lvl2pPr marL="457200" indent="0">
               <a:buNone/>
               <a:defRPr sz="2800"/>
             </a:lvl2pPr>
-            <a:lvl3pPr marL="914446" indent="0">
+            <a:lvl3pPr marL="914400" indent="0">
               <a:buNone/>
               <a:defRPr sz="2400"/>
             </a:lvl3pPr>
-            <a:lvl4pPr marL="1371669" indent="0">
+            <a:lvl4pPr marL="1371600" indent="0">
               <a:buNone/>
               <a:defRPr sz="2000"/>
             </a:lvl4pPr>
-            <a:lvl5pPr marL="1828891" indent="0">
+            <a:lvl5pPr marL="1828800" indent="0">
               <a:buNone/>
               <a:defRPr sz="2000"/>
             </a:lvl5pPr>
-            <a:lvl6pPr marL="2286114" indent="0">
+            <a:lvl6pPr marL="2286000" indent="0">
               <a:buNone/>
               <a:defRPr sz="2000"/>
             </a:lvl6pPr>
-            <a:lvl7pPr marL="2743337" indent="0">
+            <a:lvl7pPr marL="2743200" indent="0">
               <a:buNone/>
               <a:defRPr sz="2000"/>
             </a:lvl7pPr>
-            <a:lvl8pPr marL="3200560" indent="0">
+            <a:lvl8pPr marL="3200400" indent="0">
               <a:buNone/>
               <a:defRPr sz="2000"/>
             </a:lvl8pPr>
-            <a:lvl9pPr marL="3657783" indent="0">
+            <a:lvl9pPr marL="3657600" indent="0">
               <a:buNone/>
               <a:defRPr sz="2000"/>
             </a:lvl9pPr>
@@ -9605,13 +8865,7 @@
       </p:sp>
       <p:sp>
         <p:nvSpPr>
-          <p:cNvPr id="10" name="Picture Placeholder 2">
-            <a:extLst>
-              <a:ext uri="{FF2B5EF4-FFF2-40B4-BE49-F238E27FC236}">
-                <a16:creationId xmlns:a16="http://schemas.microsoft.com/office/drawing/2014/main" id="{FEB96CED-3A89-4E72-AD40-98DAA7DB1E8E}"/>
-              </a:ext>
-            </a:extLst>
-          </p:cNvPr>
+          <p:cNvPr id="10" name="Picture Placeholder 2"/>
           <p:cNvSpPr>
             <a:spLocks noGrp="1"/>
           </p:cNvSpPr>
@@ -9651,38 +8905,38 @@
                   </a:schemeClr>
                 </a:solidFill>
                 <a:latin typeface="+mn-lt"/>
-                <a:cs typeface="Arial" pitchFamily="34" charset="0"/>
+                <a:cs typeface="Arial" panose="020B0604020202020204" pitchFamily="34" charset="0"/>
               </a:defRPr>
             </a:lvl1pPr>
-            <a:lvl2pPr marL="457223" indent="0">
+            <a:lvl2pPr marL="457200" indent="0">
               <a:buNone/>
               <a:defRPr sz="2800"/>
             </a:lvl2pPr>
-            <a:lvl3pPr marL="914446" indent="0">
+            <a:lvl3pPr marL="914400" indent="0">
               <a:buNone/>
               <a:defRPr sz="2400"/>
             </a:lvl3pPr>
-            <a:lvl4pPr marL="1371669" indent="0">
+            <a:lvl4pPr marL="1371600" indent="0">
               <a:buNone/>
               <a:defRPr sz="2000"/>
             </a:lvl4pPr>
-            <a:lvl5pPr marL="1828891" indent="0">
+            <a:lvl5pPr marL="1828800" indent="0">
               <a:buNone/>
               <a:defRPr sz="2000"/>
             </a:lvl5pPr>
-            <a:lvl6pPr marL="2286114" indent="0">
+            <a:lvl6pPr marL="2286000" indent="0">
               <a:buNone/>
               <a:defRPr sz="2000"/>
             </a:lvl6pPr>
-            <a:lvl7pPr marL="2743337" indent="0">
+            <a:lvl7pPr marL="2743200" indent="0">
               <a:buNone/>
               <a:defRPr sz="2000"/>
             </a:lvl7pPr>
-            <a:lvl8pPr marL="3200560" indent="0">
+            <a:lvl8pPr marL="3200400" indent="0">
               <a:buNone/>
               <a:defRPr sz="2000"/>
             </a:lvl8pPr>
-            <a:lvl9pPr marL="3657783" indent="0">
+            <a:lvl9pPr marL="3657600" indent="0">
               <a:buNone/>
               <a:defRPr sz="2000"/>
             </a:lvl9pPr>
@@ -9698,13 +8952,7 @@
       </p:sp>
       <p:sp>
         <p:nvSpPr>
-          <p:cNvPr id="11" name="Picture Placeholder 2">
-            <a:extLst>
-              <a:ext uri="{FF2B5EF4-FFF2-40B4-BE49-F238E27FC236}">
-                <a16:creationId xmlns:a16="http://schemas.microsoft.com/office/drawing/2014/main" id="{168305AF-08C9-4A39-80B8-FD3847826BFC}"/>
-              </a:ext>
-            </a:extLst>
-          </p:cNvPr>
+          <p:cNvPr id="11" name="Picture Placeholder 2"/>
           <p:cNvSpPr>
             <a:spLocks noGrp="1"/>
           </p:cNvSpPr>
@@ -9744,38 +8992,38 @@
                   </a:schemeClr>
                 </a:solidFill>
                 <a:latin typeface="+mn-lt"/>
-                <a:cs typeface="Arial" pitchFamily="34" charset="0"/>
+                <a:cs typeface="Arial" panose="020B0604020202020204" pitchFamily="34" charset="0"/>
               </a:defRPr>
             </a:lvl1pPr>
-            <a:lvl2pPr marL="457223" indent="0">
+            <a:lvl2pPr marL="457200" indent="0">
               <a:buNone/>
               <a:defRPr sz="2800"/>
             </a:lvl2pPr>
-            <a:lvl3pPr marL="914446" indent="0">
+            <a:lvl3pPr marL="914400" indent="0">
               <a:buNone/>
               <a:defRPr sz="2400"/>
             </a:lvl3pPr>
-            <a:lvl4pPr marL="1371669" indent="0">
+            <a:lvl4pPr marL="1371600" indent="0">
               <a:buNone/>
               <a:defRPr sz="2000"/>
             </a:lvl4pPr>
-            <a:lvl5pPr marL="1828891" indent="0">
+            <a:lvl5pPr marL="1828800" indent="0">
               <a:buNone/>
               <a:defRPr sz="2000"/>
             </a:lvl5pPr>
-            <a:lvl6pPr marL="2286114" indent="0">
+            <a:lvl6pPr marL="2286000" indent="0">
               <a:buNone/>
               <a:defRPr sz="2000"/>
             </a:lvl6pPr>
-            <a:lvl7pPr marL="2743337" indent="0">
+            <a:lvl7pPr marL="2743200" indent="0">
               <a:buNone/>
               <a:defRPr sz="2000"/>
             </a:lvl7pPr>
-            <a:lvl8pPr marL="3200560" indent="0">
+            <a:lvl8pPr marL="3200400" indent="0">
               <a:buNone/>
               <a:defRPr sz="2000"/>
             </a:lvl8pPr>
-            <a:lvl9pPr marL="3657783" indent="0">
+            <a:lvl9pPr marL="3657600" indent="0">
               <a:buNone/>
               <a:defRPr sz="2000"/>
             </a:lvl9pPr>
@@ -9791,13 +9039,7 @@
       </p:sp>
       <p:sp>
         <p:nvSpPr>
-          <p:cNvPr id="12" name="Picture Placeholder 2">
-            <a:extLst>
-              <a:ext uri="{FF2B5EF4-FFF2-40B4-BE49-F238E27FC236}">
-                <a16:creationId xmlns:a16="http://schemas.microsoft.com/office/drawing/2014/main" id="{23326DD4-C5BB-4602-9562-F2390EC71C3D}"/>
-              </a:ext>
-            </a:extLst>
-          </p:cNvPr>
+          <p:cNvPr id="12" name="Picture Placeholder 2"/>
           <p:cNvSpPr>
             <a:spLocks noGrp="1"/>
           </p:cNvSpPr>
@@ -9837,38 +9079,38 @@
                   </a:schemeClr>
                 </a:solidFill>
                 <a:latin typeface="+mn-lt"/>
-                <a:cs typeface="Arial" pitchFamily="34" charset="0"/>
+                <a:cs typeface="Arial" panose="020B0604020202020204" pitchFamily="34" charset="0"/>
               </a:defRPr>
             </a:lvl1pPr>
-            <a:lvl2pPr marL="457223" indent="0">
+            <a:lvl2pPr marL="457200" indent="0">
               <a:buNone/>
               <a:defRPr sz="2800"/>
             </a:lvl2pPr>
-            <a:lvl3pPr marL="914446" indent="0">
+            <a:lvl3pPr marL="914400" indent="0">
               <a:buNone/>
               <a:defRPr sz="2400"/>
             </a:lvl3pPr>
-            <a:lvl4pPr marL="1371669" indent="0">
+            <a:lvl4pPr marL="1371600" indent="0">
               <a:buNone/>
               <a:defRPr sz="2000"/>
             </a:lvl4pPr>
-            <a:lvl5pPr marL="1828891" indent="0">
+            <a:lvl5pPr marL="1828800" indent="0">
               <a:buNone/>
               <a:defRPr sz="2000"/>
             </a:lvl5pPr>
-            <a:lvl6pPr marL="2286114" indent="0">
+            <a:lvl6pPr marL="2286000" indent="0">
               <a:buNone/>
               <a:defRPr sz="2000"/>
             </a:lvl6pPr>
-            <a:lvl7pPr marL="2743337" indent="0">
+            <a:lvl7pPr marL="2743200" indent="0">
               <a:buNone/>
               <a:defRPr sz="2000"/>
             </a:lvl7pPr>
-            <a:lvl8pPr marL="3200560" indent="0">
+            <a:lvl8pPr marL="3200400" indent="0">
               <a:buNone/>
               <a:defRPr sz="2000"/>
             </a:lvl8pPr>
-            <a:lvl9pPr marL="3657783" indent="0">
+            <a:lvl9pPr marL="3657600" indent="0">
               <a:buNone/>
               <a:defRPr sz="2000"/>
             </a:lvl9pPr>
@@ -9883,11 +9125,6 @@
         </p:txBody>
       </p:sp>
     </p:spTree>
-    <p:extLst>
-      <p:ext uri="{BB962C8B-B14F-4D97-AF65-F5344CB8AC3E}">
-        <p14:creationId xmlns:p14="http://schemas.microsoft.com/office/powerpoint/2010/main" val="768664198"/>
-      </p:ext>
-    </p:extLst>
   </p:cSld>
   <p:clrMapOvr>
     <a:masterClrMapping/>
@@ -9914,13 +9151,7 @@
       </p:grpSpPr>
       <p:sp>
         <p:nvSpPr>
-          <p:cNvPr id="2" name="Picture Placeholder 2">
-            <a:extLst>
-              <a:ext uri="{FF2B5EF4-FFF2-40B4-BE49-F238E27FC236}">
-                <a16:creationId xmlns:a16="http://schemas.microsoft.com/office/drawing/2014/main" id="{4DB5A378-F106-4996-9559-AD651050100B}"/>
-              </a:ext>
-            </a:extLst>
-          </p:cNvPr>
+          <p:cNvPr id="2" name="Picture Placeholder 2"/>
           <p:cNvSpPr>
             <a:spLocks noGrp="1"/>
           </p:cNvSpPr>
@@ -9955,7 +9186,7 @@
                   </a:schemeClr>
                 </a:solidFill>
                 <a:latin typeface="+mn-lt"/>
-                <a:cs typeface="Arial" pitchFamily="34" charset="0"/>
+                <a:cs typeface="Arial" panose="020B0604020202020204" pitchFamily="34" charset="0"/>
               </a:defRPr>
             </a:lvl1pPr>
             <a:lvl2pPr marL="457200" indent="0">
@@ -10001,11 +9232,6 @@
         </p:txBody>
       </p:sp>
     </p:spTree>
-    <p:extLst>
-      <p:ext uri="{BB962C8B-B14F-4D97-AF65-F5344CB8AC3E}">
-        <p14:creationId xmlns:p14="http://schemas.microsoft.com/office/powerpoint/2010/main" val="3833295095"/>
-      </p:ext>
-    </p:extLst>
   </p:cSld>
   <p:clrMapOvr>
     <a:masterClrMapping/>
@@ -10045,11 +9271,6 @@
         </a:xfrm>
       </p:grpSpPr>
     </p:spTree>
-    <p:extLst>
-      <p:ext uri="{BB962C8B-B14F-4D97-AF65-F5344CB8AC3E}">
-        <p14:creationId xmlns:p14="http://schemas.microsoft.com/office/powerpoint/2010/main" val="3220445115"/>
-      </p:ext>
-    </p:extLst>
   </p:cSld>
   <p:clrMapOvr>
     <a:masterClrMapping/>
@@ -10076,13 +9297,7 @@
       </p:grpSpPr>
       <p:grpSp>
         <p:nvGrpSpPr>
-          <p:cNvPr id="2" name="Group 4">
-            <a:extLst>
-              <a:ext uri="{FF2B5EF4-FFF2-40B4-BE49-F238E27FC236}">
-                <a16:creationId xmlns:a16="http://schemas.microsoft.com/office/drawing/2014/main" id="{065FF430-A86A-408D-B4CD-0BDB219BC8FC}"/>
-              </a:ext>
-            </a:extLst>
-          </p:cNvPr>
+          <p:cNvPr id="2" name="Group 4"/>
           <p:cNvGrpSpPr/>
           <p:nvPr userDrawn="1"/>
         </p:nvGrpSpPr>
@@ -10096,13 +9311,7 @@
         </p:grpSpPr>
         <p:sp>
           <p:nvSpPr>
-            <p:cNvPr id="3" name="Rounded Rectangle 5">
-              <a:extLst>
-                <a:ext uri="{FF2B5EF4-FFF2-40B4-BE49-F238E27FC236}">
-                  <a16:creationId xmlns:a16="http://schemas.microsoft.com/office/drawing/2014/main" id="{0CA6DF50-6795-474E-9081-6511A6DF797F}"/>
-                </a:ext>
-              </a:extLst>
-            </p:cNvPr>
+            <p:cNvPr id="3" name="Rounded Rectangle 5"/>
             <p:cNvSpPr/>
             <p:nvPr userDrawn="1"/>
           </p:nvSpPr>
@@ -10159,13 +9368,7 @@
         </p:sp>
         <p:sp>
           <p:nvSpPr>
-            <p:cNvPr id="4" name="Rectangle 6">
-              <a:extLst>
-                <a:ext uri="{FF2B5EF4-FFF2-40B4-BE49-F238E27FC236}">
-                  <a16:creationId xmlns:a16="http://schemas.microsoft.com/office/drawing/2014/main" id="{E35AE172-B3BB-4E24-B958-0CB99851C0B0}"/>
-                </a:ext>
-              </a:extLst>
-            </p:cNvPr>
+            <p:cNvPr id="4" name="Rectangle 6"/>
             <p:cNvSpPr/>
             <p:nvPr userDrawn="1"/>
           </p:nvSpPr>
@@ -10211,13 +9414,7 @@
         </p:sp>
         <p:grpSp>
           <p:nvGrpSpPr>
-            <p:cNvPr id="5" name="Group 7">
-              <a:extLst>
-                <a:ext uri="{FF2B5EF4-FFF2-40B4-BE49-F238E27FC236}">
-                  <a16:creationId xmlns:a16="http://schemas.microsoft.com/office/drawing/2014/main" id="{3492788A-995F-478E-A5F5-E0A3675E5DFD}"/>
-                </a:ext>
-              </a:extLst>
-            </p:cNvPr>
+            <p:cNvPr id="5" name="Group 7"/>
             <p:cNvGrpSpPr/>
             <p:nvPr userDrawn="1"/>
           </p:nvGrpSpPr>
@@ -10231,13 +9428,7 @@
           </p:grpSpPr>
           <p:sp>
             <p:nvSpPr>
-              <p:cNvPr id="6" name="Oval 8">
-                <a:extLst>
-                  <a:ext uri="{FF2B5EF4-FFF2-40B4-BE49-F238E27FC236}">
-                    <a16:creationId xmlns:a16="http://schemas.microsoft.com/office/drawing/2014/main" id="{9A4EEAB5-7A36-43A2-9FDD-A2137FD0C0D2}"/>
-                  </a:ext>
-                </a:extLst>
-              </p:cNvPr>
+              <p:cNvPr id="6" name="Oval 8"/>
               <p:cNvSpPr/>
               <p:nvPr userDrawn="1"/>
             </p:nvSpPr>
@@ -10318,13 +9509,7 @@
           </p:sp>
           <p:sp>
             <p:nvSpPr>
-              <p:cNvPr id="7" name="Rounded Rectangle 10">
-                <a:extLst>
-                  <a:ext uri="{FF2B5EF4-FFF2-40B4-BE49-F238E27FC236}">
-                    <a16:creationId xmlns:a16="http://schemas.microsoft.com/office/drawing/2014/main" id="{983787F9-8E6F-4588-9DA5-35FC31554940}"/>
-                  </a:ext>
-                </a:extLst>
-              </p:cNvPr>
+              <p:cNvPr id="7" name="Rounded Rectangle 10"/>
               <p:cNvSpPr/>
               <p:nvPr userDrawn="1"/>
             </p:nvSpPr>
@@ -10374,13 +9559,7 @@
       </p:grpSp>
       <p:sp>
         <p:nvSpPr>
-          <p:cNvPr id="8" name="Picture Placeholder 2">
-            <a:extLst>
-              <a:ext uri="{FF2B5EF4-FFF2-40B4-BE49-F238E27FC236}">
-                <a16:creationId xmlns:a16="http://schemas.microsoft.com/office/drawing/2014/main" id="{3E2B1047-A353-4F69-8E34-66CE0EF65D91}"/>
-              </a:ext>
-            </a:extLst>
-          </p:cNvPr>
+          <p:cNvPr id="8" name="Picture Placeholder 2"/>
           <p:cNvSpPr>
             <a:spLocks noGrp="1"/>
           </p:cNvSpPr>
@@ -10411,39 +9590,39 @@
             <a:lvl1pPr marL="0" indent="0" algn="ctr">
               <a:buNone/>
               <a:defRPr sz="1600">
-                <a:latin typeface="Arial" pitchFamily="34" charset="0"/>
-                <a:cs typeface="Arial" pitchFamily="34" charset="0"/>
+                <a:latin typeface="Arial" panose="020B0604020202020204" pitchFamily="34" charset="0"/>
+                <a:cs typeface="Arial" panose="020B0604020202020204" pitchFamily="34" charset="0"/>
               </a:defRPr>
             </a:lvl1pPr>
-            <a:lvl2pPr marL="457223" indent="0">
+            <a:lvl2pPr marL="457200" indent="0">
               <a:buNone/>
               <a:defRPr sz="2800"/>
             </a:lvl2pPr>
-            <a:lvl3pPr marL="914446" indent="0">
+            <a:lvl3pPr marL="914400" indent="0">
               <a:buNone/>
               <a:defRPr sz="2400"/>
             </a:lvl3pPr>
-            <a:lvl4pPr marL="1371669" indent="0">
+            <a:lvl4pPr marL="1371600" indent="0">
               <a:buNone/>
               <a:defRPr sz="2000"/>
             </a:lvl4pPr>
-            <a:lvl5pPr marL="1828891" indent="0">
+            <a:lvl5pPr marL="1828800" indent="0">
               <a:buNone/>
               <a:defRPr sz="2000"/>
             </a:lvl5pPr>
-            <a:lvl6pPr marL="2286114" indent="0">
+            <a:lvl6pPr marL="2286000" indent="0">
               <a:buNone/>
               <a:defRPr sz="2000"/>
             </a:lvl6pPr>
-            <a:lvl7pPr marL="2743337" indent="0">
+            <a:lvl7pPr marL="2743200" indent="0">
               <a:buNone/>
               <a:defRPr sz="2000"/>
             </a:lvl7pPr>
-            <a:lvl8pPr marL="3200560" indent="0">
+            <a:lvl8pPr marL="3200400" indent="0">
               <a:buNone/>
               <a:defRPr sz="2000"/>
             </a:lvl8pPr>
-            <a:lvl9pPr marL="3657783" indent="0">
+            <a:lvl9pPr marL="3657600" indent="0">
               <a:buNone/>
               <a:defRPr sz="2000"/>
             </a:lvl9pPr>
@@ -10459,13 +9638,7 @@
       </p:sp>
       <p:sp>
         <p:nvSpPr>
-          <p:cNvPr id="9" name="Text Placeholder 9">
-            <a:extLst>
-              <a:ext uri="{FF2B5EF4-FFF2-40B4-BE49-F238E27FC236}">
-                <a16:creationId xmlns:a16="http://schemas.microsoft.com/office/drawing/2014/main" id="{F072E626-24D1-4140-9541-74DA99F2F339}"/>
-              </a:ext>
-            </a:extLst>
-          </p:cNvPr>
+          <p:cNvPr id="9" name="Text Placeholder 9"/>
           <p:cNvSpPr>
             <a:spLocks noGrp="1"/>
           </p:cNvSpPr>
@@ -10495,7 +9668,7 @@
                   </a:schemeClr>
                 </a:solidFill>
                 <a:latin typeface="+mj-lt"/>
-                <a:cs typeface="Arial" pitchFamily="34" charset="0"/>
+                <a:cs typeface="Arial" panose="020B0604020202020204" pitchFamily="34" charset="0"/>
               </a:defRPr>
             </a:lvl1pPr>
           </a:lstStyle>
@@ -10505,15 +9678,11 @@
               <a:rPr lang="en-US" altLang="ko-KR" dirty="0"/>
               <a:t>BASIC LAYOUT</a:t>
             </a:r>
+            <a:endParaRPr lang="en-US" altLang="ko-KR" dirty="0"/>
           </a:p>
         </p:txBody>
       </p:sp>
     </p:spTree>
-    <p:extLst>
-      <p:ext uri="{BB962C8B-B14F-4D97-AF65-F5344CB8AC3E}">
-        <p14:creationId xmlns:p14="http://schemas.microsoft.com/office/powerpoint/2010/main" val="1199585678"/>
-      </p:ext>
-    </p:extLst>
   </p:cSld>
   <p:clrMapOvr>
     <a:masterClrMapping/>
@@ -10553,11 +9722,6 @@
         </a:xfrm>
       </p:grpSpPr>
     </p:spTree>
-    <p:extLst>
-      <p:ext uri="{BB962C8B-B14F-4D97-AF65-F5344CB8AC3E}">
-        <p14:creationId xmlns:p14="http://schemas.microsoft.com/office/powerpoint/2010/main" val="4292667485"/>
-      </p:ext>
-    </p:extLst>
   </p:cSld>
   <p:clrMapOvr>
     <a:masterClrMapping/>
@@ -10584,13 +9748,7 @@
       </p:grpSpPr>
       <p:sp>
         <p:nvSpPr>
-          <p:cNvPr id="2" name="Picture Placeholder 3">
-            <a:extLst>
-              <a:ext uri="{FF2B5EF4-FFF2-40B4-BE49-F238E27FC236}">
-                <a16:creationId xmlns:a16="http://schemas.microsoft.com/office/drawing/2014/main" id="{B854BEA9-E6ED-4706-9550-8EE96CA06937}"/>
-              </a:ext>
-            </a:extLst>
-          </p:cNvPr>
+          <p:cNvPr id="2" name="Picture Placeholder 3"/>
           <p:cNvSpPr>
             <a:spLocks noGrp="1"/>
           </p:cNvSpPr>
@@ -10707,11 +9865,6 @@
         </p:txBody>
       </p:sp>
     </p:spTree>
-    <p:extLst>
-      <p:ext uri="{BB962C8B-B14F-4D97-AF65-F5344CB8AC3E}">
-        <p14:creationId xmlns:p14="http://schemas.microsoft.com/office/powerpoint/2010/main" val="2445283475"/>
-      </p:ext>
-    </p:extLst>
   </p:cSld>
   <p:clrMapOvr>
     <a:masterClrMapping/>
@@ -10742,33 +9895,28 @@
         </a:xfrm>
       </p:grpSpPr>
     </p:spTree>
-    <p:extLst>
-      <p:ext uri="{BB962C8B-B14F-4D97-AF65-F5344CB8AC3E}">
-        <p14:creationId xmlns:p14="http://schemas.microsoft.com/office/powerpoint/2010/main" val="1615311501"/>
-      </p:ext>
-    </p:extLst>
   </p:cSld>
   <p:clrMap bg1="lt1" tx1="dk1" bg2="lt2" tx2="dk2" accent1="accent1" accent2="accent2" accent3="accent3" accent4="accent4" accent5="accent5" accent6="accent6" hlink="hlink" folHlink="folHlink"/>
   <p:sldLayoutIdLst>
-    <p:sldLayoutId id="2147483652" r:id="rId1"/>
-    <p:sldLayoutId id="2147483654" r:id="rId2"/>
-    <p:sldLayoutId id="2147483675" r:id="rId3"/>
-    <p:sldLayoutId id="2147483676" r:id="rId4"/>
-    <p:sldLayoutId id="2147483677" r:id="rId5"/>
-    <p:sldLayoutId id="2147483678" r:id="rId6"/>
-    <p:sldLayoutId id="2147483679" r:id="rId7"/>
-    <p:sldLayoutId id="2147483680" r:id="rId8"/>
-    <p:sldLayoutId id="2147483681" r:id="rId9"/>
-    <p:sldLayoutId id="2147483682" r:id="rId10"/>
-    <p:sldLayoutId id="2147483683" r:id="rId11"/>
-    <p:sldLayoutId id="2147483684" r:id="rId12"/>
-    <p:sldLayoutId id="2147483685" r:id="rId13"/>
-    <p:sldLayoutId id="2147483686" r:id="rId14"/>
-    <p:sldLayoutId id="2147483689" r:id="rId15"/>
-    <p:sldLayoutId id="2147483688" r:id="rId16"/>
-    <p:sldLayoutId id="2147483687" r:id="rId17"/>
-    <p:sldLayoutId id="2147483671" r:id="rId18"/>
-    <p:sldLayoutId id="2147483672" r:id="rId19"/>
+    <p:sldLayoutId id="2147483649" r:id="rId1"/>
+    <p:sldLayoutId id="2147483650" r:id="rId2"/>
+    <p:sldLayoutId id="2147483651" r:id="rId3"/>
+    <p:sldLayoutId id="2147483652" r:id="rId4"/>
+    <p:sldLayoutId id="2147483653" r:id="rId5"/>
+    <p:sldLayoutId id="2147483654" r:id="rId6"/>
+    <p:sldLayoutId id="2147483655" r:id="rId7"/>
+    <p:sldLayoutId id="2147483656" r:id="rId8"/>
+    <p:sldLayoutId id="2147483657" r:id="rId9"/>
+    <p:sldLayoutId id="2147483658" r:id="rId10"/>
+    <p:sldLayoutId id="2147483659" r:id="rId11"/>
+    <p:sldLayoutId id="2147483660" r:id="rId12"/>
+    <p:sldLayoutId id="2147483661" r:id="rId13"/>
+    <p:sldLayoutId id="2147483662" r:id="rId14"/>
+    <p:sldLayoutId id="2147483663" r:id="rId15"/>
+    <p:sldLayoutId id="2147483664" r:id="rId16"/>
+    <p:sldLayoutId id="2147483665" r:id="rId17"/>
+    <p:sldLayoutId id="2147483666" r:id="rId18"/>
+    <p:sldLayoutId id="2147483667" r:id="rId19"/>
   </p:sldLayoutIdLst>
   <p:hf hdr="0" ftr="0" dt="0"/>
   <p:txStyles>
@@ -11077,15 +10225,10 @@
         </a:xfrm>
       </p:grpSpPr>
     </p:spTree>
-    <p:extLst>
-      <p:ext uri="{BB962C8B-B14F-4D97-AF65-F5344CB8AC3E}">
-        <p14:creationId xmlns:p14="http://schemas.microsoft.com/office/powerpoint/2010/main" val="1198408049"/>
-      </p:ext>
-    </p:extLst>
   </p:cSld>
   <p:clrMap bg1="lt1" tx1="dk1" bg2="lt2" tx2="dk2" accent1="accent1" accent2="accent2" accent3="accent3" accent4="accent4" accent5="accent5" accent6="accent6" hlink="hlink" folHlink="folHlink"/>
   <p:sldLayoutIdLst>
-    <p:sldLayoutId id="2147483674" r:id="rId1"/>
+    <p:sldLayoutId id="2147483669" r:id="rId1"/>
   </p:sldLayoutIdLst>
   <p:hf hdr="0" ftr="0" dt="0"/>
   <p:txStyles>
@@ -11377,12 +10520,12 @@
     <p:bg>
       <p:bgPr>
         <a:blipFill dpi="0" rotWithShape="1">
-          <a:blip r:embed="rId3">
+          <a:blip r:embed="rId1">
             <a:lum/>
             <a:extLst>
               <a:ext uri="{BEBA8EAE-BF5A-486C-A8C5-ECC9F3942E4B}">
                 <a14:imgProps xmlns:a14="http://schemas.microsoft.com/office/drawing/2010/main">
-                  <a14:imgLayer r:embed="rId4">
+                  <a14:imgLayer r:embed="rId2">
                     <a14:imgEffect>
                       <a14:colorTemperature colorTemp="7360"/>
                     </a14:imgEffect>
@@ -11418,13 +10561,7 @@
       </p:grpSpPr>
       <p:sp>
         <p:nvSpPr>
-          <p:cNvPr id="240" name="TextBox 8">
-            <a:extLst>
-              <a:ext uri="{FF2B5EF4-FFF2-40B4-BE49-F238E27FC236}">
-                <a16:creationId xmlns:a16="http://schemas.microsoft.com/office/drawing/2014/main" id="{E8BEAB63-CC49-D273-3582-DDE485C69993}"/>
-              </a:ext>
-            </a:extLst>
-          </p:cNvPr>
+          <p:cNvPr id="240" name="TextBox 8"/>
           <p:cNvSpPr txBox="1"/>
           <p:nvPr/>
         </p:nvSpPr>
@@ -11452,7 +10589,7 @@
                 </a:solidFill>
                 <a:effectLst/>
                 <a:latin typeface="+mj-lt"/>
-                <a:ea typeface="Microsoft YaHei" panose="020B0503020204020204" pitchFamily="34" charset="-122"/>
+                <a:ea typeface="微软雅黑" panose="020B0503020204020204" pitchFamily="34" charset="-122"/>
               </a:rPr>
               <a:t>借助</a:t>
             </a:r>
@@ -11468,7 +10605,7 @@
                 <a:uLnTx/>
                 <a:uFillTx/>
                 <a:latin typeface="+mj-lt"/>
-                <a:ea typeface="Microsoft YaHei" panose="020B0503020204020204" pitchFamily="34" charset="-122"/>
+                <a:ea typeface="微软雅黑" panose="020B0503020204020204" pitchFamily="34" charset="-122"/>
               </a:rPr>
               <a:t>AI</a:t>
             </a:r>
@@ -11479,7 +10616,7 @@
                 </a:solidFill>
                 <a:effectLst/>
                 <a:latin typeface="+mj-lt"/>
-                <a:ea typeface="Microsoft YaHei" panose="020B0503020204020204" pitchFamily="34" charset="-122"/>
+                <a:ea typeface="微软雅黑" panose="020B0503020204020204" pitchFamily="34" charset="-122"/>
               </a:rPr>
               <a:t>技术，一键将</a:t>
             </a:r>
@@ -11490,10 +10627,18 @@
                 </a:solidFill>
                 <a:effectLst/>
                 <a:latin typeface="+mj-lt"/>
-                <a:ea typeface="Microsoft YaHei" panose="020B0503020204020204" pitchFamily="34" charset="-122"/>
+                <a:ea typeface="微软雅黑" panose="020B0503020204020204" pitchFamily="34" charset="-122"/>
               </a:rPr>
               <a:t>PPT</a:t>
             </a:r>
+            <a:endParaRPr lang="en-US" altLang="zh-CN" sz="4400" b="1" i="0" dirty="0">
+              <a:solidFill>
+                <a:srgbClr val="111827"/>
+              </a:solidFill>
+              <a:effectLst/>
+              <a:latin typeface="+mj-lt"/>
+              <a:ea typeface="微软雅黑" panose="020B0503020204020204" pitchFamily="34" charset="-122"/>
+            </a:endParaRPr>
           </a:p>
           <a:p>
             <a:pPr algn="l"/>
@@ -11504,22 +10649,24 @@
                 </a:solidFill>
                 <a:effectLst/>
                 <a:latin typeface="+mj-lt"/>
-                <a:ea typeface="Microsoft YaHei" panose="020B0503020204020204" pitchFamily="34" charset="-122"/>
+                <a:ea typeface="微软雅黑" panose="020B0503020204020204" pitchFamily="34" charset="-122"/>
               </a:rPr>
               <a:t>转换为精彩视频</a:t>
             </a:r>
+            <a:endParaRPr lang="zh-CN" altLang="en-US" sz="4400" b="1" i="0" dirty="0">
+              <a:solidFill>
+                <a:srgbClr val="111827"/>
+              </a:solidFill>
+              <a:effectLst/>
+              <a:latin typeface="+mj-lt"/>
+              <a:ea typeface="微软雅黑" panose="020B0503020204020204" pitchFamily="34" charset="-122"/>
+            </a:endParaRPr>
           </a:p>
         </p:txBody>
       </p:sp>
       <p:sp>
         <p:nvSpPr>
-          <p:cNvPr id="244" name="TextBox 9">
-            <a:extLst>
-              <a:ext uri="{FF2B5EF4-FFF2-40B4-BE49-F238E27FC236}">
-                <a16:creationId xmlns:a16="http://schemas.microsoft.com/office/drawing/2014/main" id="{618B4EF9-1116-E21C-8020-94B345C2BF3C}"/>
-              </a:ext>
-            </a:extLst>
-          </p:cNvPr>
+          <p:cNvPr id="244" name="TextBox 9"/>
           <p:cNvSpPr txBox="1"/>
           <p:nvPr/>
         </p:nvSpPr>
@@ -11553,7 +10700,6 @@
               <a:buSzTx/>
               <a:buFontTx/>
               <a:buNone/>
-              <a:tabLst/>
               <a:defRPr/>
             </a:pPr>
             <a:r>
@@ -11567,9 +10713,9 @@
                 <a:effectLst/>
                 <a:uLnTx/>
                 <a:uFillTx/>
-                <a:latin typeface="Microsoft YaHei" panose="020B0503020204020204" pitchFamily="34" charset="-122"/>
-                <a:ea typeface="Microsoft YaHei" panose="020B0503020204020204" pitchFamily="34" charset="-122"/>
-                <a:cs typeface="Arial" pitchFamily="34" charset="0"/>
+                <a:latin typeface="微软雅黑" panose="020B0503020204020204" pitchFamily="34" charset="-122"/>
+                <a:ea typeface="微软雅黑" panose="020B0503020204020204" pitchFamily="34" charset="-122"/>
+                <a:cs typeface="Arial" panose="020B0604020202020204" pitchFamily="34" charset="0"/>
               </a:rPr>
               <a:t>PPTFlow</a:t>
             </a:r>
@@ -11578,9 +10724,9 @@
                 <a:solidFill>
                   <a:schemeClr val="accent5"/>
                 </a:solidFill>
-                <a:latin typeface="Microsoft YaHei" panose="020B0503020204020204" pitchFamily="34" charset="-122"/>
-                <a:ea typeface="맑은 고딕"/>
-                <a:cs typeface="Arial" pitchFamily="34" charset="0"/>
+                <a:latin typeface="微软雅黑" panose="020B0503020204020204" pitchFamily="34" charset="-122"/>
+                <a:ea typeface="Malgun Gothic" panose="020B0503020000020004" charset="-127"/>
+                <a:cs typeface="Arial" panose="020B0604020202020204" pitchFamily="34" charset="0"/>
               </a:rPr>
               <a:t>介绍</a:t>
             </a:r>
@@ -11594,19 +10740,14 @@
               <a:effectLst/>
               <a:uLnTx/>
               <a:uFillTx/>
-              <a:latin typeface="Microsoft YaHei" panose="020B0503020204020204" pitchFamily="34" charset="-122"/>
-              <a:ea typeface="맑은 고딕"/>
-              <a:cs typeface="Arial" pitchFamily="34" charset="0"/>
+              <a:latin typeface="微软雅黑" panose="020B0503020204020204" pitchFamily="34" charset="-122"/>
+              <a:ea typeface="Malgun Gothic" panose="020B0503020000020004" charset="-127"/>
+              <a:cs typeface="Arial" panose="020B0604020202020204" pitchFamily="34" charset="0"/>
             </a:endParaRPr>
           </a:p>
         </p:txBody>
       </p:sp>
     </p:spTree>
-    <p:extLst>
-      <p:ext uri="{BB962C8B-B14F-4D97-AF65-F5344CB8AC3E}">
-        <p14:creationId xmlns:p14="http://schemas.microsoft.com/office/powerpoint/2010/main" val="1914637177"/>
-      </p:ext>
-    </p:extLst>
   </p:cSld>
   <p:clrMapOvr>
     <a:masterClrMapping/>
@@ -11633,13 +10774,7 @@
       </p:grpSpPr>
       <p:sp>
         <p:nvSpPr>
-          <p:cNvPr id="41" name="TextBox 40">
-            <a:extLst>
-              <a:ext uri="{FF2B5EF4-FFF2-40B4-BE49-F238E27FC236}">
-                <a16:creationId xmlns:a16="http://schemas.microsoft.com/office/drawing/2014/main" id="{2E7EEFCB-7825-4755-8430-1CB2D624A079}"/>
-              </a:ext>
-            </a:extLst>
-          </p:cNvPr>
+          <p:cNvPr id="41" name="TextBox 40"/>
           <p:cNvSpPr txBox="1"/>
           <p:nvPr/>
         </p:nvSpPr>
@@ -11661,8 +10796,8 @@
           <a:p>
             <a:r>
               <a:rPr lang="ko-KR" altLang="en-GB" sz="3200" b="1" dirty="0" err="1">
-                <a:latin typeface="Microsoft YaHei" panose="020B0503020204020204" pitchFamily="34" charset="-122"/>
-                <a:cs typeface="Arial" pitchFamily="34" charset="0"/>
+                <a:latin typeface="微软雅黑" panose="020B0503020204020204" pitchFamily="34" charset="-122"/>
+                <a:cs typeface="Arial" panose="020B0604020202020204" pitchFamily="34" charset="0"/>
               </a:rPr>
               <a:t>强大</a:t>
             </a:r>
@@ -11671,8 +10806,8 @@
                 <a:solidFill>
                   <a:schemeClr val="accent3"/>
                 </a:solidFill>
-                <a:latin typeface="Microsoft YaHei" panose="020B0503020204020204" pitchFamily="34" charset="-122"/>
-                <a:cs typeface="Arial" pitchFamily="34" charset="0"/>
+                <a:latin typeface="微软雅黑" panose="020B0503020204020204" pitchFamily="34" charset="-122"/>
+                <a:cs typeface="Arial" panose="020B0604020202020204" pitchFamily="34" charset="0"/>
               </a:rPr>
               <a:t>功能</a:t>
             </a:r>
@@ -11680,42 +10815,36 @@
               <a:solidFill>
                 <a:schemeClr val="accent3"/>
               </a:solidFill>
-              <a:latin typeface="Microsoft YaHei" panose="020B0503020204020204" pitchFamily="34" charset="-122"/>
-              <a:ea typeface="Microsoft YaHei" panose="020B0503020204020204" pitchFamily="34" charset="-122"/>
-              <a:cs typeface="Arial" pitchFamily="34" charset="0"/>
+              <a:latin typeface="微软雅黑" panose="020B0503020204020204" pitchFamily="34" charset="-122"/>
+              <a:ea typeface="微软雅黑" panose="020B0503020204020204" pitchFamily="34" charset="-122"/>
+              <a:cs typeface="Arial" panose="020B0604020202020204" pitchFamily="34" charset="0"/>
             </a:endParaRPr>
           </a:p>
           <a:p>
             <a:r>
               <a:rPr lang="ko-KR" altLang="en-GB" sz="3200" b="1" dirty="0" err="1">
-                <a:latin typeface="Microsoft YaHei" panose="020B0503020204020204" pitchFamily="34" charset="-122"/>
-                <a:cs typeface="Arial" pitchFamily="34" charset="0"/>
+                <a:latin typeface="微软雅黑" panose="020B0503020204020204" pitchFamily="34" charset="-122"/>
+                <a:cs typeface="Arial" panose="020B0604020202020204" pitchFamily="34" charset="0"/>
               </a:rPr>
               <a:t>轻松</a:t>
             </a:r>
             <a:r>
               <a:rPr lang="ko-KR" altLang="en-US" sz="3200" b="1" dirty="0" err="1">
-                <a:latin typeface="Microsoft YaHei" panose="020B0503020204020204" pitchFamily="34" charset="-122"/>
-                <a:cs typeface="Arial" pitchFamily="34" charset="0"/>
+                <a:latin typeface="微软雅黑" panose="020B0503020204020204" pitchFamily="34" charset="-122"/>
+                <a:cs typeface="Arial" panose="020B0604020202020204" pitchFamily="34" charset="0"/>
               </a:rPr>
               <a:t>转换</a:t>
             </a:r>
             <a:endParaRPr lang="ko-KR" altLang="en-US" sz="3200" b="1" dirty="0">
-              <a:latin typeface="Microsoft YaHei" panose="020B0503020204020204" pitchFamily="34" charset="-122"/>
-              <a:cs typeface="Arial" pitchFamily="34" charset="0"/>
+              <a:latin typeface="微软雅黑" panose="020B0503020204020204" pitchFamily="34" charset="-122"/>
+              <a:cs typeface="Arial" panose="020B0604020202020204" pitchFamily="34" charset="0"/>
             </a:endParaRPr>
           </a:p>
         </p:txBody>
       </p:sp>
       <p:sp>
         <p:nvSpPr>
-          <p:cNvPr id="131" name="Rounded Rectangle 28">
-            <a:extLst>
-              <a:ext uri="{FF2B5EF4-FFF2-40B4-BE49-F238E27FC236}">
-                <a16:creationId xmlns:a16="http://schemas.microsoft.com/office/drawing/2014/main" id="{77098365-47F0-D606-7023-9A86F7E55443}"/>
-              </a:ext>
-            </a:extLst>
-          </p:cNvPr>
+          <p:cNvPr id="131" name="Rounded Rectangle 28"/>
           <p:cNvSpPr/>
           <p:nvPr/>
         </p:nvSpPr>
@@ -11762,8 +10891,8 @@
                 <a:solidFill>
                   <a:schemeClr val="bg1"/>
                 </a:solidFill>
-                <a:latin typeface="Microsoft YaHei" panose="020B0503020204020204" pitchFamily="34" charset="-122"/>
-                <a:cs typeface="Arial" pitchFamily="34" charset="0"/>
+                <a:latin typeface="微软雅黑" panose="020B0503020204020204" pitchFamily="34" charset="-122"/>
+                <a:cs typeface="Arial" panose="020B0604020202020204" pitchFamily="34" charset="0"/>
               </a:rPr>
               <a:t>一键转换</a:t>
             </a:r>
@@ -11771,22 +10900,16 @@
               <a:solidFill>
                 <a:schemeClr val="bg1"/>
               </a:solidFill>
-              <a:latin typeface="Microsoft YaHei" panose="020B0503020204020204" pitchFamily="34" charset="-122"/>
-              <a:ea typeface="Microsoft YaHei" panose="020B0503020204020204" pitchFamily="34" charset="-122"/>
-              <a:cs typeface="Arial" pitchFamily="34" charset="0"/>
+              <a:latin typeface="微软雅黑" panose="020B0503020204020204" pitchFamily="34" charset="-122"/>
+              <a:ea typeface="微软雅黑" panose="020B0503020204020204" pitchFamily="34" charset="-122"/>
+              <a:cs typeface="Arial" panose="020B0604020202020204" pitchFamily="34" charset="0"/>
             </a:endParaRPr>
           </a:p>
         </p:txBody>
       </p:sp>
       <p:sp>
         <p:nvSpPr>
-          <p:cNvPr id="135" name="Rounded Rectangle 28">
-            <a:extLst>
-              <a:ext uri="{FF2B5EF4-FFF2-40B4-BE49-F238E27FC236}">
-                <a16:creationId xmlns:a16="http://schemas.microsoft.com/office/drawing/2014/main" id="{38FC0F99-8F7B-B6EB-51F3-A6CC07D53892}"/>
-              </a:ext>
-            </a:extLst>
-          </p:cNvPr>
+          <p:cNvPr id="135" name="Rounded Rectangle 28"/>
           <p:cNvSpPr/>
           <p:nvPr/>
         </p:nvSpPr>
@@ -11833,8 +10956,8 @@
                 <a:solidFill>
                   <a:schemeClr val="bg1"/>
                 </a:solidFill>
-                <a:latin typeface="Microsoft YaHei" panose="020B0503020204020204" pitchFamily="34" charset="-122"/>
-                <a:cs typeface="Arial" pitchFamily="34" charset="0"/>
+                <a:latin typeface="微软雅黑" panose="020B0503020204020204" pitchFamily="34" charset="-122"/>
+                <a:cs typeface="Arial" panose="020B0604020202020204" pitchFamily="34" charset="0"/>
               </a:rPr>
               <a:t>自然</a:t>
             </a:r>
@@ -11843,9 +10966,9 @@
                 <a:solidFill>
                   <a:schemeClr val="bg1"/>
                 </a:solidFill>
-                <a:latin typeface="Microsoft YaHei" panose="020B0503020204020204" pitchFamily="34" charset="-122"/>
-                <a:ea typeface="Microsoft YaHei" panose="020B0503020204020204" pitchFamily="34" charset="-122"/>
-                <a:cs typeface="Arial" pitchFamily="34" charset="0"/>
+                <a:latin typeface="微软雅黑" panose="020B0503020204020204" pitchFamily="34" charset="-122"/>
+                <a:ea typeface="微软雅黑" panose="020B0503020204020204" pitchFamily="34" charset="-122"/>
+                <a:cs typeface="Arial" panose="020B0604020202020204" pitchFamily="34" charset="0"/>
               </a:rPr>
               <a:t>AI</a:t>
             </a:r>
@@ -11854,8 +10977,8 @@
                 <a:solidFill>
                   <a:schemeClr val="bg1"/>
                 </a:solidFill>
-                <a:latin typeface="Microsoft YaHei" panose="020B0503020204020204" pitchFamily="34" charset="-122"/>
-                <a:cs typeface="Arial" pitchFamily="34" charset="0"/>
+                <a:latin typeface="微软雅黑" panose="020B0503020204020204" pitchFamily="34" charset="-122"/>
+                <a:cs typeface="Arial" panose="020B0604020202020204" pitchFamily="34" charset="0"/>
               </a:rPr>
               <a:t>配音</a:t>
             </a:r>
@@ -11863,22 +10986,16 @@
               <a:solidFill>
                 <a:schemeClr val="bg1"/>
               </a:solidFill>
-              <a:latin typeface="Microsoft YaHei" panose="020B0503020204020204" pitchFamily="34" charset="-122"/>
-              <a:ea typeface="Microsoft YaHei" panose="020B0503020204020204" pitchFamily="34" charset="-122"/>
-              <a:cs typeface="Arial" pitchFamily="34" charset="0"/>
+              <a:latin typeface="微软雅黑" panose="020B0503020204020204" pitchFamily="34" charset="-122"/>
+              <a:ea typeface="微软雅黑" panose="020B0503020204020204" pitchFamily="34" charset="-122"/>
+              <a:cs typeface="Arial" panose="020B0604020202020204" pitchFamily="34" charset="0"/>
             </a:endParaRPr>
           </a:p>
         </p:txBody>
       </p:sp>
       <p:sp>
         <p:nvSpPr>
-          <p:cNvPr id="136" name="Rounded Rectangle 28">
-            <a:extLst>
-              <a:ext uri="{FF2B5EF4-FFF2-40B4-BE49-F238E27FC236}">
-                <a16:creationId xmlns:a16="http://schemas.microsoft.com/office/drawing/2014/main" id="{755A9E71-9AEA-4318-91D8-1CDB9C3DD25C}"/>
-              </a:ext>
-            </a:extLst>
-          </p:cNvPr>
+          <p:cNvPr id="136" name="Rounded Rectangle 28"/>
           <p:cNvSpPr/>
           <p:nvPr/>
         </p:nvSpPr>
@@ -11925,8 +11042,8 @@
                 <a:solidFill>
                   <a:schemeClr val="bg1"/>
                 </a:solidFill>
-                <a:latin typeface="Microsoft YaHei" panose="020B0503020204020204" pitchFamily="34" charset="-122"/>
-                <a:cs typeface="Arial" pitchFamily="34" charset="0"/>
+                <a:latin typeface="微软雅黑" panose="020B0503020204020204" pitchFamily="34" charset="-122"/>
+                <a:cs typeface="Arial" panose="020B0604020202020204" pitchFamily="34" charset="0"/>
               </a:rPr>
               <a:t>字幕生成</a:t>
             </a:r>
@@ -11934,22 +11051,16 @@
               <a:solidFill>
                 <a:schemeClr val="bg1"/>
               </a:solidFill>
-              <a:latin typeface="Microsoft YaHei" panose="020B0503020204020204" pitchFamily="34" charset="-122"/>
-              <a:ea typeface="Microsoft YaHei" panose="020B0503020204020204" pitchFamily="34" charset="-122"/>
-              <a:cs typeface="Arial" pitchFamily="34" charset="0"/>
+              <a:latin typeface="微软雅黑" panose="020B0503020204020204" pitchFamily="34" charset="-122"/>
+              <a:ea typeface="微软雅黑" panose="020B0503020204020204" pitchFamily="34" charset="-122"/>
+              <a:cs typeface="Arial" panose="020B0604020202020204" pitchFamily="34" charset="0"/>
             </a:endParaRPr>
           </a:p>
         </p:txBody>
       </p:sp>
       <p:sp>
         <p:nvSpPr>
-          <p:cNvPr id="137" name="Rounded Rectangle 28">
-            <a:extLst>
-              <a:ext uri="{FF2B5EF4-FFF2-40B4-BE49-F238E27FC236}">
-                <a16:creationId xmlns:a16="http://schemas.microsoft.com/office/drawing/2014/main" id="{37B8B9A0-C673-9549-3F50-BC573D836F64}"/>
-              </a:ext>
-            </a:extLst>
-          </p:cNvPr>
+          <p:cNvPr id="137" name="Rounded Rectangle 28"/>
           <p:cNvSpPr/>
           <p:nvPr/>
         </p:nvSpPr>
@@ -11996,8 +11107,8 @@
                 <a:solidFill>
                   <a:schemeClr val="bg1"/>
                 </a:solidFill>
-                <a:latin typeface="STHupo" panose="02010800040101010101" pitchFamily="2" charset="-122"/>
-                <a:cs typeface="Arial" pitchFamily="34" charset="0"/>
+                <a:latin typeface="华文琥珀" panose="02010800040101010101" pitchFamily="2" charset="-122"/>
+                <a:cs typeface="Arial" panose="020B0604020202020204" pitchFamily="34" charset="0"/>
               </a:rPr>
               <a:t>支持自定义</a:t>
             </a:r>
@@ -12005,22 +11116,16 @@
               <a:solidFill>
                 <a:schemeClr val="bg1"/>
               </a:solidFill>
-              <a:latin typeface="STHupo" panose="02010800040101010101" pitchFamily="2" charset="-122"/>
-              <a:ea typeface="STHupo" panose="02010800040101010101" pitchFamily="2" charset="-122"/>
-              <a:cs typeface="Arial" pitchFamily="34" charset="0"/>
+              <a:latin typeface="华文琥珀" panose="02010800040101010101" pitchFamily="2" charset="-122"/>
+              <a:ea typeface="华文琥珀" panose="02010800040101010101" pitchFamily="2" charset="-122"/>
+              <a:cs typeface="Arial" panose="020B0604020202020204" pitchFamily="34" charset="0"/>
             </a:endParaRPr>
           </a:p>
         </p:txBody>
       </p:sp>
       <p:grpSp>
         <p:nvGrpSpPr>
-          <p:cNvPr id="229" name="그룹 3">
-            <a:extLst>
-              <a:ext uri="{FF2B5EF4-FFF2-40B4-BE49-F238E27FC236}">
-                <a16:creationId xmlns:a16="http://schemas.microsoft.com/office/drawing/2014/main" id="{2289385D-E2F8-6A8F-1A1E-76487B3F48EB}"/>
-              </a:ext>
-            </a:extLst>
-          </p:cNvPr>
+          <p:cNvPr id="229" name="그룹 3"/>
           <p:cNvGrpSpPr/>
           <p:nvPr/>
         </p:nvGrpSpPr>
@@ -12034,13 +11139,7 @@
         </p:grpSpPr>
         <p:sp>
           <p:nvSpPr>
-            <p:cNvPr id="230" name="Freeform: Shape 4">
-              <a:extLst>
-                <a:ext uri="{FF2B5EF4-FFF2-40B4-BE49-F238E27FC236}">
-                  <a16:creationId xmlns:a16="http://schemas.microsoft.com/office/drawing/2014/main" id="{4FC03773-97B3-800D-427F-8FDCC99AFD7E}"/>
-                </a:ext>
-              </a:extLst>
-            </p:cNvPr>
+            <p:cNvPr id="230" name="Freeform: Shape 4"/>
             <p:cNvSpPr/>
             <p:nvPr/>
           </p:nvSpPr>
@@ -12190,13 +11289,7 @@
         </p:sp>
         <p:sp>
           <p:nvSpPr>
-            <p:cNvPr id="231" name="Freeform: Shape 5">
-              <a:extLst>
-                <a:ext uri="{FF2B5EF4-FFF2-40B4-BE49-F238E27FC236}">
-                  <a16:creationId xmlns:a16="http://schemas.microsoft.com/office/drawing/2014/main" id="{EED9A084-99AB-135A-6B79-5AEA7A309C35}"/>
-                </a:ext>
-              </a:extLst>
-            </p:cNvPr>
+            <p:cNvPr id="231" name="Freeform: Shape 5"/>
             <p:cNvSpPr/>
             <p:nvPr/>
           </p:nvSpPr>
@@ -12316,13 +11409,7 @@
         </p:sp>
         <p:sp>
           <p:nvSpPr>
-            <p:cNvPr id="232" name="자유형: 도형 6">
-              <a:extLst>
-                <a:ext uri="{FF2B5EF4-FFF2-40B4-BE49-F238E27FC236}">
-                  <a16:creationId xmlns:a16="http://schemas.microsoft.com/office/drawing/2014/main" id="{52AA5E3B-8F80-EF70-9789-54541429750E}"/>
-                </a:ext>
-              </a:extLst>
-            </p:cNvPr>
+            <p:cNvPr id="232" name="자유형: 도형 6"/>
             <p:cNvSpPr/>
             <p:nvPr/>
           </p:nvSpPr>
@@ -12651,13 +11738,7 @@
         </p:sp>
         <p:sp>
           <p:nvSpPr>
-            <p:cNvPr id="233" name="Freeform: Shape 7">
-              <a:extLst>
-                <a:ext uri="{FF2B5EF4-FFF2-40B4-BE49-F238E27FC236}">
-                  <a16:creationId xmlns:a16="http://schemas.microsoft.com/office/drawing/2014/main" id="{66226C27-179B-E7C7-9FF9-5DF078F55C76}"/>
-                </a:ext>
-              </a:extLst>
-            </p:cNvPr>
+            <p:cNvPr id="233" name="Freeform: Shape 7"/>
             <p:cNvSpPr/>
             <p:nvPr/>
           </p:nvSpPr>
@@ -12907,13 +11988,7 @@
         </p:sp>
         <p:sp>
           <p:nvSpPr>
-            <p:cNvPr id="234" name="Freeform: Shape 20">
-              <a:extLst>
-                <a:ext uri="{FF2B5EF4-FFF2-40B4-BE49-F238E27FC236}">
-                  <a16:creationId xmlns:a16="http://schemas.microsoft.com/office/drawing/2014/main" id="{87951C12-042B-F5C1-A14E-C904758BDF18}"/>
-                </a:ext>
-              </a:extLst>
-            </p:cNvPr>
+            <p:cNvPr id="234" name="Freeform: Shape 20"/>
             <p:cNvSpPr/>
             <p:nvPr/>
           </p:nvSpPr>
@@ -13027,13 +12102,7 @@
         </p:sp>
         <p:sp>
           <p:nvSpPr>
-            <p:cNvPr id="237" name="Freeform: Shape 23">
-              <a:extLst>
-                <a:ext uri="{FF2B5EF4-FFF2-40B4-BE49-F238E27FC236}">
-                  <a16:creationId xmlns:a16="http://schemas.microsoft.com/office/drawing/2014/main" id="{23D0AC7D-8BCE-3DFB-CCBC-83F563A78F7F}"/>
-                </a:ext>
-              </a:extLst>
-            </p:cNvPr>
+            <p:cNvPr id="237" name="Freeform: Shape 23"/>
             <p:cNvSpPr/>
             <p:nvPr/>
           </p:nvSpPr>
@@ -13493,13 +12562,7 @@
         </p:sp>
         <p:sp>
           <p:nvSpPr>
-            <p:cNvPr id="238" name="자유형: 도형 12">
-              <a:extLst>
-                <a:ext uri="{FF2B5EF4-FFF2-40B4-BE49-F238E27FC236}">
-                  <a16:creationId xmlns:a16="http://schemas.microsoft.com/office/drawing/2014/main" id="{A1E5BB0E-4A1C-5E13-9865-66305309E0B4}"/>
-                </a:ext>
-              </a:extLst>
-            </p:cNvPr>
+            <p:cNvPr id="238" name="자유형: 도형 12"/>
             <p:cNvSpPr/>
             <p:nvPr/>
           </p:nvSpPr>
@@ -13672,11 +12735,6 @@
         </p:sp>
       </p:grpSp>
     </p:spTree>
-    <p:extLst>
-      <p:ext uri="{BB962C8B-B14F-4D97-AF65-F5344CB8AC3E}">
-        <p14:creationId xmlns:p14="http://schemas.microsoft.com/office/powerpoint/2010/main" val="389672307"/>
-      </p:ext>
-    </p:extLst>
   </p:cSld>
   <p:clrMapOvr>
     <a:masterClrMapping/>
@@ -13703,13 +12761,7 @@
       </p:grpSpPr>
       <p:sp>
         <p:nvSpPr>
-          <p:cNvPr id="12" name="TextBox 11">
-            <a:extLst>
-              <a:ext uri="{FF2B5EF4-FFF2-40B4-BE49-F238E27FC236}">
-                <a16:creationId xmlns:a16="http://schemas.microsoft.com/office/drawing/2014/main" id="{5390F579-2262-44ED-AD37-A6B78EB88618}"/>
-              </a:ext>
-            </a:extLst>
-          </p:cNvPr>
+          <p:cNvPr id="12" name="TextBox 11"/>
           <p:cNvSpPr txBox="1"/>
           <p:nvPr/>
         </p:nvSpPr>
@@ -13736,8 +12788,8 @@
             </a:pPr>
             <a:r>
               <a:rPr lang="ko-KR" altLang="en-US" sz="3200" b="1" dirty="0" err="1">
-                <a:latin typeface="Microsoft YaHei" panose="020B0503020204020204" pitchFamily="34" charset="-122"/>
-                <a:cs typeface="Arial" pitchFamily="34" charset="0"/>
+                <a:latin typeface="微软雅黑" panose="020B0503020204020204" pitchFamily="34" charset="-122"/>
+                <a:cs typeface="Arial" panose="020B0604020202020204" pitchFamily="34" charset="0"/>
               </a:rPr>
               <a:t>只需</a:t>
             </a:r>
@@ -13746,23 +12798,23 @@
                 <a:solidFill>
                   <a:schemeClr val="accent3"/>
                 </a:solidFill>
-                <a:latin typeface="Microsoft YaHei" panose="020B0503020204020204" pitchFamily="34" charset="-122"/>
-                <a:cs typeface="Arial" pitchFamily="34" charset="0"/>
+                <a:latin typeface="微软雅黑" panose="020B0503020204020204" pitchFamily="34" charset="-122"/>
+                <a:cs typeface="Arial" panose="020B0604020202020204" pitchFamily="34" charset="0"/>
               </a:rPr>
               <a:t>四步</a:t>
             </a:r>
             <a:r>
               <a:rPr lang="zh-CN" altLang="en-US" sz="3200" b="1" dirty="0">
-                <a:latin typeface="Microsoft YaHei" panose="020B0503020204020204" pitchFamily="34" charset="-122"/>
-                <a:ea typeface="Microsoft YaHei" panose="020B0503020204020204" pitchFamily="34" charset="-122"/>
-                <a:cs typeface="Arial" pitchFamily="34" charset="0"/>
+                <a:latin typeface="微软雅黑" panose="020B0503020204020204" pitchFamily="34" charset="-122"/>
+                <a:ea typeface="微软雅黑" panose="020B0503020204020204" pitchFamily="34" charset="-122"/>
+                <a:cs typeface="Arial" panose="020B0604020202020204" pitchFamily="34" charset="0"/>
               </a:rPr>
               <a:t>，</a:t>
             </a:r>
             <a:r>
               <a:rPr lang="ko-KR" altLang="en-US" sz="3200" b="1" dirty="0" err="1">
-                <a:latin typeface="Microsoft YaHei" panose="020B0503020204020204" pitchFamily="34" charset="-122"/>
-                <a:cs typeface="Arial" pitchFamily="34" charset="0"/>
+                <a:latin typeface="微软雅黑" panose="020B0503020204020204" pitchFamily="34" charset="-122"/>
+                <a:cs typeface="Arial" panose="020B0604020202020204" pitchFamily="34" charset="0"/>
               </a:rPr>
               <a:t>即可完成</a:t>
             </a:r>
@@ -13770,22 +12822,16 @@
               <a:solidFill>
                 <a:schemeClr val="accent3"/>
               </a:solidFill>
-              <a:latin typeface="Microsoft YaHei" panose="020B0503020204020204" pitchFamily="34" charset="-122"/>
-              <a:ea typeface="Microsoft YaHei" panose="020B0503020204020204" pitchFamily="34" charset="-122"/>
-              <a:cs typeface="Arial" pitchFamily="34" charset="0"/>
+              <a:latin typeface="微软雅黑" panose="020B0503020204020204" pitchFamily="34" charset="-122"/>
+              <a:ea typeface="微软雅黑" panose="020B0503020204020204" pitchFamily="34" charset="-122"/>
+              <a:cs typeface="Arial" panose="020B0604020202020204" pitchFamily="34" charset="0"/>
             </a:endParaRPr>
           </a:p>
         </p:txBody>
       </p:sp>
       <p:grpSp>
         <p:nvGrpSpPr>
-          <p:cNvPr id="3" name="그룹 2">
-            <a:extLst>
-              <a:ext uri="{FF2B5EF4-FFF2-40B4-BE49-F238E27FC236}">
-                <a16:creationId xmlns:a16="http://schemas.microsoft.com/office/drawing/2014/main" id="{2597F33B-9A14-4965-AB62-56ABE3A1FE04}"/>
-              </a:ext>
-            </a:extLst>
-          </p:cNvPr>
+          <p:cNvPr id="3" name="그룹 2"/>
           <p:cNvGrpSpPr/>
           <p:nvPr/>
         </p:nvGrpSpPr>
@@ -13799,13 +12845,7 @@
         </p:grpSpPr>
         <p:sp>
           <p:nvSpPr>
-            <p:cNvPr id="8" name="타원 7">
-              <a:extLst>
-                <a:ext uri="{FF2B5EF4-FFF2-40B4-BE49-F238E27FC236}">
-                  <a16:creationId xmlns:a16="http://schemas.microsoft.com/office/drawing/2014/main" id="{65E4199F-749A-41CB-98A0-0053B10701C4}"/>
-                </a:ext>
-              </a:extLst>
-            </p:cNvPr>
+            <p:cNvPr id="8" name="타원 7"/>
             <p:cNvSpPr/>
             <p:nvPr/>
           </p:nvSpPr>
@@ -13852,13 +12892,7 @@
         </p:sp>
         <p:sp>
           <p:nvSpPr>
-            <p:cNvPr id="5" name="TextBox 4">
-              <a:extLst>
-                <a:ext uri="{FF2B5EF4-FFF2-40B4-BE49-F238E27FC236}">
-                  <a16:creationId xmlns:a16="http://schemas.microsoft.com/office/drawing/2014/main" id="{1C159B79-43BC-48FF-B5B9-1B93A811199E}"/>
-                </a:ext>
-              </a:extLst>
-            </p:cNvPr>
+            <p:cNvPr id="5" name="TextBox 4"/>
             <p:cNvSpPr txBox="1"/>
             <p:nvPr/>
           </p:nvSpPr>
@@ -13884,7 +12918,7 @@
                   <a:solidFill>
                     <a:schemeClr val="bg1"/>
                   </a:solidFill>
-                  <a:cs typeface="Arial" pitchFamily="34" charset="0"/>
+                  <a:cs typeface="Arial" panose="020B0604020202020204" pitchFamily="34" charset="0"/>
                 </a:rPr>
                 <a:t>01</a:t>
               </a:r>
@@ -13892,20 +12926,14 @@
                 <a:solidFill>
                   <a:schemeClr val="bg1"/>
                 </a:solidFill>
-                <a:cs typeface="Arial" pitchFamily="34" charset="0"/>
+                <a:cs typeface="Arial" panose="020B0604020202020204" pitchFamily="34" charset="0"/>
               </a:endParaRPr>
             </a:p>
           </p:txBody>
         </p:sp>
         <p:sp>
           <p:nvSpPr>
-            <p:cNvPr id="7" name="TextBox 6">
-              <a:extLst>
-                <a:ext uri="{FF2B5EF4-FFF2-40B4-BE49-F238E27FC236}">
-                  <a16:creationId xmlns:a16="http://schemas.microsoft.com/office/drawing/2014/main" id="{BBFD7785-EA18-4EEF-BF11-529A7B4D6672}"/>
-                </a:ext>
-              </a:extLst>
-            </p:cNvPr>
+            <p:cNvPr id="7" name="TextBox 6"/>
             <p:cNvSpPr txBox="1"/>
             <p:nvPr/>
           </p:nvSpPr>
@@ -13930,7 +12958,7 @@
                   <a:solidFill>
                     <a:schemeClr val="accent1"/>
                   </a:solidFill>
-                  <a:cs typeface="Arial" pitchFamily="34" charset="0"/>
+                  <a:cs typeface="Arial" panose="020B0604020202020204" pitchFamily="34" charset="0"/>
                 </a:rPr>
                 <a:t>选择</a:t>
               </a:r>
@@ -13939,7 +12967,7 @@
                   <a:solidFill>
                     <a:schemeClr val="accent1"/>
                   </a:solidFill>
-                  <a:cs typeface="Arial" pitchFamily="34" charset="0"/>
+                  <a:cs typeface="Arial" panose="020B0604020202020204" pitchFamily="34" charset="0"/>
                 </a:rPr>
                 <a:t>PPT</a:t>
               </a:r>
@@ -13948,7 +12976,7 @@
                   <a:solidFill>
                     <a:schemeClr val="accent1"/>
                   </a:solidFill>
-                  <a:cs typeface="Arial" pitchFamily="34" charset="0"/>
+                  <a:cs typeface="Arial" panose="020B0604020202020204" pitchFamily="34" charset="0"/>
                 </a:rPr>
                 <a:t>文件</a:t>
               </a:r>
@@ -13956,7 +12984,7 @@
                 <a:solidFill>
                   <a:schemeClr val="accent1"/>
                 </a:solidFill>
-                <a:cs typeface="Arial" pitchFamily="34" charset="0"/>
+                <a:cs typeface="Arial" panose="020B0604020202020204" pitchFamily="34" charset="0"/>
               </a:endParaRPr>
             </a:p>
           </p:txBody>
@@ -13964,13 +12992,7 @@
       </p:grpSp>
       <p:grpSp>
         <p:nvGrpSpPr>
-          <p:cNvPr id="13" name="그룹 12">
-            <a:extLst>
-              <a:ext uri="{FF2B5EF4-FFF2-40B4-BE49-F238E27FC236}">
-                <a16:creationId xmlns:a16="http://schemas.microsoft.com/office/drawing/2014/main" id="{587A1C9C-798D-4473-B3F2-F9B92DC84DD5}"/>
-              </a:ext>
-            </a:extLst>
-          </p:cNvPr>
+          <p:cNvPr id="13" name="그룹 12"/>
           <p:cNvGrpSpPr/>
           <p:nvPr/>
         </p:nvGrpSpPr>
@@ -13984,13 +13006,7 @@
         </p:grpSpPr>
         <p:sp>
           <p:nvSpPr>
-            <p:cNvPr id="18" name="타원 17">
-              <a:extLst>
-                <a:ext uri="{FF2B5EF4-FFF2-40B4-BE49-F238E27FC236}">
-                  <a16:creationId xmlns:a16="http://schemas.microsoft.com/office/drawing/2014/main" id="{AAC3668F-CD1E-4DE4-80CD-4AC3A61E721D}"/>
-                </a:ext>
-              </a:extLst>
-            </p:cNvPr>
+            <p:cNvPr id="18" name="타원 17"/>
             <p:cNvSpPr/>
             <p:nvPr/>
           </p:nvSpPr>
@@ -14037,13 +13053,7 @@
         </p:sp>
         <p:sp>
           <p:nvSpPr>
-            <p:cNvPr id="15" name="TextBox 14">
-              <a:extLst>
-                <a:ext uri="{FF2B5EF4-FFF2-40B4-BE49-F238E27FC236}">
-                  <a16:creationId xmlns:a16="http://schemas.microsoft.com/office/drawing/2014/main" id="{4185B33B-2389-4376-8190-2C0D59302F01}"/>
-                </a:ext>
-              </a:extLst>
-            </p:cNvPr>
+            <p:cNvPr id="15" name="TextBox 14"/>
             <p:cNvSpPr txBox="1"/>
             <p:nvPr/>
           </p:nvSpPr>
@@ -14069,7 +13079,7 @@
                   <a:solidFill>
                     <a:schemeClr val="bg1"/>
                   </a:solidFill>
-                  <a:cs typeface="Arial" pitchFamily="34" charset="0"/>
+                  <a:cs typeface="Arial" panose="020B0604020202020204" pitchFamily="34" charset="0"/>
                 </a:rPr>
                 <a:t>02</a:t>
               </a:r>
@@ -14077,20 +13087,14 @@
                 <a:solidFill>
                   <a:schemeClr val="bg1"/>
                 </a:solidFill>
-                <a:cs typeface="Arial" pitchFamily="34" charset="0"/>
+                <a:cs typeface="Arial" panose="020B0604020202020204" pitchFamily="34" charset="0"/>
               </a:endParaRPr>
             </a:p>
           </p:txBody>
         </p:sp>
         <p:sp>
           <p:nvSpPr>
-            <p:cNvPr id="17" name="TextBox 16">
-              <a:extLst>
-                <a:ext uri="{FF2B5EF4-FFF2-40B4-BE49-F238E27FC236}">
-                  <a16:creationId xmlns:a16="http://schemas.microsoft.com/office/drawing/2014/main" id="{331D7438-3A7E-4EA5-A0E8-163CD7ACF99E}"/>
-                </a:ext>
-              </a:extLst>
-            </p:cNvPr>
+            <p:cNvPr id="17" name="TextBox 16"/>
             <p:cNvSpPr txBox="1"/>
             <p:nvPr/>
           </p:nvSpPr>
@@ -14115,7 +13119,7 @@
                   <a:solidFill>
                     <a:schemeClr val="accent2"/>
                   </a:solidFill>
-                  <a:cs typeface="Arial" pitchFamily="34" charset="0"/>
+                  <a:cs typeface="Arial" panose="020B0604020202020204" pitchFamily="34" charset="0"/>
                 </a:rPr>
                 <a:t>自定义设置</a:t>
               </a:r>
@@ -14123,7 +13127,7 @@
                 <a:solidFill>
                   <a:schemeClr val="accent2"/>
                 </a:solidFill>
-                <a:cs typeface="Arial" pitchFamily="34" charset="0"/>
+                <a:cs typeface="Arial" panose="020B0604020202020204" pitchFamily="34" charset="0"/>
               </a:endParaRPr>
             </a:p>
           </p:txBody>
@@ -14131,13 +13135,7 @@
       </p:grpSp>
       <p:grpSp>
         <p:nvGrpSpPr>
-          <p:cNvPr id="20" name="그룹 19">
-            <a:extLst>
-              <a:ext uri="{FF2B5EF4-FFF2-40B4-BE49-F238E27FC236}">
-                <a16:creationId xmlns:a16="http://schemas.microsoft.com/office/drawing/2014/main" id="{EE79ECA2-658C-4F10-BAD5-BCBB7651CDA8}"/>
-              </a:ext>
-            </a:extLst>
-          </p:cNvPr>
+          <p:cNvPr id="20" name="그룹 19"/>
           <p:cNvGrpSpPr/>
           <p:nvPr/>
         </p:nvGrpSpPr>
@@ -14151,13 +13149,7 @@
         </p:grpSpPr>
         <p:sp>
           <p:nvSpPr>
-            <p:cNvPr id="25" name="타원 24">
-              <a:extLst>
-                <a:ext uri="{FF2B5EF4-FFF2-40B4-BE49-F238E27FC236}">
-                  <a16:creationId xmlns:a16="http://schemas.microsoft.com/office/drawing/2014/main" id="{9D63E88A-8248-4E4F-B76B-CD47DDCAAC5C}"/>
-                </a:ext>
-              </a:extLst>
-            </p:cNvPr>
+            <p:cNvPr id="25" name="타원 24"/>
             <p:cNvSpPr/>
             <p:nvPr/>
           </p:nvSpPr>
@@ -14204,13 +13196,7 @@
         </p:sp>
         <p:sp>
           <p:nvSpPr>
-            <p:cNvPr id="22" name="TextBox 21">
-              <a:extLst>
-                <a:ext uri="{FF2B5EF4-FFF2-40B4-BE49-F238E27FC236}">
-                  <a16:creationId xmlns:a16="http://schemas.microsoft.com/office/drawing/2014/main" id="{91922EF1-869B-4F88-854E-F5C610362F63}"/>
-                </a:ext>
-              </a:extLst>
-            </p:cNvPr>
+            <p:cNvPr id="22" name="TextBox 21"/>
             <p:cNvSpPr txBox="1"/>
             <p:nvPr/>
           </p:nvSpPr>
@@ -14236,7 +13222,7 @@
                   <a:solidFill>
                     <a:schemeClr val="bg1"/>
                   </a:solidFill>
-                  <a:cs typeface="Arial" pitchFamily="34" charset="0"/>
+                  <a:cs typeface="Arial" panose="020B0604020202020204" pitchFamily="34" charset="0"/>
                 </a:rPr>
                 <a:t>03</a:t>
               </a:r>
@@ -14244,20 +13230,14 @@
                 <a:solidFill>
                   <a:schemeClr val="bg1"/>
                 </a:solidFill>
-                <a:cs typeface="Arial" pitchFamily="34" charset="0"/>
+                <a:cs typeface="Arial" panose="020B0604020202020204" pitchFamily="34" charset="0"/>
               </a:endParaRPr>
             </a:p>
           </p:txBody>
         </p:sp>
         <p:sp>
           <p:nvSpPr>
-            <p:cNvPr id="24" name="TextBox 23">
-              <a:extLst>
-                <a:ext uri="{FF2B5EF4-FFF2-40B4-BE49-F238E27FC236}">
-                  <a16:creationId xmlns:a16="http://schemas.microsoft.com/office/drawing/2014/main" id="{5EB98688-68DA-4A67-9F57-01275D89E008}"/>
-                </a:ext>
-              </a:extLst>
-            </p:cNvPr>
+            <p:cNvPr id="24" name="TextBox 23"/>
             <p:cNvSpPr txBox="1"/>
             <p:nvPr/>
           </p:nvSpPr>
@@ -14282,7 +13262,7 @@
                   <a:solidFill>
                     <a:schemeClr val="accent3"/>
                   </a:solidFill>
-                  <a:cs typeface="Arial" pitchFamily="34" charset="0"/>
+                  <a:cs typeface="Arial" panose="020B0604020202020204" pitchFamily="34" charset="0"/>
                 </a:rPr>
                 <a:t>生成视频</a:t>
               </a:r>
@@ -14290,7 +13270,7 @@
                 <a:solidFill>
                   <a:schemeClr val="accent3"/>
                 </a:solidFill>
-                <a:cs typeface="Arial" pitchFamily="34" charset="0"/>
+                <a:cs typeface="Arial" panose="020B0604020202020204" pitchFamily="34" charset="0"/>
               </a:endParaRPr>
             </a:p>
           </p:txBody>
@@ -14298,13 +13278,7 @@
       </p:grpSp>
       <p:grpSp>
         <p:nvGrpSpPr>
-          <p:cNvPr id="27" name="그룹 26">
-            <a:extLst>
-              <a:ext uri="{FF2B5EF4-FFF2-40B4-BE49-F238E27FC236}">
-                <a16:creationId xmlns:a16="http://schemas.microsoft.com/office/drawing/2014/main" id="{5F9F972F-5D9C-4105-8E0C-2BCCA827C0E0}"/>
-              </a:ext>
-            </a:extLst>
-          </p:cNvPr>
+          <p:cNvPr id="27" name="그룹 26"/>
           <p:cNvGrpSpPr/>
           <p:nvPr/>
         </p:nvGrpSpPr>
@@ -14318,13 +13292,7 @@
         </p:grpSpPr>
         <p:sp>
           <p:nvSpPr>
-            <p:cNvPr id="32" name="타원 31">
-              <a:extLst>
-                <a:ext uri="{FF2B5EF4-FFF2-40B4-BE49-F238E27FC236}">
-                  <a16:creationId xmlns:a16="http://schemas.microsoft.com/office/drawing/2014/main" id="{1D32FE01-6429-4000-B443-2F98FEC4EE18}"/>
-                </a:ext>
-              </a:extLst>
-            </p:cNvPr>
+            <p:cNvPr id="32" name="타원 31"/>
             <p:cNvSpPr/>
             <p:nvPr/>
           </p:nvSpPr>
@@ -14371,13 +13339,7 @@
         </p:sp>
         <p:sp>
           <p:nvSpPr>
-            <p:cNvPr id="29" name="TextBox 28">
-              <a:extLst>
-                <a:ext uri="{FF2B5EF4-FFF2-40B4-BE49-F238E27FC236}">
-                  <a16:creationId xmlns:a16="http://schemas.microsoft.com/office/drawing/2014/main" id="{8C28DD49-89E0-4358-AF26-7CB11EA51075}"/>
-                </a:ext>
-              </a:extLst>
-            </p:cNvPr>
+            <p:cNvPr id="29" name="TextBox 28"/>
             <p:cNvSpPr txBox="1"/>
             <p:nvPr/>
           </p:nvSpPr>
@@ -14403,7 +13365,7 @@
                   <a:solidFill>
                     <a:schemeClr val="bg1"/>
                   </a:solidFill>
-                  <a:cs typeface="Arial" pitchFamily="34" charset="0"/>
+                  <a:cs typeface="Arial" panose="020B0604020202020204" pitchFamily="34" charset="0"/>
                 </a:rPr>
                 <a:t>04</a:t>
               </a:r>
@@ -14411,20 +13373,14 @@
                 <a:solidFill>
                   <a:schemeClr val="bg1"/>
                 </a:solidFill>
-                <a:cs typeface="Arial" pitchFamily="34" charset="0"/>
+                <a:cs typeface="Arial" panose="020B0604020202020204" pitchFamily="34" charset="0"/>
               </a:endParaRPr>
             </a:p>
           </p:txBody>
         </p:sp>
         <p:sp>
           <p:nvSpPr>
-            <p:cNvPr id="31" name="TextBox 30">
-              <a:extLst>
-                <a:ext uri="{FF2B5EF4-FFF2-40B4-BE49-F238E27FC236}">
-                  <a16:creationId xmlns:a16="http://schemas.microsoft.com/office/drawing/2014/main" id="{5D82AC51-3C38-45FD-B9ED-E064FFAAC6EF}"/>
-                </a:ext>
-              </a:extLst>
-            </p:cNvPr>
+            <p:cNvPr id="31" name="TextBox 30"/>
             <p:cNvSpPr txBox="1"/>
             <p:nvPr/>
           </p:nvSpPr>
@@ -14449,7 +13405,7 @@
                   <a:solidFill>
                     <a:schemeClr val="accent4"/>
                   </a:solidFill>
-                  <a:cs typeface="Arial" pitchFamily="34" charset="0"/>
+                  <a:cs typeface="Arial" panose="020B0604020202020204" pitchFamily="34" charset="0"/>
                 </a:rPr>
                 <a:t>预览播放</a:t>
               </a:r>
@@ -14457,7 +13413,7 @@
                 <a:solidFill>
                   <a:schemeClr val="accent4"/>
                 </a:solidFill>
-                <a:cs typeface="Arial" pitchFamily="34" charset="0"/>
+                <a:cs typeface="Arial" panose="020B0604020202020204" pitchFamily="34" charset="0"/>
               </a:endParaRPr>
             </a:p>
           </p:txBody>
@@ -14465,13 +13421,7 @@
       </p:grpSp>
       <p:grpSp>
         <p:nvGrpSpPr>
-          <p:cNvPr id="34" name="그룹 33">
-            <a:extLst>
-              <a:ext uri="{FF2B5EF4-FFF2-40B4-BE49-F238E27FC236}">
-                <a16:creationId xmlns:a16="http://schemas.microsoft.com/office/drawing/2014/main" id="{C7116B22-1DEA-4068-AB52-793E58E2CB92}"/>
-              </a:ext>
-            </a:extLst>
-          </p:cNvPr>
+          <p:cNvPr id="34" name="그룹 33"/>
           <p:cNvGrpSpPr/>
           <p:nvPr/>
         </p:nvGrpSpPr>
@@ -14485,13 +13435,7 @@
         </p:grpSpPr>
         <p:sp>
           <p:nvSpPr>
-            <p:cNvPr id="35" name="자유형: 도형 34">
-              <a:extLst>
-                <a:ext uri="{FF2B5EF4-FFF2-40B4-BE49-F238E27FC236}">
-                  <a16:creationId xmlns:a16="http://schemas.microsoft.com/office/drawing/2014/main" id="{31C50DA7-6923-4570-ABC8-5F2688C6B980}"/>
-                </a:ext>
-              </a:extLst>
-            </p:cNvPr>
+            <p:cNvPr id="35" name="자유형: 도형 34"/>
             <p:cNvSpPr/>
             <p:nvPr/>
           </p:nvSpPr>
@@ -14701,13 +13645,7 @@
         </p:sp>
         <p:sp>
           <p:nvSpPr>
-            <p:cNvPr id="36" name="자유형: 도형 35">
-              <a:extLst>
-                <a:ext uri="{FF2B5EF4-FFF2-40B4-BE49-F238E27FC236}">
-                  <a16:creationId xmlns:a16="http://schemas.microsoft.com/office/drawing/2014/main" id="{65995670-6CEE-4550-8701-4A3959F165EA}"/>
-                </a:ext>
-              </a:extLst>
-            </p:cNvPr>
+            <p:cNvPr id="36" name="자유형: 도형 35"/>
             <p:cNvSpPr/>
             <p:nvPr/>
           </p:nvSpPr>
@@ -14837,13 +13775,7 @@
         </p:sp>
         <p:sp>
           <p:nvSpPr>
-            <p:cNvPr id="37" name="자유형: 도형 36">
-              <a:extLst>
-                <a:ext uri="{FF2B5EF4-FFF2-40B4-BE49-F238E27FC236}">
-                  <a16:creationId xmlns:a16="http://schemas.microsoft.com/office/drawing/2014/main" id="{9B8C2DB9-2B33-46F3-B228-554CD160AC4A}"/>
-                </a:ext>
-              </a:extLst>
-            </p:cNvPr>
+            <p:cNvPr id="37" name="자유형: 도형 36"/>
             <p:cNvSpPr/>
             <p:nvPr/>
           </p:nvSpPr>
@@ -15351,13 +14283,7 @@
         </p:sp>
         <p:sp>
           <p:nvSpPr>
-            <p:cNvPr id="38" name="자유형: 도형 37">
-              <a:extLst>
-                <a:ext uri="{FF2B5EF4-FFF2-40B4-BE49-F238E27FC236}">
-                  <a16:creationId xmlns:a16="http://schemas.microsoft.com/office/drawing/2014/main" id="{ED65C34E-0913-4BD5-92E8-D8DD87A2F30B}"/>
-                </a:ext>
-              </a:extLst>
-            </p:cNvPr>
+            <p:cNvPr id="38" name="자유형: 도형 37"/>
             <p:cNvSpPr/>
             <p:nvPr/>
           </p:nvSpPr>
@@ -15527,13 +14453,7 @@
         </p:sp>
         <p:sp>
           <p:nvSpPr>
-            <p:cNvPr id="39" name="자유형: 도형 38">
-              <a:extLst>
-                <a:ext uri="{FF2B5EF4-FFF2-40B4-BE49-F238E27FC236}">
-                  <a16:creationId xmlns:a16="http://schemas.microsoft.com/office/drawing/2014/main" id="{5EAFD758-3F36-40FC-BF99-4B566B237552}"/>
-                </a:ext>
-              </a:extLst>
-            </p:cNvPr>
+            <p:cNvPr id="39" name="자유형: 도형 38"/>
             <p:cNvSpPr/>
             <p:nvPr/>
           </p:nvSpPr>
@@ -15806,13 +14726,7 @@
         </p:sp>
         <p:sp>
           <p:nvSpPr>
-            <p:cNvPr id="40" name="자유형: 도형 39">
-              <a:extLst>
-                <a:ext uri="{FF2B5EF4-FFF2-40B4-BE49-F238E27FC236}">
-                  <a16:creationId xmlns:a16="http://schemas.microsoft.com/office/drawing/2014/main" id="{908D1219-B985-4F07-A016-18B44C1BD5F0}"/>
-                </a:ext>
-              </a:extLst>
-            </p:cNvPr>
+            <p:cNvPr id="40" name="자유형: 도형 39"/>
             <p:cNvSpPr/>
             <p:nvPr/>
           </p:nvSpPr>
@@ -16192,13 +15106,7 @@
         </p:sp>
         <p:sp>
           <p:nvSpPr>
-            <p:cNvPr id="41" name="자유형: 도형 40">
-              <a:extLst>
-                <a:ext uri="{FF2B5EF4-FFF2-40B4-BE49-F238E27FC236}">
-                  <a16:creationId xmlns:a16="http://schemas.microsoft.com/office/drawing/2014/main" id="{324D6A86-6190-4D18-B25C-049CA2944BF9}"/>
-                </a:ext>
-              </a:extLst>
-            </p:cNvPr>
+            <p:cNvPr id="41" name="자유형: 도형 40"/>
             <p:cNvSpPr/>
             <p:nvPr/>
           </p:nvSpPr>
@@ -16388,13 +15296,7 @@
         </p:sp>
         <p:sp>
           <p:nvSpPr>
-            <p:cNvPr id="42" name="자유형: 도형 41">
-              <a:extLst>
-                <a:ext uri="{FF2B5EF4-FFF2-40B4-BE49-F238E27FC236}">
-                  <a16:creationId xmlns:a16="http://schemas.microsoft.com/office/drawing/2014/main" id="{A4290C74-9296-428A-B94C-8B32B679E5BB}"/>
-                </a:ext>
-              </a:extLst>
-            </p:cNvPr>
+            <p:cNvPr id="42" name="자유형: 도형 41"/>
             <p:cNvSpPr/>
             <p:nvPr/>
           </p:nvSpPr>
@@ -16634,13 +15536,7 @@
         </p:sp>
         <p:sp>
           <p:nvSpPr>
-            <p:cNvPr id="43" name="자유형: 도형 42">
-              <a:extLst>
-                <a:ext uri="{FF2B5EF4-FFF2-40B4-BE49-F238E27FC236}">
-                  <a16:creationId xmlns:a16="http://schemas.microsoft.com/office/drawing/2014/main" id="{71F28B4F-D06C-4757-8848-0B57C34E32F8}"/>
-                </a:ext>
-              </a:extLst>
-            </p:cNvPr>
+            <p:cNvPr id="43" name="자유형: 도형 42"/>
             <p:cNvSpPr/>
             <p:nvPr/>
           </p:nvSpPr>
@@ -16810,13 +15706,7 @@
         </p:sp>
         <p:sp>
           <p:nvSpPr>
-            <p:cNvPr id="44" name="자유형: 도형 43">
-              <a:extLst>
-                <a:ext uri="{FF2B5EF4-FFF2-40B4-BE49-F238E27FC236}">
-                  <a16:creationId xmlns:a16="http://schemas.microsoft.com/office/drawing/2014/main" id="{CC2885A8-5843-4A35-880B-0E32D91C734E}"/>
-                </a:ext>
-              </a:extLst>
-            </p:cNvPr>
+            <p:cNvPr id="44" name="자유형: 도형 43"/>
             <p:cNvSpPr/>
             <p:nvPr/>
           </p:nvSpPr>
@@ -16916,13 +15806,7 @@
         </p:sp>
         <p:sp>
           <p:nvSpPr>
-            <p:cNvPr id="45" name="자유형: 도형 44">
-              <a:extLst>
-                <a:ext uri="{FF2B5EF4-FFF2-40B4-BE49-F238E27FC236}">
-                  <a16:creationId xmlns:a16="http://schemas.microsoft.com/office/drawing/2014/main" id="{ECDA46BB-F15F-48C5-A5B0-FC7D25FD1ED3}"/>
-                </a:ext>
-              </a:extLst>
-            </p:cNvPr>
+            <p:cNvPr id="45" name="자유형: 도형 44"/>
             <p:cNvSpPr/>
             <p:nvPr/>
           </p:nvSpPr>
@@ -17105,13 +15989,7 @@
         </p:sp>
         <p:sp>
           <p:nvSpPr>
-            <p:cNvPr id="46" name="자유형: 도형 45">
-              <a:extLst>
-                <a:ext uri="{FF2B5EF4-FFF2-40B4-BE49-F238E27FC236}">
-                  <a16:creationId xmlns:a16="http://schemas.microsoft.com/office/drawing/2014/main" id="{07402D72-B79E-49FA-81F4-9C77347C7083}"/>
-                </a:ext>
-              </a:extLst>
-            </p:cNvPr>
+            <p:cNvPr id="46" name="자유형: 도형 45"/>
             <p:cNvSpPr/>
             <p:nvPr/>
           </p:nvSpPr>
@@ -17201,13 +16079,7 @@
         </p:sp>
         <p:sp>
           <p:nvSpPr>
-            <p:cNvPr id="47" name="자유형: 도형 46">
-              <a:extLst>
-                <a:ext uri="{FF2B5EF4-FFF2-40B4-BE49-F238E27FC236}">
-                  <a16:creationId xmlns:a16="http://schemas.microsoft.com/office/drawing/2014/main" id="{0BA73866-E055-4115-90B7-1406FBCA9CC0}"/>
-                </a:ext>
-              </a:extLst>
-            </p:cNvPr>
+            <p:cNvPr id="47" name="자유형: 도형 46"/>
             <p:cNvSpPr/>
             <p:nvPr/>
           </p:nvSpPr>
@@ -17447,13 +16319,7 @@
         </p:sp>
         <p:sp>
           <p:nvSpPr>
-            <p:cNvPr id="48" name="자유형: 도형 47">
-              <a:extLst>
-                <a:ext uri="{FF2B5EF4-FFF2-40B4-BE49-F238E27FC236}">
-                  <a16:creationId xmlns:a16="http://schemas.microsoft.com/office/drawing/2014/main" id="{42BC82EE-13C6-4040-8E52-9BCA40268984}"/>
-                </a:ext>
-              </a:extLst>
-            </p:cNvPr>
+            <p:cNvPr id="48" name="자유형: 도형 47"/>
             <p:cNvSpPr/>
             <p:nvPr/>
           </p:nvSpPr>
@@ -17633,13 +16499,7 @@
         </p:sp>
         <p:sp>
           <p:nvSpPr>
-            <p:cNvPr id="49" name="자유형: 도형 48">
-              <a:extLst>
-                <a:ext uri="{FF2B5EF4-FFF2-40B4-BE49-F238E27FC236}">
-                  <a16:creationId xmlns:a16="http://schemas.microsoft.com/office/drawing/2014/main" id="{EEE430F4-E7CE-4C12-BE1C-B5BBD658BD3F}"/>
-                </a:ext>
-              </a:extLst>
-            </p:cNvPr>
+            <p:cNvPr id="49" name="자유형: 도형 48"/>
             <p:cNvSpPr/>
             <p:nvPr/>
           </p:nvSpPr>
@@ -17789,13 +16649,7 @@
         </p:sp>
         <p:sp>
           <p:nvSpPr>
-            <p:cNvPr id="50" name="자유형: 도형 49">
-              <a:extLst>
-                <a:ext uri="{FF2B5EF4-FFF2-40B4-BE49-F238E27FC236}">
-                  <a16:creationId xmlns:a16="http://schemas.microsoft.com/office/drawing/2014/main" id="{FC219B5A-CCC1-4DCB-A760-103C33A89470}"/>
-                </a:ext>
-              </a:extLst>
-            </p:cNvPr>
+            <p:cNvPr id="50" name="자유형: 도형 49"/>
             <p:cNvSpPr/>
             <p:nvPr/>
           </p:nvSpPr>
@@ -18025,11 +16879,6 @@
         </p:sp>
       </p:grpSp>
     </p:spTree>
-    <p:extLst>
-      <p:ext uri="{BB962C8B-B14F-4D97-AF65-F5344CB8AC3E}">
-        <p14:creationId xmlns:p14="http://schemas.microsoft.com/office/powerpoint/2010/main" val="1727381668"/>
-      </p:ext>
-    </p:extLst>
   </p:cSld>
   <p:clrMapOvr>
     <a:masterClrMapping/>
@@ -18056,13 +16905,7 @@
       </p:grpSpPr>
       <p:sp>
         <p:nvSpPr>
-          <p:cNvPr id="12" name="TextBox 11">
-            <a:extLst>
-              <a:ext uri="{FF2B5EF4-FFF2-40B4-BE49-F238E27FC236}">
-                <a16:creationId xmlns:a16="http://schemas.microsoft.com/office/drawing/2014/main" id="{5390F579-2262-44ED-AD37-A6B78EB88618}"/>
-              </a:ext>
-            </a:extLst>
-          </p:cNvPr>
+          <p:cNvPr id="12" name="TextBox 11"/>
           <p:cNvSpPr txBox="1"/>
           <p:nvPr/>
         </p:nvSpPr>
@@ -18089,15 +16932,15 @@
             </a:pPr>
             <a:r>
               <a:rPr lang="ko-KR" altLang="en-US" sz="3200" b="1" dirty="0" err="1">
-                <a:latin typeface="Microsoft YaHei" panose="020B0503020204020204" pitchFamily="34" charset="-122"/>
-                <a:cs typeface="Arial" pitchFamily="34" charset="0"/>
+                <a:latin typeface="微软雅黑" panose="020B0503020204020204" pitchFamily="34" charset="-122"/>
+                <a:cs typeface="Arial" panose="020B0604020202020204" pitchFamily="34" charset="0"/>
               </a:rPr>
               <a:t>访问官网</a:t>
             </a:r>
             <a:endParaRPr lang="en-US" altLang="ko-KR" sz="3200" b="1" dirty="0">
-              <a:latin typeface="Microsoft YaHei" panose="020B0503020204020204" pitchFamily="34" charset="-122"/>
-              <a:ea typeface="Microsoft YaHei" panose="020B0503020204020204" pitchFamily="34" charset="-122"/>
-              <a:cs typeface="Arial" pitchFamily="34" charset="0"/>
+              <a:latin typeface="微软雅黑" panose="020B0503020204020204" pitchFamily="34" charset="-122"/>
+              <a:ea typeface="微软雅黑" panose="020B0503020204020204" pitchFamily="34" charset="-122"/>
+              <a:cs typeface="Arial" panose="020B0604020202020204" pitchFamily="34" charset="0"/>
             </a:endParaRPr>
           </a:p>
           <a:p>
@@ -18108,8 +16951,8 @@
             </a:pPr>
             <a:r>
               <a:rPr lang="ko-KR" altLang="en-US" sz="3200" b="1" dirty="0" err="1">
-                <a:latin typeface="Microsoft YaHei" panose="020B0503020204020204" pitchFamily="34" charset="-122"/>
-                <a:cs typeface="Arial" pitchFamily="34" charset="0"/>
+                <a:latin typeface="微软雅黑" panose="020B0503020204020204" pitchFamily="34" charset="-122"/>
+                <a:cs typeface="Arial" panose="020B0604020202020204" pitchFamily="34" charset="0"/>
               </a:rPr>
               <a:t>获取</a:t>
             </a:r>
@@ -18118,8 +16961,8 @@
                 <a:solidFill>
                   <a:schemeClr val="accent3"/>
                 </a:solidFill>
-                <a:latin typeface="Microsoft YaHei" panose="020B0503020204020204" pitchFamily="34" charset="-122"/>
-                <a:cs typeface="Arial" pitchFamily="34" charset="0"/>
+                <a:latin typeface="微软雅黑" panose="020B0503020204020204" pitchFamily="34" charset="-122"/>
+                <a:cs typeface="Arial" panose="020B0604020202020204" pitchFamily="34" charset="0"/>
               </a:rPr>
               <a:t>更新</a:t>
             </a:r>
@@ -18127,22 +16970,16 @@
               <a:solidFill>
                 <a:schemeClr val="accent3"/>
               </a:solidFill>
-              <a:latin typeface="Microsoft YaHei" panose="020B0503020204020204" pitchFamily="34" charset="-122"/>
-              <a:ea typeface="Microsoft YaHei" panose="020B0503020204020204" pitchFamily="34" charset="-122"/>
-              <a:cs typeface="Arial" pitchFamily="34" charset="0"/>
+              <a:latin typeface="微软雅黑" panose="020B0503020204020204" pitchFamily="34" charset="-122"/>
+              <a:ea typeface="微软雅黑" panose="020B0503020204020204" pitchFamily="34" charset="-122"/>
+              <a:cs typeface="Arial" panose="020B0604020202020204" pitchFamily="34" charset="0"/>
             </a:endParaRPr>
           </a:p>
         </p:txBody>
       </p:sp>
       <p:grpSp>
         <p:nvGrpSpPr>
-          <p:cNvPr id="74" name="组合 73">
-            <a:extLst>
-              <a:ext uri="{FF2B5EF4-FFF2-40B4-BE49-F238E27FC236}">
-                <a16:creationId xmlns:a16="http://schemas.microsoft.com/office/drawing/2014/main" id="{6E9AE2EE-12BF-6111-5A2F-8241A24DB224}"/>
-              </a:ext>
-            </a:extLst>
-          </p:cNvPr>
+          <p:cNvPr id="74" name="组合 73"/>
           <p:cNvGrpSpPr/>
           <p:nvPr/>
         </p:nvGrpSpPr>
@@ -18156,13 +16993,7 @@
         </p:grpSpPr>
         <p:grpSp>
           <p:nvGrpSpPr>
-            <p:cNvPr id="52" name="그룹 3">
-              <a:extLst>
-                <a:ext uri="{FF2B5EF4-FFF2-40B4-BE49-F238E27FC236}">
-                  <a16:creationId xmlns:a16="http://schemas.microsoft.com/office/drawing/2014/main" id="{31C07D38-4F78-E973-3C55-2ED763507E04}"/>
-                </a:ext>
-              </a:extLst>
-            </p:cNvPr>
+            <p:cNvPr id="52" name="그룹 3"/>
             <p:cNvGrpSpPr/>
             <p:nvPr/>
           </p:nvGrpSpPr>
@@ -18181,13 +17012,7 @@
           </p:grpSpPr>
           <p:sp>
             <p:nvSpPr>
-              <p:cNvPr id="65" name="사각형: 둥근 모서리 16">
-                <a:extLst>
-                  <a:ext uri="{FF2B5EF4-FFF2-40B4-BE49-F238E27FC236}">
-                    <a16:creationId xmlns:a16="http://schemas.microsoft.com/office/drawing/2014/main" id="{854A98C5-0DC6-E90E-7E45-645A92A584A2}"/>
-                  </a:ext>
-                </a:extLst>
-              </p:cNvPr>
+              <p:cNvPr id="65" name="사각형: 둥근 모서리 16"/>
               <p:cNvSpPr/>
               <p:nvPr/>
             </p:nvSpPr>
@@ -18233,13 +17058,7 @@
           </p:sp>
           <p:sp>
             <p:nvSpPr>
-              <p:cNvPr id="66" name="사각형: 둥근 모서리 17">
-                <a:extLst>
-                  <a:ext uri="{FF2B5EF4-FFF2-40B4-BE49-F238E27FC236}">
-                    <a16:creationId xmlns:a16="http://schemas.microsoft.com/office/drawing/2014/main" id="{F450FF5B-8C33-3CF0-0D45-D8D0C3B7A0F0}"/>
-                  </a:ext>
-                </a:extLst>
-              </p:cNvPr>
+              <p:cNvPr id="66" name="사각형: 둥근 모서리 17"/>
               <p:cNvSpPr/>
               <p:nvPr/>
             </p:nvSpPr>
@@ -18285,13 +17104,7 @@
           </p:sp>
           <p:sp>
             <p:nvSpPr>
-              <p:cNvPr id="67" name="사각형: 둥근 모서리 18">
-                <a:extLst>
-                  <a:ext uri="{FF2B5EF4-FFF2-40B4-BE49-F238E27FC236}">
-                    <a16:creationId xmlns:a16="http://schemas.microsoft.com/office/drawing/2014/main" id="{6CFB7342-59E3-AB6C-9AA9-457B4576B288}"/>
-                  </a:ext>
-                </a:extLst>
-              </p:cNvPr>
+              <p:cNvPr id="67" name="사각형: 둥근 모서리 18"/>
               <p:cNvSpPr/>
               <p:nvPr/>
             </p:nvSpPr>
@@ -18338,13 +17151,7 @@
         </p:grpSp>
         <p:grpSp>
           <p:nvGrpSpPr>
-            <p:cNvPr id="53" name="그룹 4">
-              <a:extLst>
-                <a:ext uri="{FF2B5EF4-FFF2-40B4-BE49-F238E27FC236}">
-                  <a16:creationId xmlns:a16="http://schemas.microsoft.com/office/drawing/2014/main" id="{481560A7-4FB0-8D82-92F0-C23F47C65DC2}"/>
-                </a:ext>
-              </a:extLst>
-            </p:cNvPr>
+            <p:cNvPr id="53" name="그룹 4"/>
             <p:cNvGrpSpPr/>
             <p:nvPr/>
           </p:nvGrpSpPr>
@@ -18363,13 +17170,7 @@
           </p:grpSpPr>
           <p:sp>
             <p:nvSpPr>
-              <p:cNvPr id="62" name="사각형: 둥근 모서리 13">
-                <a:extLst>
-                  <a:ext uri="{FF2B5EF4-FFF2-40B4-BE49-F238E27FC236}">
-                    <a16:creationId xmlns:a16="http://schemas.microsoft.com/office/drawing/2014/main" id="{DFDD9521-5C60-9F6A-03EC-2BE622CEFCFE}"/>
-                  </a:ext>
-                </a:extLst>
-              </p:cNvPr>
+              <p:cNvPr id="62" name="사각형: 둥근 모서리 13"/>
               <p:cNvSpPr/>
               <p:nvPr/>
             </p:nvSpPr>
@@ -18415,13 +17216,7 @@
           </p:sp>
           <p:sp>
             <p:nvSpPr>
-              <p:cNvPr id="63" name="사각형: 둥근 모서리 14">
-                <a:extLst>
-                  <a:ext uri="{FF2B5EF4-FFF2-40B4-BE49-F238E27FC236}">
-                    <a16:creationId xmlns:a16="http://schemas.microsoft.com/office/drawing/2014/main" id="{99A66EB7-D25C-8442-028E-59FDDB5762F1}"/>
-                  </a:ext>
-                </a:extLst>
-              </p:cNvPr>
+              <p:cNvPr id="63" name="사각형: 둥근 모서리 14"/>
               <p:cNvSpPr/>
               <p:nvPr/>
             </p:nvSpPr>
@@ -18467,13 +17262,7 @@
           </p:sp>
           <p:sp>
             <p:nvSpPr>
-              <p:cNvPr id="64" name="사각형: 둥근 모서리 15">
-                <a:extLst>
-                  <a:ext uri="{FF2B5EF4-FFF2-40B4-BE49-F238E27FC236}">
-                    <a16:creationId xmlns:a16="http://schemas.microsoft.com/office/drawing/2014/main" id="{D00E61EE-C309-321E-38E1-5072B83BC976}"/>
-                  </a:ext>
-                </a:extLst>
-              </p:cNvPr>
+              <p:cNvPr id="64" name="사각형: 둥근 모서리 15"/>
               <p:cNvSpPr/>
               <p:nvPr/>
             </p:nvSpPr>
@@ -18520,13 +17309,7 @@
         </p:grpSp>
         <p:grpSp>
           <p:nvGrpSpPr>
-            <p:cNvPr id="54" name="그룹 5">
-              <a:extLst>
-                <a:ext uri="{FF2B5EF4-FFF2-40B4-BE49-F238E27FC236}">
-                  <a16:creationId xmlns:a16="http://schemas.microsoft.com/office/drawing/2014/main" id="{9370FE2F-5E78-1C2A-FC3A-A1DB33C7F655}"/>
-                </a:ext>
-              </a:extLst>
-            </p:cNvPr>
+            <p:cNvPr id="54" name="그룹 5"/>
             <p:cNvGrpSpPr/>
             <p:nvPr/>
           </p:nvGrpSpPr>
@@ -18545,13 +17328,7 @@
           </p:grpSpPr>
           <p:sp>
             <p:nvSpPr>
-              <p:cNvPr id="59" name="사각형: 둥근 모서리 10">
-                <a:extLst>
-                  <a:ext uri="{FF2B5EF4-FFF2-40B4-BE49-F238E27FC236}">
-                    <a16:creationId xmlns:a16="http://schemas.microsoft.com/office/drawing/2014/main" id="{74ECDAF6-A84E-AC4C-FD82-445A6EB493BC}"/>
-                  </a:ext>
-                </a:extLst>
-              </p:cNvPr>
+              <p:cNvPr id="59" name="사각형: 둥근 모서리 10"/>
               <p:cNvSpPr/>
               <p:nvPr/>
             </p:nvSpPr>
@@ -18597,13 +17374,7 @@
           </p:sp>
           <p:sp>
             <p:nvSpPr>
-              <p:cNvPr id="60" name="사각형: 둥근 모서리 11">
-                <a:extLst>
-                  <a:ext uri="{FF2B5EF4-FFF2-40B4-BE49-F238E27FC236}">
-                    <a16:creationId xmlns:a16="http://schemas.microsoft.com/office/drawing/2014/main" id="{7D8FE982-9687-7709-67AC-05DD268546D6}"/>
-                  </a:ext>
-                </a:extLst>
-              </p:cNvPr>
+              <p:cNvPr id="60" name="사각형: 둥근 모서리 11"/>
               <p:cNvSpPr/>
               <p:nvPr/>
             </p:nvSpPr>
@@ -18649,13 +17420,7 @@
           </p:sp>
           <p:sp>
             <p:nvSpPr>
-              <p:cNvPr id="61" name="사각형: 둥근 모서리 12">
-                <a:extLst>
-                  <a:ext uri="{FF2B5EF4-FFF2-40B4-BE49-F238E27FC236}">
-                    <a16:creationId xmlns:a16="http://schemas.microsoft.com/office/drawing/2014/main" id="{8775E14D-1D40-C562-1958-299E1BBBA9F0}"/>
-                  </a:ext>
-                </a:extLst>
-              </p:cNvPr>
+              <p:cNvPr id="61" name="사각형: 둥근 모서리 12"/>
               <p:cNvSpPr/>
               <p:nvPr/>
             </p:nvSpPr>
@@ -18703,13 +17468,7 @@
       </p:grpSp>
       <p:sp>
         <p:nvSpPr>
-          <p:cNvPr id="71" name="Rounded Rectangle 68">
-            <a:extLst>
-              <a:ext uri="{FF2B5EF4-FFF2-40B4-BE49-F238E27FC236}">
-                <a16:creationId xmlns:a16="http://schemas.microsoft.com/office/drawing/2014/main" id="{CC9EC982-27BE-3EC7-9C29-CA2AB2A004C2}"/>
-              </a:ext>
-            </a:extLst>
-          </p:cNvPr>
+          <p:cNvPr id="71" name="Rounded Rectangle 68"/>
           <p:cNvSpPr>
             <a:spLocks noChangeAspect="1"/>
           </p:cNvSpPr>
@@ -18767,13 +17526,7 @@
       </p:sp>
       <p:sp>
         <p:nvSpPr>
-          <p:cNvPr id="75" name="Rectangle 7">
-            <a:extLst>
-              <a:ext uri="{FF2B5EF4-FFF2-40B4-BE49-F238E27FC236}">
-                <a16:creationId xmlns:a16="http://schemas.microsoft.com/office/drawing/2014/main" id="{2FD14B10-BD3A-D868-F29D-4348A83682A2}"/>
-              </a:ext>
-            </a:extLst>
-          </p:cNvPr>
+          <p:cNvPr id="75" name="Rectangle 7"/>
           <p:cNvSpPr>
             <a:spLocks noChangeAspect="1"/>
           </p:cNvSpPr>
@@ -18934,9 +17687,6 @@
         </p:style>
         <p:txBody>
           <a:bodyPr rot="0" spcFirstLastPara="0" vertOverflow="overflow" horzOverflow="overflow" vert="horz" wrap="square" lIns="91440" tIns="45720" rIns="91440" bIns="45720" numCol="1" spcCol="0" rtlCol="0" fromWordArt="0" anchor="ctr" anchorCtr="0" forceAA="0" compatLnSpc="1">
-            <a:prstTxWarp prst="textNoShape">
-              <a:avLst/>
-            </a:prstTxWarp>
             <a:noAutofit/>
           </a:bodyPr>
           <a:lstStyle/>
@@ -18947,11 +17697,6 @@
         </p:txBody>
       </p:sp>
     </p:spTree>
-    <p:extLst>
-      <p:ext uri="{BB962C8B-B14F-4D97-AF65-F5344CB8AC3E}">
-        <p14:creationId xmlns:p14="http://schemas.microsoft.com/office/powerpoint/2010/main" val="3076967075"/>
-      </p:ext>
-    </p:extLst>
   </p:cSld>
   <p:clrMapOvr>
     <a:masterClrMapping/>
@@ -19150,8 +17895,6 @@
       </a:bgFillStyleLst>
     </a:fmtScheme>
   </a:themeElements>
-  <a:objectDefaults/>
-  <a:extraClrSchemeLst/>
   <a:extLst>
     <a:ext uri="{05A4C25C-085E-4340-85A3-A5531E510DB2}">
       <thm15:themeFamily xmlns:thm15="http://schemas.microsoft.com/office/thememl/2012/main" name="Office Theme" id="{62F939B6-93AF-4DB8-9C6B-D6C7DFDC589F}" vid="{4A3C46E8-61CC-4603-A589-7422A47A8E4A}"/>
@@ -19351,8 +18094,6 @@
       </a:bgFillStyleLst>
     </a:fmtScheme>
   </a:themeElements>
-  <a:objectDefaults/>
-  <a:extraClrSchemeLst/>
   <a:extLst>
     <a:ext uri="{05A4C25C-085E-4340-85A3-A5531E510DB2}">
       <thm15:themeFamily xmlns:thm15="http://schemas.microsoft.com/office/thememl/2012/main" name="Office Theme" id="{62F939B6-93AF-4DB8-9C6B-D6C7DFDC589F}" vid="{4A3C46E8-61CC-4603-A589-7422A47A8E4A}"/>
@@ -19404,7 +18145,7 @@
     </a:clrScheme>
     <a:fontScheme name="Office">
       <a:majorFont>
-        <a:latin typeface="Calibri Light" panose="020F0302020204030204"/>
+        <a:latin typeface="Calibri Light"/>
         <a:ea typeface=""/>
         <a:cs typeface=""/>
         <a:font script="Jpan" typeface="游ゴシック Light"/>
@@ -19437,26 +18178,9 @@
         <a:font script="Viet" typeface="Times New Roman"/>
         <a:font script="Uigh" typeface="Microsoft Uighur"/>
         <a:font script="Geor" typeface="Sylfaen"/>
-        <a:font script="Armn" typeface="Arial"/>
-        <a:font script="Bugi" typeface="Leelawadee UI"/>
-        <a:font script="Bopo" typeface="Microsoft JhengHei"/>
-        <a:font script="Java" typeface="Javanese Text"/>
-        <a:font script="Lisu" typeface="Segoe UI"/>
-        <a:font script="Mymr" typeface="Myanmar Text"/>
-        <a:font script="Nkoo" typeface="Ebrima"/>
-        <a:font script="Olck" typeface="Nirmala UI"/>
-        <a:font script="Osma" typeface="Ebrima"/>
-        <a:font script="Phag" typeface="Phagspa"/>
-        <a:font script="Syrn" typeface="Estrangelo Edessa"/>
-        <a:font script="Syrj" typeface="Estrangelo Edessa"/>
-        <a:font script="Syre" typeface="Estrangelo Edessa"/>
-        <a:font script="Sora" typeface="Nirmala UI"/>
-        <a:font script="Tale" typeface="Microsoft Tai Le"/>
-        <a:font script="Talu" typeface="Microsoft New Tai Lue"/>
-        <a:font script="Tfng" typeface="Ebrima"/>
       </a:majorFont>
       <a:minorFont>
-        <a:latin typeface="Calibri" panose="020F0502020204030204"/>
+        <a:latin typeface="Calibri"/>
         <a:ea typeface=""/>
         <a:cs typeface=""/>
         <a:font script="Jpan" typeface="游ゴシック"/>
@@ -19489,23 +18213,6 @@
         <a:font script="Viet" typeface="Arial"/>
         <a:font script="Uigh" typeface="Microsoft Uighur"/>
         <a:font script="Geor" typeface="Sylfaen"/>
-        <a:font script="Armn" typeface="Arial"/>
-        <a:font script="Bugi" typeface="Leelawadee UI"/>
-        <a:font script="Bopo" typeface="Microsoft JhengHei"/>
-        <a:font script="Java" typeface="Javanese Text"/>
-        <a:font script="Lisu" typeface="Segoe UI"/>
-        <a:font script="Mymr" typeface="Myanmar Text"/>
-        <a:font script="Nkoo" typeface="Ebrima"/>
-        <a:font script="Olck" typeface="Nirmala UI"/>
-        <a:font script="Osma" typeface="Ebrima"/>
-        <a:font script="Phag" typeface="Phagspa"/>
-        <a:font script="Syrn" typeface="Estrangelo Edessa"/>
-        <a:font script="Syrj" typeface="Estrangelo Edessa"/>
-        <a:font script="Syre" typeface="Estrangelo Edessa"/>
-        <a:font script="Sora" typeface="Nirmala UI"/>
-        <a:font script="Tale" typeface="Microsoft Tai Le"/>
-        <a:font script="Talu" typeface="Microsoft New Tai Lue"/>
-        <a:font script="Tfng" typeface="Ebrima"/>
       </a:minorFont>
     </a:fontScheme>
     <a:fmtScheme name="Office">
@@ -19646,8 +18353,6 @@
       </a:bgFillStyleLst>
     </a:fmtScheme>
   </a:themeElements>
-  <a:objectDefaults/>
-  <a:extraClrSchemeLst/>
   <a:extLst>
     <a:ext uri="{05A4C25C-085E-4340-85A3-A5531E510DB2}">
       <thm15:themeFamily xmlns:thm15="http://schemas.microsoft.com/office/thememl/2012/main" name="Office Theme" id="{62F939B6-93AF-4DB8-9C6B-D6C7DFDC589F}" vid="{4A3C46E8-61CC-4603-A589-7422A47A8E4A}"/>
